--- a/人民城市的上海实践.pptx
+++ b/人民城市的上海实践.pptx
@@ -603,11 +603,7 @@
               <a:t>15分钟讲述取舍：每个例子一句，承接公共服务，同时为末尾数据透明作伏笔。</a:t>
             </a:r>
           </a:p>
-          <a:p xmlns:a="http://schemas.openxmlformats.org/drawingml/2006/main">
-            <a:r>
-              <a:t/>
-            </a:r>
-          </a:p>
+          <a:p xmlns:a="http://schemas.openxmlformats.org/drawingml/2006/main"/>
           <a:p xmlns:a="http://schemas.openxmlformats.org/drawingml/2006/main">
             <a:r>
               <a:t>讲稿原文</a:t>
@@ -615,14 +611,15 @@
           </a:p>
           <a:p xmlns:a="http://schemas.openxmlformats.org/drawingml/2006/main">
             <a:r>
-              <a:t/>
-            </a:r>
-          </a:p>
-          <a:p xmlns:a="http://schemas.openxmlformats.org/drawingml/2006/main">
-            <a:r>
-              <a:t/>
-            </a:r>
-          </a:p>
+              <a:t>上海这几年也在改办事的过程。"一网通办"接了 3,800 多项服务，实际网办率 89.53%，很多事已经不用再去窗口排队。</a:t>
+            </a:r>
+          </a:p>
+          <a:p xmlns:a="http://schemas.openxmlformats.org/drawingml/2006/main">
+            <a:r>
+              <a:t>建设上，居民也插得上话。普陀区泰山人民坊改造，动工前开了 12 场座谈会，收回 3,826 份问卷；方案拿出来，又开了 5 轮专题论证；建成以后，还请居民开了 3 场评议会。从提需求、定方案到建成后的评价，居民每一步都有发言的机会。</a:t>
+            </a:r>
+          </a:p>
+          <a:p xmlns:a="http://schemas.openxmlformats.org/drawingml/2006/main"/>
           <a:p xmlns:a="http://schemas.openxmlformats.org/drawingml/2006/main">
             <a:r>
               <a:t>数据来源与完整口径</a:t>
@@ -633,11 +630,7 @@
               <a:t>https://tjj.sh.gov.cn/tjgb/20260330/e0772941e8e041eaaad2df850b44ef98.html</a:t>
             </a:r>
           </a:p>
-          <a:p xmlns:a="http://schemas.openxmlformats.org/drawingml/2006/main">
-            <a:r>
-              <a:t/>
-            </a:r>
-          </a:p>
+          <a:p xmlns:a="http://schemas.openxmlformats.org/drawingml/2006/main"/>
           <a:p xmlns:a="http://schemas.openxmlformats.org/drawingml/2006/main">
             <a:r>
               <a:t>https://ghzyj.sh.gov.cn/gzdt/20251224/f5b8e34f5c834200910639b27717dfdf.html</a:t>
@@ -728,26 +721,14 @@
               <a:t>15分钟讲述取舍：挑两条摘录口播，其他留给观众阅读；用个人体验呼应前面的统计。</a:t>
             </a:r>
           </a:p>
-          <a:p xmlns:a="http://schemas.openxmlformats.org/drawingml/2006/main">
-            <a:r>
-              <a:t/>
-            </a:r>
-          </a:p>
+          <a:p xmlns:a="http://schemas.openxmlformats.org/drawingml/2006/main"/>
           <a:p xmlns:a="http://schemas.openxmlformats.org/drawingml/2006/main">
             <a:r>
               <a:t>讲稿原文</a:t>
             </a:r>
           </a:p>
-          <a:p xmlns:a="http://schemas.openxmlformats.org/drawingml/2006/main">
-            <a:r>
-              <a:t/>
-            </a:r>
-          </a:p>
-          <a:p xmlns:a="http://schemas.openxmlformats.org/drawingml/2006/main">
-            <a:r>
-              <a:t/>
-            </a:r>
-          </a:p>
+          <a:p xmlns:a="http://schemas.openxmlformats.org/drawingml/2006/main"/>
+          <a:p xmlns:a="http://schemas.openxmlformats.org/drawingml/2006/main"/>
           <a:p xmlns:a="http://schemas.openxmlformats.org/drawingml/2006/main">
             <a:r>
               <a:t>数据来源与完整口径</a:t>
@@ -755,17 +736,7 @@
           </a:p>
           <a:p xmlns:a="http://schemas.openxmlformats.org/drawingml/2006/main">
             <a:r>
-              <a:t>原始微信聊天：C:/Users/13816/Desktop/微信图片_2026-10-14_225120_217.jpg</a:t>
-            </a:r>
-          </a:p>
-          <a:p xmlns:a="http://schemas.openxmlformats.org/drawingml/2006/main">
-            <a:r>
-              <a:t/>
-            </a:r>
-          </a:p>
-          <a:p xmlns:a="http://schemas.openxmlformats.org/drawingml/2006/main">
-            <a:r>
-              <a:t>文字整理：C:/Users/13816/Desktop/城市生活体验访谈记录_2026年10月10日.docx</a:t>
+              <a:t>原始微信截图和访谈文字整理由组员保存。</a:t>
             </a:r>
           </a:p>
           <a:p xmlns:a="http://schemas.openxmlformats.org/drawingml/2006/main">
@@ -2043,1519 +2014,85 @@
               <a:t>答辩依据：data/data-table.md；script/口径表.md；script/答辩卡.md。</a:t>
             </a:r>
           </a:p>
-          <a:p xmlns:a="http://schemas.openxmlformats.org/drawingml/2006/main">
-            <a:r>
-              <a:t/>
-            </a:r>
-          </a:p>
-          <a:p xmlns:a="http://schemas.openxmlformats.org/drawingml/2006/main">
-            <a:r>
-              <a:t>{</a:t>
-            </a:r>
-          </a:p>
-          <a:p xmlns:a="http://schemas.openxmlformats.org/drawingml/2006/main">
-            <a:r>
-              <a:t>  "audited_at": "2026-10-17",</a:t>
-            </a:r>
-          </a:p>
-          <a:p xmlns:a="http://schemas.openxmlformats.org/drawingml/2006/main">
-            <a:r>
-              <a:t>  "read_only_repository": "C:/Users/13816/Documents/GitHub/people-city-pre",</a:t>
-            </a:r>
-          </a:p>
-          <a:p xmlns:a="http://schemas.openxmlformats.org/drawingml/2006/main">
-            <a:r>
-              <a:t>  "precedence": [</a:t>
-            </a:r>
-          </a:p>
-          <a:p xmlns:a="http://schemas.openxmlformats.org/drawingml/2006/main">
-            <a:r>
-              <a:t>    "用户2026-10-17最新补充",</a:t>
-            </a:r>
-          </a:p>
-          <a:p xmlns:a="http://schemas.openxmlformats.org/drawingml/2006/main">
-            <a:r>
-              <a:t>    "本次用户逐页修改要求",</a:t>
-            </a:r>
-          </a:p>
-          <a:p xmlns:a="http://schemas.openxmlformats.org/drawingml/2006/main">
-            <a:r>
-              <a:t>    "script/口径表.md与data/data-table.md最新修订段",</a:t>
-            </a:r>
-          </a:p>
-          <a:p xmlns:a="http://schemas.openxmlformats.org/drawingml/2006/main">
-            <a:r>
-              <a:t>    "script/讲稿.md正文",</a:t>
-            </a:r>
-          </a:p>
-          <a:p xmlns:a="http://schemas.openxmlformats.org/drawingml/2006/main">
-            <a:r>
-              <a:t>    "早期已作废段落"</a:t>
-            </a:r>
-          </a:p>
-          <a:p xmlns:a="http://schemas.openxmlformats.org/drawingml/2006/main">
-            <a:r>
-              <a:t>  ],</a:t>
-            </a:r>
-          </a:p>
-          <a:p xmlns:a="http://schemas.openxmlformats.org/drawingml/2006/main">
-            <a:r>
-              <a:t>  "no_total_score": true,</a:t>
-            </a:r>
-          </a:p>
-          <a:p xmlns:a="http://schemas.openxmlformats.org/drawingml/2006/main">
-            <a:r>
-              <a:t>  "comparisons": {</a:t>
-            </a:r>
-          </a:p>
-          <a:p xmlns:a="http://schemas.openxmlformats.org/drawingml/2006/main">
-            <a:r>
-              <a:t>    "shanghai": {</a:t>
-            </a:r>
-          </a:p>
-          <a:p xmlns:a="http://schemas.openxmlformats.org/drawingml/2006/main">
-            <a:r>
-              <a:t>      "area_km2": 6340.5,</a:t>
-            </a:r>
-          </a:p>
-          <a:p xmlns:a="http://schemas.openxmlformats.org/drawingml/2006/main">
-            <a:r>
-              <a:t>      "population": 24854100,</a:t>
-            </a:r>
-          </a:p>
-          <a:p xmlns:a="http://schemas.openxmlformats.org/drawingml/2006/main">
-            <a:r>
-              <a:t>      "population_year": 2025,</a:t>
-            </a:r>
-          </a:p>
-          <a:p xmlns:a="http://schemas.openxmlformats.org/drawingml/2006/main">
-            <a:r>
-              <a:t>      "scope": "上海全市",</a:t>
-            </a:r>
-          </a:p>
-          <a:p xmlns:a="http://schemas.openxmlformats.org/drawingml/2006/main">
-            <a:r>
-              <a:t>      "source": "https://tjj.sh.gov.cn/tjgb/20260330/e0772941e8e041eaaad2df850b44ef98.html"</a:t>
-            </a:r>
-          </a:p>
-          <a:p xmlns:a="http://schemas.openxmlformats.org/drawingml/2006/main">
-            <a:r>
-              <a:t>    },</a:t>
-            </a:r>
-          </a:p>
-          <a:p xmlns:a="http://schemas.openxmlformats.org/drawingml/2006/main">
-            <a:r>
-              <a:t>    "newyork": {</a:t>
-            </a:r>
-          </a:p>
-          <a:p xmlns:a="http://schemas.openxmlformats.org/drawingml/2006/main">
-            <a:r>
-              <a:t>      "area_km2": 778.2,</a:t>
-            </a:r>
-          </a:p>
-          <a:p xmlns:a="http://schemas.openxmlformats.org/drawingml/2006/main">
-            <a:r>
-              <a:t>      "population": 8584629,</a:t>
-            </a:r>
-          </a:p>
-          <a:p xmlns:a="http://schemas.openxmlformats.org/drawingml/2006/main">
-            <a:r>
-              <a:t>      "population_date": "2025-07-01",</a:t>
-            </a:r>
-          </a:p>
-          <a:p xmlns:a="http://schemas.openxmlformats.org/drawingml/2006/main">
-            <a:r>
-              <a:t>      "scope": "纽约市五区",</a:t>
-            </a:r>
-          </a:p>
-          <a:p xmlns:a="http://schemas.openxmlformats.org/drawingml/2006/main">
-            <a:r>
-              <a:t>      "sources": [</a:t>
-            </a:r>
-          </a:p>
-          <a:p xmlns:a="http://schemas.openxmlformats.org/drawingml/2006/main">
-            <a:r>
-              <a:t>        "https://www.health.ny.gov/statistics/vital_statistics/2022/table02.htm",</a:t>
-            </a:r>
-          </a:p>
-          <a:p xmlns:a="http://schemas.openxmlformats.org/drawingml/2006/main">
-            <a:r>
-              <a:t>        "https://www.nyc.gov/content/planning/pages/planning/population"</a:t>
-            </a:r>
-          </a:p>
-          <a:p xmlns:a="http://schemas.openxmlformats.org/drawingml/2006/main">
-            <a:r>
-              <a:t>      ]</a:t>
-            </a:r>
-          </a:p>
-          <a:p xmlns:a="http://schemas.openxmlformats.org/drawingml/2006/main">
-            <a:r>
-              <a:t>    },</a:t>
-            </a:r>
-          </a:p>
-          <a:p xmlns:a="http://schemas.openxmlformats.org/drawingml/2006/main">
-            <a:r>
-              <a:t>    "fx": {</a:t>
-            </a:r>
-          </a:p>
-          <a:p xmlns:a="http://schemas.openxmlformats.org/drawingml/2006/main">
-            <a:r>
-              <a:t>      "usd_cny": 6.733,</a:t>
-            </a:r>
-          </a:p>
-          <a:p xmlns:a="http://schemas.openxmlformats.org/drawingml/2006/main">
-            <a:r>
-              <a:t>      "date": "2026-10-09",</a:t>
-            </a:r>
-          </a:p>
-          <a:p xmlns:a="http://schemas.openxmlformats.org/drawingml/2006/main">
-            <a:r>
-              <a:t>      "source_quality": "香港电台转述中国外汇交易中心公告，表中未提供精确URL，只核对检索摘要"</a:t>
-            </a:r>
-          </a:p>
-          <a:p xmlns:a="http://schemas.openxmlformats.org/drawingml/2006/main">
-            <a:r>
-              <a:t>    },</a:t>
-            </a:r>
-          </a:p>
-          <a:p xmlns:a="http://schemas.openxmlformats.org/drawingml/2006/main">
-            <a:r>
-              <a:t>    "income": {</a:t>
-            </a:r>
-          </a:p>
-          <a:p xmlns:a="http://schemas.openxmlformats.org/drawingml/2006/main">
-            <a:r>
-              <a:t>      "nyc_household_median_usd": 81228,</a:t>
-            </a:r>
-          </a:p>
-          <a:p xmlns:a="http://schemas.openxmlformats.org/drawingml/2006/main">
-            <a:r>
-              <a:t>      "nyc_year": 2024,</a:t>
-            </a:r>
-          </a:p>
-          <a:p xmlns:a="http://schemas.openxmlformats.org/drawingml/2006/main">
-            <a:r>
-              <a:t>      "nyc_source": "https://rentguidelinesboard.cityofnewyork.us/wp-content/uploads/2026/04/2026-IA.pdf",</a:t>
-            </a:r>
-          </a:p>
-          <a:p xmlns:a="http://schemas.openxmlformats.org/drawingml/2006/main">
-            <a:r>
-              <a:t>      "shanghai_percapita_disposable_cny": 91987,</a:t>
-            </a:r>
-          </a:p>
-          <a:p xmlns:a="http://schemas.openxmlformats.org/drawingml/2006/main">
-            <a:r>
-              <a:t>      "shanghai_year": 2025,</a:t>
-            </a:r>
-          </a:p>
-          <a:p xmlns:a="http://schemas.openxmlformats.org/drawingml/2006/main">
-            <a:r>
-              <a:t>      "household_size": 2.24,</a:t>
-            </a:r>
-          </a:p>
-          <a:p xmlns:a="http://schemas.openxmlformats.org/drawingml/2006/main">
-            <a:r>
-              <a:t>      "shanghai_derived_household_cny": 206050.88,</a:t>
-            </a:r>
-          </a:p>
-          <a:p xmlns:a="http://schemas.openxmlformats.org/drawingml/2006/main">
-            <a:r>
-              <a:t>      "approx_ratio": 2.65,</a:t>
-            </a:r>
-          </a:p>
-          <a:p xmlns:a="http://schemas.openxmlformats.org/drawingml/2006/main">
-            <a:r>
-              <a:t>      "onslide": "家庭收入差约2.65倍（纽约约55万元，上海约20.6万元）",</a:t>
-            </a:r>
-          </a:p>
-          <a:p xmlns:a="http://schemas.openxmlformats.org/drawingml/2006/main">
-            <a:r>
-              <a:t>      "footnote": "纽约为税前户收入中位数；上海由人均可支配收入均值×家庭户规模估算。",</a:t>
-            </a:r>
-          </a:p>
-          <a:p xmlns:a="http://schemas.openxmlformats.org/drawingml/2006/main">
-            <a:r>
-              <a:t>      "shanghai_sources": [</a:t>
-            </a:r>
-          </a:p>
-          <a:p xmlns:a="http://schemas.openxmlformats.org/drawingml/2006/main">
-            <a:r>
-              <a:t>        "https://tjj.sh.gov.cn/ydsj71/20260120/39ae4cd58421478d897b739d83f39c10.html",</a:t>
-            </a:r>
-          </a:p>
-          <a:p xmlns:a="http://schemas.openxmlformats.org/drawingml/2006/main">
-            <a:r>
-              <a:t>        "https://tjj.sh.gov.cn/tjgb/20260630/b74619258aee4912a55a1da928b5be30.html"</a:t>
-            </a:r>
-          </a:p>
-          <a:p xmlns:a="http://schemas.openxmlformats.org/drawingml/2006/main">
-            <a:r>
-              <a:t>      ]</a:t>
-            </a:r>
-          </a:p>
-          <a:p xmlns:a="http://schemas.openxmlformats.org/drawingml/2006/main">
-            <a:r>
-              <a:t>    }</a:t>
-            </a:r>
-          </a:p>
-          <a:p xmlns:a="http://schemas.openxmlformats.org/drawingml/2006/main">
-            <a:r>
-              <a:t>  },</a:t>
-            </a:r>
-          </a:p>
-          <a:p xmlns:a="http://schemas.openxmlformats.org/drawingml/2006/main">
-            <a:r>
-              <a:t>  "opening_toilets": {</a:t>
-            </a:r>
-          </a:p>
-          <a:p xmlns:a="http://schemas.openxmlformats.org/drawingml/2006/main">
-            <a:r>
-              <a:t>    "count_shanghai_records": 8325,</a:t>
-            </a:r>
-          </a:p>
-          <a:p xmlns:a="http://schemas.openxmlformats.org/drawingml/2006/main">
-            <a:r>
-              <a:t>    "records_scope": "开放平台“城市设施-公共厕所”接口元数据；2020–2025时间范围，2026-09-21更新；有条件开放",</a:t>
-            </a:r>
-          </a:p>
-          <a:p xmlns:a="http://schemas.openxmlformats.org/drawingml/2006/main">
-            <a:r>
-              <a:t>    "shanghai_density_persons_per_record": 2985,</a:t>
-            </a:r>
-          </a:p>
-          <a:p xmlns:a="http://schemas.openxmlformats.org/drawingml/2006/main">
-            <a:r>
-              <a:t>    "nyc_total": 1064,</a:t>
-            </a:r>
-          </a:p>
-          <a:p xmlns:a="http://schemas.openxmlformats.org/drawingml/2006/main">
-            <a:r>
-              <a:t>    "nyc_operational": 973,</a:t>
-            </a:r>
-          </a:p>
-          <a:p xmlns:a="http://schemas.openxmlformats.org/drawingml/2006/main">
-            <a:r>
-              <a:t>    "nyc_operational_date": "2025-11",</a:t>
-            </a:r>
-          </a:p>
-          <a:p xmlns:a="http://schemas.openxmlformats.org/drawingml/2006/main">
-            <a:r>
-              <a:t>    "nyc_density_persons_per_operational": 8823,</a:t>
-            </a:r>
-          </a:p>
-          <a:p xmlns:a="http://schemas.openxmlformats.org/drawingml/2006/main">
-            <a:r>
-              <a:t>    "nyc_open_24h": 8,</a:t>
-            </a:r>
-          </a:p>
-          <a:p xmlns:a="http://schemas.openxmlformats.org/drawingml/2006/main">
-            <a:r>
-              <a:t>    "ratio_approx": 3,</a:t>
-            </a:r>
-          </a:p>
-          <a:p xmlns:a="http://schemas.openxmlformats.org/drawingml/2006/main">
-            <a:r>
-              <a:t>    "renovated_shanghai": 2631,</a:t>
-            </a:r>
-          </a:p>
-          <a:p xmlns:a="http://schemas.openxmlformats.org/drawingml/2006/main">
-            <a:r>
-              <a:t>    "third_toilets": "1200+",</a:t>
-            </a:r>
-          </a:p>
-          <a:p xmlns:a="http://schemas.openxmlformats.org/drawingml/2006/main">
-            <a:r>
-              <a:t>    "paper": "2600+",</a:t>
-            </a:r>
-          </a:p>
-          <a:p xmlns:a="http://schemas.openxmlformats.org/drawingml/2006/main">
-            <a:r>
-              <a:t>    "warm_water": "2000+",</a:t>
-            </a:r>
-          </a:p>
-          <a:p xmlns:a="http://schemas.openxmlformats.org/drawingml/2006/main">
-            <a:r>
-              <a:t>    "footnote": "上海为开放平台记录，纽约为市政运营公厕；只比较量级。",</a:t>
-            </a:r>
-          </a:p>
-          <a:p xmlns:a="http://schemas.openxmlformats.org/drawingml/2006/main">
-            <a:r>
-              <a:t>    "sources": [</a:t>
-            </a:r>
-          </a:p>
-          <a:p xmlns:a="http://schemas.openxmlformats.org/drawingml/2006/main">
-            <a:r>
-              <a:t>      "https://data.sh.gov.cn/",</a:t>
-            </a:r>
-          </a:p>
-          <a:p xmlns:a="http://schemas.openxmlformats.org/drawingml/2006/main">
-            <a:r>
-              <a:t>      "https://lhsr.sh.gov.cn/ywdt/20260401/00d7c161-8280-490c-a0da-d6c995e85058.html",</a:t>
-            </a:r>
-          </a:p>
-          <a:p xmlns:a="http://schemas.openxmlformats.org/drawingml/2006/main">
-            <a:r>
-              <a:t>      "https://lhsr.sh.gov.cn/ywdt/20251204/b016509f-60a6-46cd-83fa-fdab372175c7.html",</a:t>
-            </a:r>
-          </a:p>
-          <a:p xmlns:a="http://schemas.openxmlformats.org/drawingml/2006/main">
-            <a:r>
-              <a:t>      "https://council.nyc.gov/data/public-restroom-analysis/"</a:t>
-            </a:r>
-          </a:p>
-          <a:p xmlns:a="http://schemas.openxmlformats.org/drawingml/2006/main">
-            <a:r>
-              <a:t>    ],</a:t>
-            </a:r>
-          </a:p>
-          <a:p xmlns:a="http://schemas.openxmlformats.org/drawingml/2006/main">
-            <a:r>
-              <a:t>    "source_asset": "screenshots/sh31（平台数据集精确深链接原表未提供）",</a:t>
-            </a:r>
-          </a:p>
-          <a:p xmlns:a="http://schemas.openxmlformats.org/drawingml/2006/main">
-            <a:r>
-              <a:t>    "verdict": "不计分"</a:t>
-            </a:r>
-          </a:p>
-          <a:p xmlns:a="http://schemas.openxmlformats.org/drawingml/2006/main">
-            <a:r>
-              <a:t>  },</a:t>
-            </a:r>
-          </a:p>
-          <a:p xmlns:a="http://schemas.openxmlformats.org/drawingml/2006/main">
-            <a:r>
-              <a:t>  "score_items": [</a:t>
-            </a:r>
-          </a:p>
-          <a:p xmlns:a="http://schemas.openxmlformats.org/drawingml/2006/main">
-            <a:r>
-              <a:t>    {</a:t>
-            </a:r>
-          </a:p>
-          <a:p xmlns:a="http://schemas.openxmlformats.org/drawingml/2006/main">
-            <a:r>
-              <a:t>      "item": "住",</a:t>
-            </a:r>
-          </a:p>
-          <a:p xmlns:a="http://schemas.openxmlformats.org/drawingml/2006/main">
-            <a:r>
-              <a:t>      "winner": "上海",</a:t>
-            </a:r>
-          </a:p>
-          <a:p xmlns:a="http://schemas.openxmlformats.org/drawingml/2006/main">
-            <a:r>
-              <a:t>      "degree": "明显",</a:t>
-            </a:r>
-          </a:p>
-          <a:p xmlns:a="http://schemas.openxmlformats.org/drawingml/2006/main">
-            <a:r>
-              <a:t>      "shanghai": 59,</a:t>
-            </a:r>
-          </a:p>
-          <a:p xmlns:a="http://schemas.openxmlformats.org/drawingml/2006/main">
-            <a:r>
-              <a:t>      "newyork": 32.3,</a:t>
-            </a:r>
-          </a:p>
-          <a:p xmlns:a="http://schemas.openxmlformats.org/drawingml/2006/main">
-            <a:r>
-              <a:t>      "unit": "自有住房率%",</a:t>
-            </a:r>
-          </a:p>
-          <a:p xmlns:a="http://schemas.openxmlformats.org/drawingml/2006/main">
-            <a:r>
-              <a:t>      "years": "上海2020；纽约2023",</a:t>
-            </a:r>
-          </a:p>
-          <a:p xmlns:a="http://schemas.openxmlformats.org/drawingml/2006/main">
-            <a:r>
-              <a:t>      "footnote": "上海为七普长表家庭户，纽约为HVS已入住住房；分母与年份不同。",</a:t>
-            </a:r>
-          </a:p>
-          <a:p xmlns:a="http://schemas.openxmlformats.org/drawingml/2006/main">
-            <a:r>
-              <a:t>      "practice": "2025年筹措保租房7.4万套（间）、建设者之家床位3.2万张；加装电梯3295台。",</a:t>
-            </a:r>
-          </a:p>
-          <a:p xmlns:a="http://schemas.openxmlformats.org/drawingml/2006/main">
-            <a:r>
-              <a:t>      "sources": [</a:t>
-            </a:r>
-          </a:p>
-          <a:p xmlns:a="http://schemas.openxmlformats.org/drawingml/2006/main">
-            <a:r>
-              <a:t>        "https://tjj.sh.gov.cn/tjnj/2020rktjnj/BNJc-9-4.jpg",</a:t>
-            </a:r>
-          </a:p>
-          <a:p xmlns:a="http://schemas.openxmlformats.org/drawingml/2006/main">
-            <a:r>
-              <a:t>        "https://www.nyc.gov/assets/hpd/downloads/pdfs/about/2023%20NYCHVS%20Selected%20Initial%20Findings.pdf",</a:t>
-            </a:r>
-          </a:p>
-          <a:p xmlns:a="http://schemas.openxmlformats.org/drawingml/2006/main">
-            <a:r>
-              <a:t>        "https://tjj.sh.gov.cn/tjgb/20260330/e0772941e8e041eaaad2df850b44ef98.html"</a:t>
-            </a:r>
-          </a:p>
-          <a:p xmlns:a="http://schemas.openxmlformats.org/drawingml/2006/main">
-            <a:r>
-              <a:t>      ]</a:t>
-            </a:r>
-          </a:p>
-          <a:p xmlns:a="http://schemas.openxmlformats.org/drawingml/2006/main">
-            <a:r>
-              <a:t>    },</a:t>
-            </a:r>
-          </a:p>
-          <a:p xmlns:a="http://schemas.openxmlformats.org/drawingml/2006/main">
-            <a:r>
-              <a:t>    {</a:t>
-            </a:r>
-          </a:p>
-          <a:p xmlns:a="http://schemas.openxmlformats.org/drawingml/2006/main">
-            <a:r>
-              <a:t>      "item": "吃",</a:t>
-            </a:r>
-          </a:p>
-          <a:p xmlns:a="http://schemas.openxmlformats.org/drawingml/2006/main">
-            <a:r>
-              <a:t>      "winner": "纽约",</a:t>
-            </a:r>
-          </a:p>
-          <a:p xmlns:a="http://schemas.openxmlformats.org/drawingml/2006/main">
-            <a:r>
-              <a:t>      "degree": "稍胜",</a:t>
-            </a:r>
-          </a:p>
-          <a:p xmlns:a="http://schemas.openxmlformats.org/drawingml/2006/main">
-            <a:r>
-              <a:t>      "shanghai": 13550,</a:t>
-            </a:r>
-          </a:p>
-          <a:p xmlns:a="http://schemas.openxmlformats.org/drawingml/2006/main">
-            <a:r>
-              <a:t>      "newyork_state_usd": 9394,</a:t>
-            </a:r>
-          </a:p>
-          <a:p xmlns:a="http://schemas.openxmlformats.org/drawingml/2006/main">
-            <a:r>
-              <a:t>      "newyork_cny": 63249.802,</a:t>
-            </a:r>
-          </a:p>
-          <a:p xmlns:a="http://schemas.openxmlformats.org/drawingml/2006/main">
-            <a:r>
-              <a:t>      "ratio": 4.7,</a:t>
-            </a:r>
-          </a:p>
-          <a:p xmlns:a="http://schemas.openxmlformats.org/drawingml/2006/main">
-            <a:r>
-              <a:t>      "years": "纽约州2025；上海2024",</a:t>
-            </a:r>
-          </a:p>
-          <a:p xmlns:a="http://schemas.openxmlformats.org/drawingml/2006/main">
-            <a:r>
-              <a:t>      "footnote": "纽约州在家食品饮料＋餐饮住宿，上海食品烟酒；价格与分类差异使实际差距小于账面。",</a:t>
-            </a:r>
-          </a:p>
-          <a:p xmlns:a="http://schemas.openxmlformats.org/drawingml/2006/main">
-            <a:r>
-              <a:t>      "ny_components_usd": {</a:t>
-            </a:r>
-          </a:p>
-          <a:p xmlns:a="http://schemas.openxmlformats.org/drawingml/2006/main">
-            <a:r>
-              <a:t>        "at_home": 4389,</a:t>
-            </a:r>
-          </a:p>
-          <a:p xmlns:a="http://schemas.openxmlformats.org/drawingml/2006/main">
-            <a:r>
-              <a:t>        "dining_lodging": 5005</a:t>
-            </a:r>
-          </a:p>
-          <a:p xmlns:a="http://schemas.openxmlformats.org/drawingml/2006/main">
-            <a:r>
-              <a:t>      },</a:t>
-            </a:r>
-          </a:p>
-          <a:p xmlns:a="http://schemas.openxmlformats.org/drawingml/2006/main">
-            <a:r>
-              <a:t>      "sources": [</a:t>
-            </a:r>
-          </a:p>
-          <a:p xmlns:a="http://schemas.openxmlformats.org/drawingml/2006/main">
-            <a:r>
-              <a:t>        "https://apps.bea.gov/regional/zip/SAPCE.zip",</a:t>
-            </a:r>
-          </a:p>
-          <a:p xmlns:a="http://schemas.openxmlformats.org/drawingml/2006/main">
-            <a:r>
-              <a:t>        "https://tjj.sh.gov.cn/tjnj/2025tjnj/C0905.htm"</a:t>
-            </a:r>
-          </a:p>
-          <a:p xmlns:a="http://schemas.openxmlformats.org/drawingml/2006/main">
-            <a:r>
-              <a:t>      ]</a:t>
-            </a:r>
-          </a:p>
-          <a:p xmlns:a="http://schemas.openxmlformats.org/drawingml/2006/main">
-            <a:r>
-              <a:t>    },</a:t>
-            </a:r>
-          </a:p>
-          <a:p xmlns:a="http://schemas.openxmlformats.org/drawingml/2006/main">
-            <a:r>
-              <a:t>    {</a:t>
-            </a:r>
-          </a:p>
-          <a:p xmlns:a="http://schemas.openxmlformats.org/drawingml/2006/main">
-            <a:r>
-              <a:t>      "item": "穿",</a:t>
-            </a:r>
-          </a:p>
-          <a:p xmlns:a="http://schemas.openxmlformats.org/drawingml/2006/main">
-            <a:r>
-              <a:t>      "winner": "纽约",</a:t>
-            </a:r>
-          </a:p>
-          <a:p xmlns:a="http://schemas.openxmlformats.org/drawingml/2006/main">
-            <a:r>
-              <a:t>      "degree": "压倒性",</a:t>
-            </a:r>
-          </a:p>
-          <a:p xmlns:a="http://schemas.openxmlformats.org/drawingml/2006/main">
-            <a:r>
-              <a:t>      "shanghai_cny": 1936,</a:t>
-            </a:r>
-          </a:p>
-          <a:p xmlns:a="http://schemas.openxmlformats.org/drawingml/2006/main">
-            <a:r>
-              <a:t>      "newyork_state_usd": 1947,</a:t>
-            </a:r>
-          </a:p>
-          <a:p xmlns:a="http://schemas.openxmlformats.org/drawingml/2006/main">
-            <a:r>
-              <a:t>      "newyork_cny": 13109.151,</a:t>
-            </a:r>
-          </a:p>
-          <a:p xmlns:a="http://schemas.openxmlformats.org/drawingml/2006/main">
-            <a:r>
-              <a:t>      "ratio": 6.8,</a:t>
-            </a:r>
-          </a:p>
-          <a:p xmlns:a="http://schemas.openxmlformats.org/drawingml/2006/main">
-            <a:r>
-              <a:t>      "years": "纽约州2025；上海2024",</a:t>
-            </a:r>
-          </a:p>
-          <a:p xmlns:a="http://schemas.openxmlformats.org/drawingml/2006/main">
-            <a:r>
-              <a:t>      "footnote": "纽约使用州级数据；按2026-10-09汇率换算。",</a:t>
-            </a:r>
-          </a:p>
-          <a:p xmlns:a="http://schemas.openxmlformats.org/drawingml/2006/main">
-            <a:r>
-              <a:t>      "sources": [</a:t>
-            </a:r>
-          </a:p>
-          <a:p xmlns:a="http://schemas.openxmlformats.org/drawingml/2006/main">
-            <a:r>
-              <a:t>        "https://apps.bea.gov/regional/zip/SAPCE.zip",</a:t>
-            </a:r>
-          </a:p>
-          <a:p xmlns:a="http://schemas.openxmlformats.org/drawingml/2006/main">
-            <a:r>
-              <a:t>        "https://tjj.sh.gov.cn/tjnj/2025tjnj/C0905.htm"</a:t>
-            </a:r>
-          </a:p>
-          <a:p xmlns:a="http://schemas.openxmlformats.org/drawingml/2006/main">
-            <a:r>
-              <a:t>      ]</a:t>
-            </a:r>
-          </a:p>
-          <a:p xmlns:a="http://schemas.openxmlformats.org/drawingml/2006/main">
-            <a:r>
-              <a:t>    },</a:t>
-            </a:r>
-          </a:p>
-          <a:p xmlns:a="http://schemas.openxmlformats.org/drawingml/2006/main">
-            <a:r>
-              <a:t>    {</a:t>
-            </a:r>
-          </a:p>
-          <a:p xmlns:a="http://schemas.openxmlformats.org/drawingml/2006/main">
-            <a:r>
-              <a:t>      "item": "行",</a:t>
-            </a:r>
-          </a:p>
-          <a:p xmlns:a="http://schemas.openxmlformats.org/drawingml/2006/main">
-            <a:r>
-              <a:t>      "winner": "上海",</a:t>
-            </a:r>
-          </a:p>
-          <a:p xmlns:a="http://schemas.openxmlformats.org/drawingml/2006/main">
-            <a:r>
-              <a:t>      "degree": "压倒性",</a:t>
-            </a:r>
-          </a:p>
-          <a:p xmlns:a="http://schemas.openxmlformats.org/drawingml/2006/main">
-            <a:r>
-              <a:t>      "single_fare": {</a:t>
-            </a:r>
-          </a:p>
-          <a:p xmlns:a="http://schemas.openxmlformats.org/drawingml/2006/main">
-            <a:r>
-              <a:t>        "shanghai_cny": "3–4",</a:t>
-            </a:r>
-          </a:p>
-          <a:p xmlns:a="http://schemas.openxmlformats.org/drawingml/2006/main">
-            <a:r>
-              <a:t>        "nyc_usd": 3,</a:t>
-            </a:r>
-          </a:p>
-          <a:p xmlns:a="http://schemas.openxmlformats.org/drawingml/2006/main">
-            <a:r>
-              <a:t>        "nyc_income_adjusted_cny": 7.6</a:t>
-            </a:r>
-          </a:p>
-          <a:p xmlns:a="http://schemas.openxmlformats.org/drawingml/2006/main">
-            <a:r>
-              <a:t>      },</a:t>
-            </a:r>
-          </a:p>
-          <a:p xmlns:a="http://schemas.openxmlformats.org/drawingml/2006/main">
-            <a:r>
-              <a:t>      "week_commute": {</a:t>
-            </a:r>
-          </a:p>
-          <a:p xmlns:a="http://schemas.openxmlformats.org/drawingml/2006/main">
-            <a:r>
-              <a:t>        "shanghai_cny": 40,</a:t>
-            </a:r>
-          </a:p>
-          <a:p xmlns:a="http://schemas.openxmlformats.org/drawingml/2006/main">
-            <a:r>
-              <a:t>        "nyc_income_adjusted_cny": 89</a:t>
-            </a:r>
-          </a:p>
-          <a:p xmlns:a="http://schemas.openxmlformats.org/drawingml/2006/main">
-            <a:r>
-              <a:t>      },</a:t>
-            </a:r>
-          </a:p>
-          <a:p xmlns:a="http://schemas.openxmlformats.org/drawingml/2006/main">
-            <a:r>
-              <a:t>      "day_pass_cny": 18,</a:t>
-            </a:r>
-          </a:p>
-          <a:p xmlns:a="http://schemas.openxmlformats.org/drawingml/2006/main">
-            <a:r>
-              <a:t>      "three_day_pass_cny": 45,</a:t>
-            </a:r>
-          </a:p>
-          <a:p xmlns:a="http://schemas.openxmlformats.org/drawingml/2006/main">
-            <a:r>
-              <a:t>      "spending_share": {</a:t>
-            </a:r>
-          </a:p>
-          <a:p xmlns:a="http://schemas.openxmlformats.org/drawingml/2006/main">
-            <a:r>
-              <a:t>        "shanghai_transport_and_communication": 10.6,</a:t>
-            </a:r>
-          </a:p>
-          <a:p xmlns:a="http://schemas.openxmlformats.org/drawingml/2006/main">
-            <a:r>
-              <a:t>        "nyc_msa_transport": 14</a:t>
-            </a:r>
-          </a:p>
-          <a:p xmlns:a="http://schemas.openxmlformats.org/drawingml/2006/main">
-            <a:r>
-              <a:t>      },</a:t>
-            </a:r>
-          </a:p>
-          <a:p xmlns:a="http://schemas.openxmlformats.org/drawingml/2006/main">
-            <a:r>
-              <a:t>      "rides_percapita_annual": {</a:t>
-            </a:r>
-          </a:p>
-          <a:p xmlns:a="http://schemas.openxmlformats.org/drawingml/2006/main">
-            <a:r>
-              <a:t>        "shanghai": 150,</a:t>
-            </a:r>
-          </a:p>
-          <a:p xmlns:a="http://schemas.openxmlformats.org/drawingml/2006/main">
-            <a:r>
-              <a:t>        "newyork": 151</a:t>
-            </a:r>
-          </a:p>
-          <a:p xmlns:a="http://schemas.openxmlformats.org/drawingml/2006/main">
-            <a:r>
-              <a:t>      },</a:t>
-            </a:r>
-          </a:p>
-          <a:p xmlns:a="http://schemas.openxmlformats.org/drawingml/2006/main">
-            <a:r>
-              <a:t>      "practice": "22条、962km；120分钟公交轨交换乘优惠1元。",</a:t>
-            </a:r>
-          </a:p>
-          <a:p xmlns:a="http://schemas.openxmlformats.org/drawingml/2006/main">
-            <a:r>
-              <a:t>      "footnote": "票价按户收入差2.65倍折算；支出占比为纽约都会区交通（2022–23）对上海交通通信（2024）。",</a:t>
-            </a:r>
-          </a:p>
-          <a:p xmlns:a="http://schemas.openxmlformats.org/drawingml/2006/main">
-            <a:r>
-              <a:t>      "sources": [</a:t>
-            </a:r>
-          </a:p>
-          <a:p xmlns:a="http://schemas.openxmlformats.org/drawingml/2006/main">
-            <a:r>
-              <a:t>        "https://portal.311.nyc.gov/article/?kanumber=KA-01014",</a:t>
-            </a:r>
-          </a:p>
-          <a:p xmlns:a="http://schemas.openxmlformats.org/drawingml/2006/main">
-            <a:r>
-              <a:t>        "https://www.nyc.gov/site/opa/commuters/commuters.page",</a:t>
-            </a:r>
-          </a:p>
-          <a:p xmlns:a="http://schemas.openxmlformats.org/drawingml/2006/main">
-            <a:r>
-              <a:t>        "https://service.shmetro.com/cpxz/3983.htm",</a:t>
-            </a:r>
-          </a:p>
-          <a:p xmlns:a="http://schemas.openxmlformats.org/drawingml/2006/main">
-            <a:r>
-              <a:t>        "https://service.shmetro.com/pwyh/index.htm",</a:t>
-            </a:r>
-          </a:p>
-          <a:p xmlns:a="http://schemas.openxmlformats.org/drawingml/2006/main">
-            <a:r>
-              <a:t>        "https://service.shmetro.com/cpxz/index.htm",</a:t>
-            </a:r>
-          </a:p>
-          <a:p xmlns:a="http://schemas.openxmlformats.org/drawingml/2006/main">
-            <a:r>
-              <a:t>        "https://tjj.sh.gov.cn/tjnj/2025tjnj/C0913.htm",</a:t>
-            </a:r>
-          </a:p>
-          <a:p xmlns:a="http://schemas.openxmlformats.org/drawingml/2006/main">
-            <a:r>
-              <a:t>        "https://www.bls.gov/regions/northeast/news-release/consumerexpenditures_newyork.htm"</a:t>
-            </a:r>
-          </a:p>
-          <a:p xmlns:a="http://schemas.openxmlformats.org/drawingml/2006/main">
-            <a:r>
-              <a:t>      ],</a:t>
-            </a:r>
-          </a:p>
-          <a:p xmlns:a="http://schemas.openxmlformats.org/drawingml/2006/main">
-            <a:r>
-              <a:t>      "provenance_notes": "18/45价格由Johnny确认、官方文字页仅列使用规则；纽约14%原表取自州审计长2024-10报告摘要/转述，没有精确报告URL。最低工资折算方案已弃用。"</a:t>
-            </a:r>
-          </a:p>
-          <a:p xmlns:a="http://schemas.openxmlformats.org/drawingml/2006/main">
-            <a:r>
-              <a:t>    },</a:t>
-            </a:r>
-          </a:p>
-          <a:p xmlns:a="http://schemas.openxmlformats.org/drawingml/2006/main">
-            <a:r>
-              <a:t>    {</a:t>
-            </a:r>
-          </a:p>
-          <a:p xmlns:a="http://schemas.openxmlformats.org/drawingml/2006/main">
-            <a:r>
-              <a:t>      "item": "医疗",</a:t>
-            </a:r>
-          </a:p>
-          <a:p xmlns:a="http://schemas.openxmlformats.org/drawingml/2006/main">
-            <a:r>
-              <a:t>      "winner": "上海",</a:t>
-            </a:r>
-          </a:p>
-          <a:p xmlns:a="http://schemas.openxmlformats.org/drawingml/2006/main">
-            <a:r>
-              <a:t>      "degree": "明显",</a:t>
-            </a:r>
-          </a:p>
-          <a:p xmlns:a="http://schemas.openxmlformats.org/drawingml/2006/main">
-            <a:r>
-              <a:t>      "infant_mortality_per1000": {</a:t>
-            </a:r>
-          </a:p>
-          <a:p xmlns:a="http://schemas.openxmlformats.org/drawingml/2006/main">
-            <a:r>
-              <a:t>        "shanghai_2025": 2.34,</a:t>
-            </a:r>
-          </a:p>
-          <a:p xmlns:a="http://schemas.openxmlformats.org/drawingml/2006/main">
-            <a:r>
-              <a:t>        "newyork_2023": 4.2</a:t>
-            </a:r>
-          </a:p>
-          <a:p xmlns:a="http://schemas.openxmlformats.org/drawingml/2006/main">
-            <a:r>
-              <a:t>      },</a:t>
-            </a:r>
-          </a:p>
-          <a:p xmlns:a="http://schemas.openxmlformats.org/drawingml/2006/main">
-            <a:r>
-              <a:t>      "maternal_mortality_per100000": {</a:t>
-            </a:r>
-          </a:p>
-          <a:p xmlns:a="http://schemas.openxmlformats.org/drawingml/2006/main">
-            <a:r>
-              <a:t>        "shanghai_2025": 1.85,</a:t>
-            </a:r>
-          </a:p>
-          <a:p xmlns:a="http://schemas.openxmlformats.org/drawingml/2006/main">
-            <a:r>
-              <a:t>        "newyork_2022_42day_estimate": 21</a:t>
-            </a:r>
-          </a:p>
-          <a:p xmlns:a="http://schemas.openxmlformats.org/drawingml/2006/main">
-            <a:r>
-              <a:t>      },</a:t>
-            </a:r>
-          </a:p>
-          <a:p xmlns:a="http://schemas.openxmlformats.org/drawingml/2006/main">
-            <a:r>
-              <a:t>      "life_expectancy": {</a:t>
-            </a:r>
-          </a:p>
-          <a:p xmlns:a="http://schemas.openxmlformats.org/drawingml/2006/main">
-            <a:r>
-              <a:t>        "shanghai_2022_registered": 83.18,</a:t>
-            </a:r>
-          </a:p>
-          <a:p xmlns:a="http://schemas.openxmlformats.org/drawingml/2006/main">
-            <a:r>
-              <a:t>        "newyork_2024_provisional": 83.2</a:t>
-            </a:r>
-          </a:p>
-          <a:p xmlns:a="http://schemas.openxmlformats.org/drawingml/2006/main">
-            <a:r>
-              <a:t>      },</a:t>
-            </a:r>
-          </a:p>
-          <a:p xmlns:a="http://schemas.openxmlformats.org/drawingml/2006/main">
-            <a:r>
-              <a:t>      "practice": "2024年卫生健康支出732.22亿元；2025年医保参保2042.45万人。",</a:t>
-            </a:r>
-          </a:p>
-          <a:p xmlns:a="http://schemas.openxmlformats.org/drawingml/2006/main">
-            <a:r>
-              <a:t>      "footnote": "纽约孕产妇死亡约21/10万由报告按产后42天折算；两项医疗结局统计年份不同。",</a:t>
-            </a:r>
-          </a:p>
-          <a:p xmlns:a="http://schemas.openxmlformats.org/drawingml/2006/main">
-            <a:r>
-              <a:t>      "sources": [</a:t>
-            </a:r>
-          </a:p>
-          <a:p xmlns:a="http://schemas.openxmlformats.org/drawingml/2006/main">
-            <a:r>
-              <a:t>        "https://tjj.sh.gov.cn/tjgb/20260330/e0772941e8e041eaaad2df850b44ef98.html",</a:t>
-            </a:r>
-          </a:p>
-          <a:p xmlns:a="http://schemas.openxmlformats.org/drawingml/2006/main">
-            <a:r>
-              <a:t>        "https://wsjkw.sh.gov.cn/tjsj2/20260730/7154e5b1603642a8a3c7c0b2b8b3b149.html",</a:t>
-            </a:r>
-          </a:p>
-          <a:p xmlns:a="http://schemas.openxmlformats.org/drawingml/2006/main">
-            <a:r>
-              <a:t>        "https://www.nyc.gov/assets/doh/downloads/pdf/vs/2023sum.pdf",</a:t>
-            </a:r>
-          </a:p>
-          <a:p xmlns:a="http://schemas.openxmlformats.org/drawingml/2006/main">
-            <a:r>
-              <a:t>        "https://www.nyc.gov/assets/doh/downloads/pdf/data/maternal-mortality-annual-report-2025.pdf"</a:t>
-            </a:r>
-          </a:p>
-          <a:p xmlns:a="http://schemas.openxmlformats.org/drawingml/2006/main">
-            <a:r>
-              <a:t>      ]</a:t>
-            </a:r>
-          </a:p>
-          <a:p xmlns:a="http://schemas.openxmlformats.org/drawingml/2006/main">
-            <a:r>
-              <a:t>    },</a:t>
-            </a:r>
-          </a:p>
-          <a:p xmlns:a="http://schemas.openxmlformats.org/drawingml/2006/main">
-            <a:r>
-              <a:t>    {</a:t>
-            </a:r>
-          </a:p>
-          <a:p xmlns:a="http://schemas.openxmlformats.org/drawingml/2006/main">
-            <a:r>
-              <a:t>      "item": "治安",</a:t>
-            </a:r>
-          </a:p>
-          <a:p xmlns:a="http://schemas.openxmlformats.org/drawingml/2006/main">
-            <a:r>
-              <a:t>      "winner": "上海",</a:t>
-            </a:r>
-          </a:p>
-          <a:p xmlns:a="http://schemas.openxmlformats.org/drawingml/2006/main">
-            <a:r>
-              <a:t>      "degree": "压倒性",</a:t>
-            </a:r>
-          </a:p>
-          <a:p xmlns:a="http://schemas.openxmlformats.org/drawingml/2006/main">
-            <a:r>
-              <a:t>      "shanghai_2024_count": 46,</a:t>
-            </a:r>
-          </a:p>
-          <a:p xmlns:a="http://schemas.openxmlformats.org/drawingml/2006/main">
-            <a:r>
-              <a:t>      "newyork_2025_count": 305,</a:t>
-            </a:r>
-          </a:p>
-          <a:p xmlns:a="http://schemas.openxmlformats.org/drawingml/2006/main">
-            <a:r>
-              <a:t>      "per100000": {</a:t>
-            </a:r>
-          </a:p>
-          <a:p xmlns:a="http://schemas.openxmlformats.org/drawingml/2006/main">
-            <a:r>
-              <a:t>        "shanghai": 0.19,</a:t>
-            </a:r>
-          </a:p>
-          <a:p xmlns:a="http://schemas.openxmlformats.org/drawingml/2006/main">
-            <a:r>
-              <a:t>        "newyork": 3.6</a:t>
-            </a:r>
-          </a:p>
-          <a:p xmlns:a="http://schemas.openxmlformats.org/drawingml/2006/main">
-            <a:r>
-              <a:t>      },</a:t>
-            </a:r>
-          </a:p>
-          <a:p xmlns:a="http://schemas.openxmlformats.org/drawingml/2006/main">
-            <a:r>
-              <a:t>      "ratio": 19,</a:t>
-            </a:r>
-          </a:p>
-          <a:p xmlns:a="http://schemas.openxmlformats.org/drawingml/2006/main">
-            <a:r>
-              <a:t>      "footnote": "上海为杀人案立案，纽约为谋杀案；年份不同，比率由案件与人口计算。",</a:t>
-            </a:r>
-          </a:p>
-          <a:p xmlns:a="http://schemas.openxmlformats.org/drawingml/2006/main">
-            <a:r>
-              <a:t>      "sources": [</a:t>
-            </a:r>
-          </a:p>
-          <a:p xmlns:a="http://schemas.openxmlformats.org/drawingml/2006/main">
-            <a:r>
-              <a:t>        "https://tjj.sh.gov.cn/tjnj/2025tjnj/C2303.htm",</a:t>
-            </a:r>
-          </a:p>
-          <a:p xmlns:a="http://schemas.openxmlformats.org/drawingml/2006/main">
-            <a:r>
-              <a:t>        "https://www.nyc.gov/site/nypd/news/PR001/nypd-safest-year-ever-gun-violence-fewest-shooting-incidents-shooting"</a:t>
-            </a:r>
-          </a:p>
-          <a:p xmlns:a="http://schemas.openxmlformats.org/drawingml/2006/main">
-            <a:r>
-              <a:t>      ]</a:t>
-            </a:r>
-          </a:p>
-          <a:p xmlns:a="http://schemas.openxmlformats.org/drawingml/2006/main">
-            <a:r>
-              <a:t>    },</a:t>
-            </a:r>
-          </a:p>
-          <a:p xmlns:a="http://schemas.openxmlformats.org/drawingml/2006/main">
-            <a:r>
-              <a:t>    {</a:t>
-            </a:r>
-          </a:p>
-          <a:p xmlns:a="http://schemas.openxmlformats.org/drawingml/2006/main">
-            <a:r>
-              <a:t>      "item": "教育",</a:t>
-            </a:r>
-          </a:p>
-          <a:p xmlns:a="http://schemas.openxmlformats.org/drawingml/2006/main">
-            <a:r>
-              <a:t>      "winner": "打平",</a:t>
-            </a:r>
-          </a:p>
-          <a:p xmlns:a="http://schemas.openxmlformats.org/drawingml/2006/main">
-            <a:r>
-              <a:t>      "degree": "—",</a:t>
-            </a:r>
-          </a:p>
-          <a:p xmlns:a="http://schemas.openxmlformats.org/drawingml/2006/main">
-            <a:r>
-              <a:t>      "student_teacher": {</a:t>
-            </a:r>
-          </a:p>
-          <a:p xmlns:a="http://schemas.openxmlformats.org/drawingml/2006/main">
-            <a:r>
-              <a:t>        "shanghai_2024": 12.5,</a:t>
-            </a:r>
-          </a:p>
-          <a:p xmlns:a="http://schemas.openxmlformats.org/drawingml/2006/main">
-            <a:r>
-              <a:t>        "newyork_2024_25": 13.2</a:t>
-            </a:r>
-          </a:p>
-          <a:p xmlns:a="http://schemas.openxmlformats.org/drawingml/2006/main">
-            <a:r>
-              <a:t>      },</a:t>
-            </a:r>
-          </a:p>
-          <a:p xmlns:a="http://schemas.openxmlformats.org/drawingml/2006/main">
-            <a:r>
-              <a:t>      "shanghai_primary_district_range": "9.0–15.1",</a:t>
-            </a:r>
-          </a:p>
-          <a:p xmlns:a="http://schemas.openxmlformats.org/drawingml/2006/main">
-            <a:r>
-              <a:t>      "nyc_district_range": "8.7–13.9",</a:t>
-            </a:r>
-          </a:p>
-          <a:p xmlns:a="http://schemas.openxmlformats.org/drawingml/2006/main">
-            <a:r>
-              <a:t>      "shanghai_net_enrolment_primary_junior": 99.9,</a:t>
-            </a:r>
-          </a:p>
-          <a:p xmlns:a="http://schemas.openxmlformats.org/drawingml/2006/main">
-            <a:r>
-              <a:t>      "footnote": "生师比由官方学生与教师数计算；上海中小学含高中，纽约为K–12。",</a:t>
-            </a:r>
-          </a:p>
-          <a:p xmlns:a="http://schemas.openxmlformats.org/drawingml/2006/main">
-            <a:r>
-              <a:t>      "sources": [</a:t>
-            </a:r>
-          </a:p>
-          <a:p xmlns:a="http://schemas.openxmlformats.org/drawingml/2006/main">
-            <a:r>
-              <a:t>        "https://tjj.sh.gov.cn/tjnj/2025tjnj/C2015.htm",</a:t>
-            </a:r>
-          </a:p>
-          <a:p xmlns:a="http://schemas.openxmlformats.org/drawingml/2006/main">
-            <a:r>
-              <a:t>        "https://tjj.sh.gov.cn/tjnj/2025tjnj/C2013.htm",</a:t>
-            </a:r>
-          </a:p>
-          <a:p xmlns:a="http://schemas.openxmlformats.org/drawingml/2006/main">
-            <a:r>
-              <a:t>        "https://tjj.sh.gov.cn/tjnj/2025tjnj/C2004.htm",</a:t>
-            </a:r>
-          </a:p>
-          <a:p xmlns:a="http://schemas.openxmlformats.org/drawingml/2006/main">
-            <a:r>
-              <a:t>        "https://data.nysed.gov/studenteducator.php?year=2025&amp;instid=7889678368"</a:t>
-            </a:r>
-          </a:p>
-          <a:p xmlns:a="http://schemas.openxmlformats.org/drawingml/2006/main">
-            <a:r>
-              <a:t>      ]</a:t>
-            </a:r>
-          </a:p>
-          <a:p xmlns:a="http://schemas.openxmlformats.org/drawingml/2006/main">
-            <a:r>
-              <a:t>    },</a:t>
-            </a:r>
-          </a:p>
-          <a:p xmlns:a="http://schemas.openxmlformats.org/drawingml/2006/main">
-            <a:r>
-              <a:t>    {</a:t>
-            </a:r>
-          </a:p>
-          <a:p xmlns:a="http://schemas.openxmlformats.org/drawingml/2006/main">
-            <a:r>
-              <a:t>      "item": "文化",</a:t>
-            </a:r>
-          </a:p>
-          <a:p xmlns:a="http://schemas.openxmlformats.org/drawingml/2006/main">
-            <a:r>
-              <a:t>      "winner": "纽约",</a:t>
-            </a:r>
-          </a:p>
-          <a:p xmlns:a="http://schemas.openxmlformats.org/drawingml/2006/main">
-            <a:r>
-              <a:t>      "degree": "明显",</a:t>
-            </a:r>
-          </a:p>
-          <a:p xmlns:a="http://schemas.openxmlformats.org/drawingml/2006/main">
-            <a:r>
-              <a:t>      "nyc_library_branches": "200余",</a:t>
-            </a:r>
-          </a:p>
-          <a:p xmlns:a="http://schemas.openxmlformats.org/drawingml/2006/main">
-            <a:r>
-              <a:t>      "cdf_orgs_fy2026": 1171,</a:t>
-            </a:r>
-          </a:p>
-          <a:p xmlns:a="http://schemas.openxmlformats.org/drawingml/2006/main">
-            <a:r>
-              <a:t>      "cdf_free_or_subsidised_pct": 96,</a:t>
-            </a:r>
-          </a:p>
-          <a:p xmlns:a="http://schemas.openxmlformats.org/drawingml/2006/main">
-            <a:r>
-              <a:t>      "cdf_amount_usd": 74300000,</a:t>
-            </a:r>
-          </a:p>
-          <a:p xmlns:a="http://schemas.openxmlformats.org/drawingml/2006/main">
-            <a:r>
-              <a:t>      "practice": "上海2025年营业性演出6.14万场，博物馆174个，公园1100座；生活圈1600基本单元。",</a:t>
-            </a:r>
-          </a:p>
-          <a:p xmlns:a="http://schemas.openxmlformats.org/drawingml/2006/main">
-            <a:r>
-              <a:t>      "footnote": "按公共图书馆网络与文化资助作判断；上海市区馆20个不用于与纽约全部网点硬比。",</a:t>
-            </a:r>
-          </a:p>
-          <a:p xmlns:a="http://schemas.openxmlformats.org/drawingml/2006/main">
-            <a:r>
-              <a:t>      "sources": [</a:t>
-            </a:r>
-          </a:p>
-          <a:p xmlns:a="http://schemas.openxmlformats.org/drawingml/2006/main">
-            <a:r>
-              <a:t>        "https://www.nypl.org/about/locations",</a:t>
-            </a:r>
-          </a:p>
-          <a:p xmlns:a="http://schemas.openxmlformats.org/drawingml/2006/main">
-            <a:r>
-              <a:t>        "https://www.bklynlibrary.org/browse-the-branches/about",</a:t>
-            </a:r>
-          </a:p>
-          <a:p xmlns:a="http://schemas.openxmlformats.org/drawingml/2006/main">
-            <a:r>
-              <a:t>        "http://gis.nyc.gov/site/dcla/about/pressrelease/PR-2026-2-26-NYC-Department-of-Cultural-Affairs-Announces-74.3-Million-in-Grants-for-1171-Cultural-Organizations-Across-the-City.page",</a:t>
-            </a:r>
-          </a:p>
-          <a:p xmlns:a="http://schemas.openxmlformats.org/drawingml/2006/main">
-            <a:r>
-              <a:t>        "https://tjj.sh.gov.cn/tjgb/20260330/e0772941e8e041eaaad2df850b44ef98.html",</a:t>
-            </a:r>
-          </a:p>
-          <a:p xmlns:a="http://schemas.openxmlformats.org/drawingml/2006/main">
-            <a:r>
-              <a:t>        "https://english.shanghai.gov.cn/en-Latest-WhatsNew/20260212/af11d8de7fd24819bff50c940e428855.html"</a:t>
-            </a:r>
-          </a:p>
-          <a:p xmlns:a="http://schemas.openxmlformats.org/drawingml/2006/main">
-            <a:r>
-              <a:t>      ]</a:t>
-            </a:r>
-          </a:p>
-          <a:p xmlns:a="http://schemas.openxmlformats.org/drawingml/2006/main">
-            <a:r>
-              <a:t>    },</a:t>
-            </a:r>
-          </a:p>
-          <a:p xmlns:a="http://schemas.openxmlformats.org/drawingml/2006/main">
-            <a:r>
-              <a:t>    {</a:t>
-            </a:r>
-          </a:p>
-          <a:p xmlns:a="http://schemas.openxmlformats.org/drawingml/2006/main">
-            <a:r>
-              <a:t>      "item": "对待底层",</a:t>
-            </a:r>
-          </a:p>
-          <a:p xmlns:a="http://schemas.openxmlformats.org/drawingml/2006/main">
-            <a:r>
-              <a:t>      "winner": "上海",</a:t>
-            </a:r>
-          </a:p>
-          <a:p xmlns:a="http://schemas.openxmlformats.org/drawingml/2006/main">
-            <a:r>
-              <a:t>      "degree": "压倒性",</a:t>
-            </a:r>
-          </a:p>
-          <a:p xmlns:a="http://schemas.openxmlformats.org/drawingml/2006/main">
-            <a:r>
-              <a:t>      "nyc_homeless_jan2025": 125683,</a:t>
-            </a:r>
-          </a:p>
-          <a:p xmlns:a="http://schemas.openxmlformats.org/drawingml/2006/main">
-            <a:r>
-              <a:t>      "nyc_unsheltered_jan2025": 4673,</a:t>
-            </a:r>
-          </a:p>
-          <a:p xmlns:a="http://schemas.openxmlformats.org/drawingml/2006/main">
-            <a:r>
-              <a:t>      "nyc_poverty_2024_pct": 18,</a:t>
-            </a:r>
-          </a:p>
-          <a:p xmlns:a="http://schemas.openxmlformats.org/drawingml/2006/main">
-            <a:r>
-              <a:t>      "bronx_poverty_2024_pct": 28.8,</a:t>
-            </a:r>
-          </a:p>
-          <a:p xmlns:a="http://schemas.openxmlformats.org/drawingml/2006/main">
-            <a:r>
-              <a:t>      "nyc_dhs_daily_average_mar2026": 84908,</a:t>
-            </a:r>
-          </a:p>
-          <a:p xmlns:a="http://schemas.openxmlformats.org/drawingml/2006/main">
-            <a:r>
-              <a:t>      "shanghai_minimum_living_standard_cny_month": 1690,</a:t>
-            </a:r>
-          </a:p>
-          <a:p xmlns:a="http://schemas.openxmlformats.org/drawingml/2006/main">
-            <a:r>
-              <a:t>      "effective_date": "2026-07-01",</a:t>
-            </a:r>
-          </a:p>
-          <a:p xmlns:a="http://schemas.openxmlformats.org/drawingml/2006/main">
-            <a:r>
-              <a:t>      "shanghai_2025_elderly_centres": 557,</a:t>
-            </a:r>
-          </a:p>
-          <a:p xmlns:a="http://schemas.openxmlformats.org/drawingml/2006/main">
-            <a:r>
-              <a:t>      "shanghai_2025_meal_sites": 2498,</a:t>
-            </a:r>
-          </a:p>
-          <a:p xmlns:a="http://schemas.openxmlformats.org/drawingml/2006/main">
-            <a:r>
-              <a:t>      "shanghai_2025_employment_sites": 506,</a:t>
-            </a:r>
-          </a:p>
-          <a:p xmlns:a="http://schemas.openxmlformats.org/drawingml/2006/main">
-            <a:r>
-              <a:t>      "footnote": "纽约为HUD一夜点数；上海露宿人数未公开，判断结合托底制度与纽约结果。",</a:t>
-            </a:r>
-          </a:p>
-          <a:p xmlns:a="http://schemas.openxmlformats.org/drawingml/2006/main">
-            <a:r>
-              <a:t>      "sources": [</a:t>
-            </a:r>
-          </a:p>
-          <a:p xmlns:a="http://schemas.openxmlformats.org/drawingml/2006/main">
-            <a:r>
-              <a:t>        "https://files.hudexchange.info/reports/published/CoC_PopSub_CoC_NY-600-2025_NY_2025.pdf",</a:t>
-            </a:r>
-          </a:p>
-          <a:p xmlns:a="http://schemas.openxmlformats.org/drawingml/2006/main">
-            <a:r>
-              <a:t>        "https://rentguidelinesboard.cityofnewyork.us/wp-content/uploads/2026/04/2026-IA.pdf",</a:t>
-            </a:r>
-          </a:p>
-          <a:p xmlns:a="http://schemas.openxmlformats.org/drawingml/2006/main">
-            <a:r>
-              <a:t>        "https://www.nyc.gov/assets/dhs/downloads/pdf/dashboard/tables/FY26-DHS-Data-Dashboard-Data.pdf",</a:t>
-            </a:r>
-          </a:p>
-          <a:p xmlns:a="http://schemas.openxmlformats.org/drawingml/2006/main">
-            <a:r>
-              <a:t>        "https://mzj.sh.gov.cn/MZ_zhuzhan277_0-2-8-15-55-229/20260702/d95374094d6041a19b2591fd241126cb.html",</a:t>
-            </a:r>
-          </a:p>
-          <a:p xmlns:a="http://schemas.openxmlformats.org/drawingml/2006/main">
-            <a:r>
-              <a:t>        "https://tjj.sh.gov.cn/tjgb/20260330/e0772941e8e041eaaad2df850b44ef98.html"</a:t>
-            </a:r>
-          </a:p>
-          <a:p xmlns:a="http://schemas.openxmlformats.org/drawingml/2006/main">
-            <a:r>
-              <a:t>      ]</a:t>
-            </a:r>
-          </a:p>
-          <a:p xmlns:a="http://schemas.openxmlformats.org/drawingml/2006/main">
-            <a:r>
-              <a:t>    }</a:t>
-            </a:r>
-          </a:p>
-          <a:p xmlns:a="http://schemas.openxmlformats.org/drawingml/2006/main">
-            <a:r>
-              <a:t>  ],</a:t>
-            </a:r>
-          </a:p>
-          <a:p xmlns:a="http://schemas.openxmlformats.org/drawingml/2006/main">
-            <a:r>
-              <a:t>  "transparency": {</a:t>
-            </a:r>
-          </a:p>
-          <a:p xmlns:a="http://schemas.openxmlformats.org/drawingml/2006/main">
-            <a:r>
-              <a:t>    "one_net_services": 3827,</a:t>
-            </a:r>
-          </a:p>
-          <a:p xmlns:a="http://schemas.openxmlformats.org/drawingml/2006/main">
-            <a:r>
-              <a:t>    "actual_online_pct": 89.53,</a:t>
-            </a:r>
-          </a:p>
-          <a:p xmlns:a="http://schemas.openxmlformats.org/drawingml/2006/main">
-            <a:r>
-              <a:t>    "satisfaction_pct": 99.94,</a:t>
-            </a:r>
-          </a:p>
-          <a:p xmlns:a="http://schemas.openxmlformats.org/drawingml/2006/main">
-            <a:r>
-              <a:t>    "datasets": 11248,</a:t>
-            </a:r>
-          </a:p>
-          <a:p xmlns:a="http://schemas.openxmlformats.org/drawingml/2006/main">
-            <a:r>
-              <a:t>    "departments": 56,</a:t>
-            </a:r>
-          </a:p>
-          <a:p xmlns:a="http://schemas.openxmlformats.org/drawingml/2006/main">
-            <a:r>
-              <a:t>    "four_gaps": [</a:t>
-            </a:r>
-          </a:p>
-          <a:p xmlns:a="http://schemas.openxmlformats.org/drawingml/2006/main">
-            <a:r>
-              <a:t>      "公厕数据集明细需申请",</a:t>
-            </a:r>
-          </a:p>
-          <a:p xmlns:a="http://schemas.openxmlformats.org/drawingml/2006/main">
-            <a:r>
-              <a:t>      "没有市场租金统计",</a:t>
-            </a:r>
-          </a:p>
-          <a:p xmlns:a="http://schemas.openxmlformats.org/drawingml/2006/main">
-            <a:r>
-              <a:t>      "没有露宿人数",</a:t>
-            </a:r>
-          </a:p>
-          <a:p xmlns:a="http://schemas.openxmlformats.org/drawingml/2006/main">
-            <a:r>
-              <a:t>      "户籍人口期望寿命2022年后未再公布"</a:t>
-            </a:r>
-          </a:p>
-          <a:p xmlns:a="http://schemas.openxmlformats.org/drawingml/2006/main">
-            <a:r>
-              <a:t>    ],</a:t>
-            </a:r>
-          </a:p>
-          <a:p xmlns:a="http://schemas.openxmlformats.org/drawingml/2006/main">
-            <a:r>
-              <a:t>    "nyc_rule": "2012年Local Law 11，政府公共数据默认免费开放；DHS每天更新。",</a:t>
-            </a:r>
-          </a:p>
-          <a:p xmlns:a="http://schemas.openxmlformats.org/drawingml/2006/main">
-            <a:r>
-              <a:t>    "sources": [</a:t>
-            </a:r>
-          </a:p>
-          <a:p xmlns:a="http://schemas.openxmlformats.org/drawingml/2006/main">
-            <a:r>
-              <a:t>      "https://data.sh.gov.cn/",</a:t>
-            </a:r>
-          </a:p>
-          <a:p xmlns:a="http://schemas.openxmlformats.org/drawingml/2006/main">
-            <a:r>
-              <a:t>      "https://tjj.sh.gov.cn/tjgb/20260330/e0772941e8e041eaaad2df850b44ef98.html",</a:t>
-            </a:r>
-          </a:p>
-          <a:p xmlns:a="http://schemas.openxmlformats.org/drawingml/2006/main">
-            <a:r>
-              <a:t>      "https://wsjkw.sh.gov.cn/2022wsjkzkbg/index.html",</a:t>
-            </a:r>
-          </a:p>
-          <a:p xmlns:a="http://schemas.openxmlformats.org/drawingml/2006/main">
-            <a:r>
-              <a:t>      "https://wsjkw.sh.gov.cn/2023wsjkzkbg/index.html",</a:t>
-            </a:r>
-          </a:p>
-          <a:p xmlns:a="http://schemas.openxmlformats.org/drawingml/2006/main">
-            <a:r>
-              <a:t>      "https://wsjkw.sh.gov.cn/2024wsjkzkbg/index.html",</a:t>
-            </a:r>
-          </a:p>
-          <a:p xmlns:a="http://schemas.openxmlformats.org/drawingml/2006/main">
-            <a:r>
-              <a:t>      "https://opendata.cityofnewyork.us/open-data-law/",</a:t>
-            </a:r>
-          </a:p>
-          <a:p xmlns:a="http://schemas.openxmlformats.org/drawingml/2006/main">
-            <a:r>
-              <a:t>      "https://data.cityofnewyork.us/Social-Services/DHS-Daily-Report/k46n-sa2m"</a:t>
-            </a:r>
-          </a:p>
-          <a:p xmlns:a="http://schemas.openxmlformats.org/drawingml/2006/main">
-            <a:r>
-              <a:t>    ]</a:t>
-            </a:r>
-          </a:p>
-          <a:p xmlns:a="http://schemas.openxmlformats.org/drawingml/2006/main">
-            <a:r>
-              <a:t>  },</a:t>
-            </a:r>
-          </a:p>
-          <a:p xmlns:a="http://schemas.openxmlformats.org/drawingml/2006/main">
-            <a:r>
-              <a:t>  "approved_supplement": {</a:t>
-            </a:r>
-          </a:p>
-          <a:p xmlns:a="http://schemas.openxmlformats.org/drawingml/2006/main">
-            <a:r>
-              <a:t>    "residents_participation": "泰山人民坊：12场专项座谈、3826份问卷；5轮专题论证；3场事后评议。",</a:t>
-            </a:r>
-          </a:p>
-          <a:p xmlns:a="http://schemas.openxmlformats.org/drawingml/2006/main">
-            <a:r>
-              <a:t>    "source": "https://ghzyj.sh.gov.cn/gzdt/20251224/f5b8e34f5c834200910639b27717dfdf.html"</a:t>
-            </a:r>
-          </a:p>
-          <a:p xmlns:a="http://schemas.openxmlformats.org/drawingml/2006/main">
-            <a:r>
-              <a:t>  },</a:t>
-            </a:r>
-          </a:p>
-          <a:p xmlns:a="http://schemas.openxmlformats.org/drawingml/2006/main">
-            <a:r>
-              <a:t>  "conflicts_and_nonblocking_gaps": [</a:t>
-            </a:r>
-          </a:p>
-          <a:p xmlns:a="http://schemas.openxmlformats.org/drawingml/2006/main">
-            <a:r>
-              <a:t>    "本地script/讲稿.md第11节和script/口径表.md仍含总比分；用户已明确作废，应删总比分，仅留九题胜负/程度。",</a:t>
-            </a:r>
-          </a:p>
-          <a:p xmlns:a="http://schemas.openxmlformats.org/drawingml/2006/main">
-            <a:r>
-              <a:t>    "本地script/讲稿.md第12节尚未出现用户最新结论；以用户本条补充作准：纽约有部分答案（吃穿、文化、数据公开），底层未答好，尚非合格答卷；上海更完整，数据公开仍需补。",</a:t>
-            </a:r>
-          </a:p>
-          <a:p xmlns:a="http://schemas.openxmlformats.org/drawingml/2006/main">
-            <a:r>
-              <a:t>    "口径表禁止“压倒性”，但本次用户明确要求程度且讲稿第11节使用该词；以本次用户要求为准。",</a:t>
-            </a:r>
-          </a:p>
-          <a:p xmlns:a="http://schemas.openxmlformats.org/drawingml/2006/main">
-            <a:r>
-              <a:t>    "data-table第4节及3.7节后面残留旧医疗打平/租金判住房胜负段落，已被后续修订覆盖，不要采用。",</a:t>
-            </a:r>
-          </a:p>
-          <a:p xmlns:a="http://schemas.openxmlformats.org/drawingml/2006/main">
-            <a:r>
-              <a:t>    "纽约交通14%原始精确报告URL缺失；上海18/45票价原表标记由Johnny确认；可以按用户锁定数使用，备注据实记录，勿虚构URL。",</a:t>
-            </a:r>
-          </a:p>
-          <a:p xmlns:a="http://schemas.openxmlformats.org/drawingml/2006/main">
-            <a:r>
-              <a:t>    "食物纽约州的5005美元实际分类含住宿，勿标成纯餐饮；一行口径说明即可。",</a:t>
-            </a:r>
-          </a:p>
-          <a:p xmlns:a="http://schemas.openxmlformats.org/drawingml/2006/main">
-            <a:r>
-              <a:t>    "没有真正阻碍制作的数字歧义；仅讲稿文件未合并最新补充，影响“备注原文”的逐字一致性。"</a:t>
-            </a:r>
-          </a:p>
-          <a:p xmlns:a="http://schemas.openxmlformats.org/drawingml/2006/main">
-            <a:r>
-              <a:t>  ]</a:t>
-            </a:r>
-          </a:p>
-          <a:p xmlns:a="http://schemas.openxmlformats.org/drawingml/2006/main">
-            <a:r>
-              <a:t>}</a:t>
+          <a:p xmlns:a="http://schemas.openxmlformats.org/drawingml/2006/main"/>
+          <a:p xmlns:a="http://schemas.openxmlformats.org/drawingml/2006/main">
+            <a:r>
+              <a:t>问：为什么不用纽约都会区？</a:t>
+            </a:r>
+          </a:p>
+          <a:p xmlns:a="http://schemas.openxmlformats.org/drawingml/2006/main">
+            <a:r>
+              <a:t>答：我们比的是城市政府怎么对待市民，纽约市政府只管五个区。都会区跨三个州，自有住房率等数据也取不全（NY-C6）</a:t>
+            </a:r>
+          </a:p>
+          <a:p xmlns:a="http://schemas.openxmlformats.org/drawingml/2006/main">
+            <a:r>
+              <a:t>问：收入能直接比吗？</a:t>
+            </a:r>
+          </a:p>
+          <a:p xmlns:a="http://schemas.openxmlformats.org/drawingml/2006/main">
+            <a:r>
+              <a:t>答：纽约是户收入中位数、税前；上海是人均可支配收入乘户均人口，是均值、到手。前者偏高，后者也偏高（均值高于中位数），所以只取"两倍半上下"这个量级（CALC-2）</a:t>
+            </a:r>
+          </a:p>
+          <a:p xmlns:a="http://schemas.openxmlformats.org/drawingml/2006/main">
+            <a:r>
+              <a:t>问：上海 59% 自有住房率可靠吗？</a:t>
+            </a:r>
+          </a:p>
+          <a:p xmlns:a="http://schemas.openxmlformats.org/drawingml/2006/main">
+            <a:r>
+              <a:t>答：2020 年七普长表，按家庭户统计，不含集体户，所以偏高。纽约 32.3% 是 2023 年住房与空置调查（SH-C1、NY-C5）</a:t>
+            </a:r>
+          </a:p>
+          <a:p xmlns:a="http://schemas.openxmlformats.org/drawingml/2006/main">
+            <a:r>
+              <a:t>问：为什么不比房租负担？</a:t>
+            </a:r>
+          </a:p>
+          <a:p xmlns:a="http://schemas.openxmlformats.org/drawingml/2006/main">
+            <a:r>
+              <a:t>答：纽约有官方数（租房户房租收入比中位数约 31%），上海统计部门没有公布租金；商业网站和行业报告的数口径不一致，算不出可比的负担</a:t>
+            </a:r>
+          </a:p>
+          <a:p xmlns:a="http://schemas.openxmlformats.org/drawingml/2006/main">
+            <a:r>
+              <a:t>问：吃的花销口径一样吗？</a:t>
+            </a:r>
+          </a:p>
+          <a:p xmlns:a="http://schemas.openxmlformats.org/drawingml/2006/main">
+            <a:r>
+              <a:t>答：纽约的"餐饮住宿"含住宿，上海的"食品烟酒"含烟酒，两边都偏高一点，不改变量级</a:t>
+            </a:r>
+          </a:p>
+          <a:p xmlns:a="http://schemas.openxmlformats.org/drawingml/2006/main">
+            <a:r>
+              <a:t>问：吃和穿为什么用纽约州？</a:t>
+            </a:r>
+          </a:p>
+          <a:p xmlns:a="http://schemas.openxmlformats.org/drawingml/2006/main">
+            <a:r>
+              <a:t>答：纽约市没有单独的消费分项统计，用的是美国商务部经济分析局的州级数据；它的分母含雇主和政府代付的医疗等，比住户调查宽，纽约的比例偏低（3.6 节）</a:t>
+            </a:r>
+          </a:p>
+          <a:p xmlns:a="http://schemas.openxmlformats.org/drawingml/2006/main">
+            <a:r>
+              <a:t>问：孕产妇死亡率口径一样吗？</a:t>
+            </a:r>
+          </a:p>
+          <a:p xmlns:a="http://schemas.openxmlformats.org/drawingml/2006/main">
+            <a:r>
+              <a:t>答：纽约原始口径算到产后一年（32.2/10 万，2022）；按纽约报告里的死亡时间分布截到 42 天约 21/10 万，与上海口径一致（NY-H11）</a:t>
+            </a:r>
+          </a:p>
+          <a:p xmlns:a="http://schemas.openxmlformats.org/drawingml/2006/main">
+            <a:r>
+              <a:t>问：上海公厕 8,325 处包括哪些？</a:t>
+            </a:r>
+          </a:p>
+          <a:p xmlns:a="http://schemas.openxmlformats.org/drawingml/2006/main">
+            <a:r>
+              <a:t>答：这是开放平台"城市设施-公共厕所"数据集的记录条数，由市绿化市容局提供，平台没有写明统计范围，样例里还有已撤销的"闸北区"。纽约 1,064 座只算市政府管理的公厕。所以"三倍"只说明量级（SH-T1、NY-G5、CALC-7）</a:t>
             </a:r>
           </a:p>
         </p:txBody>
@@ -3625,412 +2162,143 @@
           <a:lstStyle xmlns:a="http://schemas.openxmlformats.org/drawingml/2006/main"/>
           <a:p xmlns:a="http://schemas.openxmlformats.org/drawingml/2006/main">
             <a:r>
-              <a:t>{</a:t>
-            </a:r>
-          </a:p>
-          <a:p xmlns:a="http://schemas.openxmlformats.org/drawingml/2006/main">
-            <a:r>
-              <a:t>  "item": "医疗",</a:t>
-            </a:r>
-          </a:p>
-          <a:p xmlns:a="http://schemas.openxmlformats.org/drawingml/2006/main">
-            <a:r>
-              <a:t>  "winner": "上海",</a:t>
-            </a:r>
-          </a:p>
-          <a:p xmlns:a="http://schemas.openxmlformats.org/drawingml/2006/main">
-            <a:r>
-              <a:t>  "degree": "明显",</a:t>
-            </a:r>
-          </a:p>
-          <a:p xmlns:a="http://schemas.openxmlformats.org/drawingml/2006/main">
-            <a:r>
-              <a:t>  "infant_mortality_per1000": {</a:t>
-            </a:r>
-          </a:p>
-          <a:p xmlns:a="http://schemas.openxmlformats.org/drawingml/2006/main">
-            <a:r>
-              <a:t>    "shanghai_2025": 2.34,</a:t>
-            </a:r>
-          </a:p>
-          <a:p xmlns:a="http://schemas.openxmlformats.org/drawingml/2006/main">
-            <a:r>
-              <a:t>    "newyork_2023": 4.2</a:t>
-            </a:r>
-          </a:p>
-          <a:p xmlns:a="http://schemas.openxmlformats.org/drawingml/2006/main">
-            <a:r>
-              <a:t>  },</a:t>
-            </a:r>
-          </a:p>
-          <a:p xmlns:a="http://schemas.openxmlformats.org/drawingml/2006/main">
-            <a:r>
-              <a:t>  "maternal_mortality_per100000": {</a:t>
-            </a:r>
-          </a:p>
-          <a:p xmlns:a="http://schemas.openxmlformats.org/drawingml/2006/main">
-            <a:r>
-              <a:t>    "shanghai_2025": 1.85,</a:t>
-            </a:r>
-          </a:p>
-          <a:p xmlns:a="http://schemas.openxmlformats.org/drawingml/2006/main">
-            <a:r>
-              <a:t>    "newyork_2022_42day_estimate": 21</a:t>
-            </a:r>
-          </a:p>
-          <a:p xmlns:a="http://schemas.openxmlformats.org/drawingml/2006/main">
-            <a:r>
-              <a:t>  },</a:t>
-            </a:r>
-          </a:p>
-          <a:p xmlns:a="http://schemas.openxmlformats.org/drawingml/2006/main">
-            <a:r>
-              <a:t>  "life_expectancy": {</a:t>
-            </a:r>
-          </a:p>
-          <a:p xmlns:a="http://schemas.openxmlformats.org/drawingml/2006/main">
-            <a:r>
-              <a:t>    "shanghai_2022_registered": 83.18,</a:t>
-            </a:r>
-          </a:p>
-          <a:p xmlns:a="http://schemas.openxmlformats.org/drawingml/2006/main">
-            <a:r>
-              <a:t>    "newyork_2024_provisional": 83.2</a:t>
-            </a:r>
-          </a:p>
-          <a:p xmlns:a="http://schemas.openxmlformats.org/drawingml/2006/main">
-            <a:r>
-              <a:t>  },</a:t>
-            </a:r>
-          </a:p>
-          <a:p xmlns:a="http://schemas.openxmlformats.org/drawingml/2006/main">
-            <a:r>
-              <a:t>  "practice": "2024年卫生健康支出732.22亿元；2025年医保参保2042.45万人。",</a:t>
-            </a:r>
-          </a:p>
-          <a:p xmlns:a="http://schemas.openxmlformats.org/drawingml/2006/main">
-            <a:r>
-              <a:t>  "footnote": "纽约孕产妇死亡约21/10万由报告按产后42天折算；两项医疗结局统计年份不同。",</a:t>
-            </a:r>
-          </a:p>
-          <a:p xmlns:a="http://schemas.openxmlformats.org/drawingml/2006/main">
-            <a:r>
-              <a:t>  "sources": [</a:t>
-            </a:r>
-          </a:p>
-          <a:p xmlns:a="http://schemas.openxmlformats.org/drawingml/2006/main">
-            <a:r>
-              <a:t>    "https://tjj.sh.gov.cn/tjgb/20260330/e0772941e8e041eaaad2df850b44ef98.html",</a:t>
-            </a:r>
-          </a:p>
-          <a:p xmlns:a="http://schemas.openxmlformats.org/drawingml/2006/main">
-            <a:r>
-              <a:t>    "https://wsjkw.sh.gov.cn/tjsj2/20260730/7154e5b1603642a8a3c7c0b2b8b3b149.html",</a:t>
-            </a:r>
-          </a:p>
-          <a:p xmlns:a="http://schemas.openxmlformats.org/drawingml/2006/main">
-            <a:r>
-              <a:t>    "https://www.nyc.gov/assets/doh/downloads/pdf/vs/2023sum.pdf",</a:t>
-            </a:r>
-          </a:p>
-          <a:p xmlns:a="http://schemas.openxmlformats.org/drawingml/2006/main">
-            <a:r>
-              <a:t>    "https://www.nyc.gov/assets/doh/downloads/pdf/data/maternal-mortality-annual-report-2025.pdf"</a:t>
-            </a:r>
-          </a:p>
-          <a:p xmlns:a="http://schemas.openxmlformats.org/drawingml/2006/main">
-            <a:r>
-              <a:t>  ]</a:t>
-            </a:r>
-          </a:p>
-          <a:p xmlns:a="http://schemas.openxmlformats.org/drawingml/2006/main">
-            <a:r>
-              <a:t>}</a:t>
-            </a:r>
-          </a:p>
-          <a:p xmlns:a="http://schemas.openxmlformats.org/drawingml/2006/main">
-            <a:r>
-              <a:t/>
-            </a:r>
-          </a:p>
-          <a:p xmlns:a="http://schemas.openxmlformats.org/drawingml/2006/main">
-            <a:r>
-              <a:t>{</a:t>
-            </a:r>
-          </a:p>
-          <a:p xmlns:a="http://schemas.openxmlformats.org/drawingml/2006/main">
-            <a:r>
-              <a:t>  "item": "治安",</a:t>
-            </a:r>
-          </a:p>
-          <a:p xmlns:a="http://schemas.openxmlformats.org/drawingml/2006/main">
-            <a:r>
-              <a:t>  "winner": "上海",</a:t>
-            </a:r>
-          </a:p>
-          <a:p xmlns:a="http://schemas.openxmlformats.org/drawingml/2006/main">
-            <a:r>
-              <a:t>  "degree": "压倒性",</a:t>
-            </a:r>
-          </a:p>
-          <a:p xmlns:a="http://schemas.openxmlformats.org/drawingml/2006/main">
-            <a:r>
-              <a:t>  "shanghai_2024_count": 46,</a:t>
-            </a:r>
-          </a:p>
-          <a:p xmlns:a="http://schemas.openxmlformats.org/drawingml/2006/main">
-            <a:r>
-              <a:t>  "newyork_2025_count": 305,</a:t>
-            </a:r>
-          </a:p>
-          <a:p xmlns:a="http://schemas.openxmlformats.org/drawingml/2006/main">
-            <a:r>
-              <a:t>  "per100000": {</a:t>
-            </a:r>
-          </a:p>
-          <a:p xmlns:a="http://schemas.openxmlformats.org/drawingml/2006/main">
-            <a:r>
-              <a:t>    "shanghai": 0.19,</a:t>
-            </a:r>
-          </a:p>
-          <a:p xmlns:a="http://schemas.openxmlformats.org/drawingml/2006/main">
-            <a:r>
-              <a:t>    "newyork": 3.6</a:t>
-            </a:r>
-          </a:p>
-          <a:p xmlns:a="http://schemas.openxmlformats.org/drawingml/2006/main">
-            <a:r>
-              <a:t>  },</a:t>
-            </a:r>
-          </a:p>
-          <a:p xmlns:a="http://schemas.openxmlformats.org/drawingml/2006/main">
-            <a:r>
-              <a:t>  "ratio": 19,</a:t>
-            </a:r>
-          </a:p>
-          <a:p xmlns:a="http://schemas.openxmlformats.org/drawingml/2006/main">
-            <a:r>
-              <a:t>  "footnote": "上海为杀人案立案，纽约为谋杀案；年份不同，比率由案件与人口计算。",</a:t>
-            </a:r>
-          </a:p>
-          <a:p xmlns:a="http://schemas.openxmlformats.org/drawingml/2006/main">
-            <a:r>
-              <a:t>  "sources": [</a:t>
-            </a:r>
-          </a:p>
-          <a:p xmlns:a="http://schemas.openxmlformats.org/drawingml/2006/main">
-            <a:r>
-              <a:t>    "https://tjj.sh.gov.cn/tjnj/2025tjnj/C2303.htm",</a:t>
-            </a:r>
-          </a:p>
-          <a:p xmlns:a="http://schemas.openxmlformats.org/drawingml/2006/main">
-            <a:r>
-              <a:t>    "https://www.nyc.gov/site/nypd/news/PR001/nypd-safest-year-ever-gun-violence-fewest-shooting-incidents-shooting"</a:t>
-            </a:r>
-          </a:p>
-          <a:p xmlns:a="http://schemas.openxmlformats.org/drawingml/2006/main">
-            <a:r>
-              <a:t>  ]</a:t>
-            </a:r>
-          </a:p>
-          <a:p xmlns:a="http://schemas.openxmlformats.org/drawingml/2006/main">
-            <a:r>
-              <a:t>}</a:t>
-            </a:r>
-          </a:p>
-          <a:p xmlns:a="http://schemas.openxmlformats.org/drawingml/2006/main">
-            <a:r>
-              <a:t/>
-            </a:r>
-          </a:p>
-          <a:p xmlns:a="http://schemas.openxmlformats.org/drawingml/2006/main">
-            <a:r>
-              <a:t>{</a:t>
-            </a:r>
-          </a:p>
-          <a:p xmlns:a="http://schemas.openxmlformats.org/drawingml/2006/main">
-            <a:r>
-              <a:t>  "item": "教育",</a:t>
-            </a:r>
-          </a:p>
-          <a:p xmlns:a="http://schemas.openxmlformats.org/drawingml/2006/main">
-            <a:r>
-              <a:t>  "winner": "打平",</a:t>
-            </a:r>
-          </a:p>
-          <a:p xmlns:a="http://schemas.openxmlformats.org/drawingml/2006/main">
-            <a:r>
-              <a:t>  "degree": "—",</a:t>
-            </a:r>
-          </a:p>
-          <a:p xmlns:a="http://schemas.openxmlformats.org/drawingml/2006/main">
-            <a:r>
-              <a:t>  "student_teacher": {</a:t>
-            </a:r>
-          </a:p>
-          <a:p xmlns:a="http://schemas.openxmlformats.org/drawingml/2006/main">
-            <a:r>
-              <a:t>    "shanghai_2024": 12.5,</a:t>
-            </a:r>
-          </a:p>
-          <a:p xmlns:a="http://schemas.openxmlformats.org/drawingml/2006/main">
-            <a:r>
-              <a:t>    "newyork_2024_25": 13.2</a:t>
-            </a:r>
-          </a:p>
-          <a:p xmlns:a="http://schemas.openxmlformats.org/drawingml/2006/main">
-            <a:r>
-              <a:t>  },</a:t>
-            </a:r>
-          </a:p>
-          <a:p xmlns:a="http://schemas.openxmlformats.org/drawingml/2006/main">
-            <a:r>
-              <a:t>  "shanghai_primary_district_range": "9.0–15.1",</a:t>
-            </a:r>
-          </a:p>
-          <a:p xmlns:a="http://schemas.openxmlformats.org/drawingml/2006/main">
-            <a:r>
-              <a:t>  "nyc_district_range": "8.7–13.9",</a:t>
-            </a:r>
-          </a:p>
-          <a:p xmlns:a="http://schemas.openxmlformats.org/drawingml/2006/main">
-            <a:r>
-              <a:t>  "shanghai_net_enrolment_primary_junior": 99.9,</a:t>
-            </a:r>
-          </a:p>
-          <a:p xmlns:a="http://schemas.openxmlformats.org/drawingml/2006/main">
-            <a:r>
-              <a:t>  "footnote": "生师比由官方学生与教师数计算；上海中小学含高中，纽约为K–12。",</a:t>
-            </a:r>
-          </a:p>
-          <a:p xmlns:a="http://schemas.openxmlformats.org/drawingml/2006/main">
-            <a:r>
-              <a:t>  "sources": [</a:t>
-            </a:r>
-          </a:p>
-          <a:p xmlns:a="http://schemas.openxmlformats.org/drawingml/2006/main">
-            <a:r>
-              <a:t>    "https://tjj.sh.gov.cn/tjnj/2025tjnj/C2015.htm",</a:t>
-            </a:r>
-          </a:p>
-          <a:p xmlns:a="http://schemas.openxmlformats.org/drawingml/2006/main">
-            <a:r>
-              <a:t>    "https://tjj.sh.gov.cn/tjnj/2025tjnj/C2013.htm",</a:t>
-            </a:r>
-          </a:p>
-          <a:p xmlns:a="http://schemas.openxmlformats.org/drawingml/2006/main">
-            <a:r>
-              <a:t>    "https://tjj.sh.gov.cn/tjnj/2025tjnj/C2004.htm",</a:t>
-            </a:r>
-          </a:p>
-          <a:p xmlns:a="http://schemas.openxmlformats.org/drawingml/2006/main">
-            <a:r>
-              <a:t>    "https://data.nysed.gov/studenteducator.php?year=2025&amp;instid=7889678368"</a:t>
-            </a:r>
-          </a:p>
-          <a:p xmlns:a="http://schemas.openxmlformats.org/drawingml/2006/main">
-            <a:r>
-              <a:t>  ]</a:t>
-            </a:r>
-          </a:p>
-          <a:p xmlns:a="http://schemas.openxmlformats.org/drawingml/2006/main">
-            <a:r>
-              <a:t>}</a:t>
-            </a:r>
-          </a:p>
-          <a:p xmlns:a="http://schemas.openxmlformats.org/drawingml/2006/main">
-            <a:r>
-              <a:t/>
-            </a:r>
-          </a:p>
-          <a:p xmlns:a="http://schemas.openxmlformats.org/drawingml/2006/main">
-            <a:r>
-              <a:t>{</a:t>
-            </a:r>
-          </a:p>
-          <a:p xmlns:a="http://schemas.openxmlformats.org/drawingml/2006/main">
-            <a:r>
-              <a:t>  "item": "文化",</a:t>
-            </a:r>
-          </a:p>
-          <a:p xmlns:a="http://schemas.openxmlformats.org/drawingml/2006/main">
-            <a:r>
-              <a:t>  "winner": "纽约",</a:t>
-            </a:r>
-          </a:p>
-          <a:p xmlns:a="http://schemas.openxmlformats.org/drawingml/2006/main">
-            <a:r>
-              <a:t>  "degree": "明显",</a:t>
-            </a:r>
-          </a:p>
-          <a:p xmlns:a="http://schemas.openxmlformats.org/drawingml/2006/main">
-            <a:r>
-              <a:t>  "nyc_library_branches": "200余",</a:t>
-            </a:r>
-          </a:p>
-          <a:p xmlns:a="http://schemas.openxmlformats.org/drawingml/2006/main">
-            <a:r>
-              <a:t>  "cdf_orgs_fy2026": 1171,</a:t>
-            </a:r>
-          </a:p>
-          <a:p xmlns:a="http://schemas.openxmlformats.org/drawingml/2006/main">
-            <a:r>
-              <a:t>  "cdf_free_or_subsidised_pct": 96,</a:t>
-            </a:r>
-          </a:p>
-          <a:p xmlns:a="http://schemas.openxmlformats.org/drawingml/2006/main">
-            <a:r>
-              <a:t>  "cdf_amount_usd": 74300000,</a:t>
-            </a:r>
-          </a:p>
-          <a:p xmlns:a="http://schemas.openxmlformats.org/drawingml/2006/main">
-            <a:r>
-              <a:t>  "practice": "上海2025年营业性演出6.14万场，博物馆174个，公园1100座；生活圈1600基本单元。",</a:t>
-            </a:r>
-          </a:p>
-          <a:p xmlns:a="http://schemas.openxmlformats.org/drawingml/2006/main">
-            <a:r>
-              <a:t>  "footnote": "按公共图书馆网络与文化资助作判断；上海市区馆20个不用于与纽约全部网点硬比。",</a:t>
-            </a:r>
-          </a:p>
-          <a:p xmlns:a="http://schemas.openxmlformats.org/drawingml/2006/main">
-            <a:r>
-              <a:t>  "sources": [</a:t>
-            </a:r>
-          </a:p>
-          <a:p xmlns:a="http://schemas.openxmlformats.org/drawingml/2006/main">
-            <a:r>
-              <a:t>    "https://www.nypl.org/about/locations",</a:t>
-            </a:r>
-          </a:p>
-          <a:p xmlns:a="http://schemas.openxmlformats.org/drawingml/2006/main">
-            <a:r>
-              <a:t>    "https://www.bklynlibrary.org/browse-the-branches/about",</a:t>
-            </a:r>
-          </a:p>
-          <a:p xmlns:a="http://schemas.openxmlformats.org/drawingml/2006/main">
-            <a:r>
-              <a:t>    "http://gis.nyc.gov/site/dcla/about/pressrelease/PR-2026-2-26-NYC-Department-of-Cultural-Affairs-Announces-74.3-Million-in-Grants-for-1171-Cultural-Organizations-Across-the-City.page",</a:t>
-            </a:r>
-          </a:p>
-          <a:p xmlns:a="http://schemas.openxmlformats.org/drawingml/2006/main">
-            <a:r>
-              <a:t>    "https://tjj.sh.gov.cn/tjgb/20260330/e0772941e8e041eaaad2df850b44ef98.html",</a:t>
-            </a:r>
-          </a:p>
-          <a:p xmlns:a="http://schemas.openxmlformats.org/drawingml/2006/main">
-            <a:r>
-              <a:t>    "https://english.shanghai.gov.cn/en-Latest-WhatsNew/20260212/af11d8de7fd24819bff50c940e428855.html"</a:t>
-            </a:r>
-          </a:p>
-          <a:p xmlns:a="http://schemas.openxmlformats.org/drawingml/2006/main">
-            <a:r>
-              <a:t>  ]</a:t>
-            </a:r>
-          </a:p>
-          <a:p xmlns:a="http://schemas.openxmlformats.org/drawingml/2006/main">
-            <a:r>
-              <a:t>}</a:t>
+              <a:t>问：期望寿命为什么不判分？</a:t>
+            </a:r>
+          </a:p>
+          <a:p xmlns:a="http://schemas.openxmlformats.org/drawingml/2006/main">
+            <a:r>
+              <a:t>答：上海 83.18 岁是 2022 年户籍人口，之后未公布；纽约 83.2 岁是 2024 年全体居民的临时数。年份和人群都不同</a:t>
+            </a:r>
+          </a:p>
+          <a:p xmlns:a="http://schemas.openxmlformats.org/drawingml/2006/main">
+            <a:r>
+              <a:t>问：孕产妇死亡率口径一样吗？</a:t>
+            </a:r>
+          </a:p>
+          <a:p xmlns:a="http://schemas.openxmlformats.org/drawingml/2006/main">
+            <a:r>
+              <a:t>答：纽约原始口径算到产后一年（32.2/10 万，2022）；按纽约报告里的死亡时间分布截到 42 天约 21/10 万，与上海口径一致（NY-H11）</a:t>
+            </a:r>
+          </a:p>
+          <a:p xmlns:a="http://schemas.openxmlformats.org/drawingml/2006/main">
+            <a:r>
+              <a:t>问：杀人案能比吗？</a:t>
+            </a:r>
+          </a:p>
+          <a:p xmlns:a="http://schemas.openxmlformats.org/drawingml/2006/main">
+            <a:r>
+              <a:t>答：上海是公安立案的杀人案，纽约是谋杀案，口径略有不同，但差约 19 倍（SH-H10、NY-H4a）</a:t>
+            </a:r>
+          </a:p>
+          <a:p xmlns:a="http://schemas.openxmlformats.org/drawingml/2006/main">
+            <a:r>
+              <a:t>问：文化为什么判纽约胜？</a:t>
+            </a:r>
+          </a:p>
+          <a:p xmlns:a="http://schemas.openxmlformats.org/drawingml/2006/main">
+            <a:r>
+              <a:t>答：纽约有三大图书馆系统 200 多个网点、财政资助 1,171 家机构且 96% 有免费或补贴项目；上海只查到市、区两级图书馆 20 个，街镇分馆和免费场馆的全市统一数字没有找到。按能查到的数据判</a:t>
+            </a:r>
+          </a:p>
+          <a:p xmlns:a="http://schemas.openxmlformats.org/drawingml/2006/main"/>
+          <a:p xmlns:a="http://schemas.openxmlformats.org/drawingml/2006/main">
+            <a:r>
+              <a:t>口径：</a:t>
+            </a:r>
+          </a:p>
+          <a:p xmlns:a="http://schemas.openxmlformats.org/drawingml/2006/main">
+            <a:r>
+              <a:t>纽约孕产妇死亡约21/10万由报告按产后42天折算；两项医疗结局统计年份不同。</a:t>
+            </a:r>
+          </a:p>
+          <a:p xmlns:a="http://schemas.openxmlformats.org/drawingml/2006/main">
+            <a:r>
+              <a:t>上海为杀人案立案，纽约为谋杀案；年份不同，比率由案件与人口计算。</a:t>
+            </a:r>
+          </a:p>
+          <a:p xmlns:a="http://schemas.openxmlformats.org/drawingml/2006/main">
+            <a:r>
+              <a:t>生师比由官方学生与教师数计算；上海中小学含高中，纽约为K–12。</a:t>
+            </a:r>
+          </a:p>
+          <a:p xmlns:a="http://schemas.openxmlformats.org/drawingml/2006/main">
+            <a:r>
+              <a:t>按公共图书馆网络与文化资助作判断；上海市区馆20个不用于与纽约全部网点硬比。</a:t>
+            </a:r>
+          </a:p>
+          <a:p xmlns:a="http://schemas.openxmlformats.org/drawingml/2006/main">
+            <a:r>
+              <a:t>来源：</a:t>
+            </a:r>
+          </a:p>
+          <a:p xmlns:a="http://schemas.openxmlformats.org/drawingml/2006/main">
+            <a:r>
+              <a:t>https://tjj.sh.gov.cn/tjgb/20260330/e0772941e8e041eaaad2df850b44ef98.html</a:t>
+            </a:r>
+          </a:p>
+          <a:p xmlns:a="http://schemas.openxmlformats.org/drawingml/2006/main">
+            <a:r>
+              <a:t>https://wsjkw.sh.gov.cn/tjsj2/20260730/7154e5b1603642a8a3c7c0b2b8b3b149.html</a:t>
+            </a:r>
+          </a:p>
+          <a:p xmlns:a="http://schemas.openxmlformats.org/drawingml/2006/main">
+            <a:r>
+              <a:t>https://www.nyc.gov/assets/doh/downloads/pdf/vs/2023sum.pdf</a:t>
+            </a:r>
+          </a:p>
+          <a:p xmlns:a="http://schemas.openxmlformats.org/drawingml/2006/main">
+            <a:r>
+              <a:t>https://www.nyc.gov/assets/doh/downloads/pdf/data/maternal-mortality-annual-report-2025.pdf</a:t>
+            </a:r>
+          </a:p>
+          <a:p xmlns:a="http://schemas.openxmlformats.org/drawingml/2006/main">
+            <a:r>
+              <a:t>https://tjj.sh.gov.cn/tjnj/2025tjnj/C2303.htm</a:t>
+            </a:r>
+          </a:p>
+          <a:p xmlns:a="http://schemas.openxmlformats.org/drawingml/2006/main">
+            <a:r>
+              <a:t>https://www.nyc.gov/site/nypd/news/PR001/nypd-safest-year-ever-gun-violence-fewest-shooting-incidents-shooting</a:t>
+            </a:r>
+          </a:p>
+          <a:p xmlns:a="http://schemas.openxmlformats.org/drawingml/2006/main">
+            <a:r>
+              <a:t>https://tjj.sh.gov.cn/tjnj/2025tjnj/C2015.htm</a:t>
+            </a:r>
+          </a:p>
+          <a:p xmlns:a="http://schemas.openxmlformats.org/drawingml/2006/main">
+            <a:r>
+              <a:t>https://tjj.sh.gov.cn/tjnj/2025tjnj/C2013.htm</a:t>
+            </a:r>
+          </a:p>
+          <a:p xmlns:a="http://schemas.openxmlformats.org/drawingml/2006/main">
+            <a:r>
+              <a:t>https://tjj.sh.gov.cn/tjnj/2025tjnj/C2004.htm</a:t>
+            </a:r>
+          </a:p>
+          <a:p xmlns:a="http://schemas.openxmlformats.org/drawingml/2006/main">
+            <a:r>
+              <a:t>https://data.nysed.gov/studenteducator.php?year=2025&amp;instid=7889678368</a:t>
+            </a:r>
+          </a:p>
+          <a:p xmlns:a="http://schemas.openxmlformats.org/drawingml/2006/main">
+            <a:r>
+              <a:t>https://www.nypl.org/about/locations</a:t>
+            </a:r>
+          </a:p>
+          <a:p xmlns:a="http://schemas.openxmlformats.org/drawingml/2006/main">
+            <a:r>
+              <a:t>https://www.bklynlibrary.org/browse-the-branches/about</a:t>
+            </a:r>
+          </a:p>
+          <a:p xmlns:a="http://schemas.openxmlformats.org/drawingml/2006/main">
+            <a:r>
+              <a:t>http://gis.nyc.gov/site/dcla/about/pressrelease/PR-2026-2-26-NYC-Department-of-Cultural-Affairs-Announces-74.3-Million-in-Grants-for-1171-Cultural-Organizations-Across-the-City.page</a:t>
+            </a:r>
+          </a:p>
+          <a:p xmlns:a="http://schemas.openxmlformats.org/drawingml/2006/main">
+            <a:r>
+              <a:t>https://english.shanghai.gov.cn/en-Latest-WhatsNew/20260212/af11d8de7fd24819bff50c940e428855.html</a:t>
             </a:r>
           </a:p>
         </p:txBody>
@@ -4103,1519 +2371,285 @@
               <a:t>原资料截图于2026-10-10采集；黑框为采集者添加。地图快照2026-10-12，原始HTML由同学提供，本版恢复地图原始色系，保留几何、点位和数值。</a:t>
             </a:r>
           </a:p>
-          <a:p xmlns:a="http://schemas.openxmlformats.org/drawingml/2006/main">
-            <a:r>
-              <a:t/>
-            </a:r>
-          </a:p>
-          <a:p xmlns:a="http://schemas.openxmlformats.org/drawingml/2006/main">
-            <a:r>
-              <a:t>{</a:t>
-            </a:r>
-          </a:p>
-          <a:p xmlns:a="http://schemas.openxmlformats.org/drawingml/2006/main">
-            <a:r>
-              <a:t>  "audited_at": "2026-10-17",</a:t>
-            </a:r>
-          </a:p>
-          <a:p xmlns:a="http://schemas.openxmlformats.org/drawingml/2006/main">
-            <a:r>
-              <a:t>  "read_only_repository": "C:/Users/13816/Documents/GitHub/people-city-pre",</a:t>
-            </a:r>
-          </a:p>
-          <a:p xmlns:a="http://schemas.openxmlformats.org/drawingml/2006/main">
-            <a:r>
-              <a:t>  "precedence": [</a:t>
-            </a:r>
-          </a:p>
-          <a:p xmlns:a="http://schemas.openxmlformats.org/drawingml/2006/main">
-            <a:r>
-              <a:t>    "用户2026-10-17最新补充",</a:t>
-            </a:r>
-          </a:p>
-          <a:p xmlns:a="http://schemas.openxmlformats.org/drawingml/2006/main">
-            <a:r>
-              <a:t>    "本次用户逐页修改要求",</a:t>
-            </a:r>
-          </a:p>
-          <a:p xmlns:a="http://schemas.openxmlformats.org/drawingml/2006/main">
-            <a:r>
-              <a:t>    "script/口径表.md与data/data-table.md最新修订段",</a:t>
-            </a:r>
-          </a:p>
-          <a:p xmlns:a="http://schemas.openxmlformats.org/drawingml/2006/main">
-            <a:r>
-              <a:t>    "script/讲稿.md正文",</a:t>
-            </a:r>
-          </a:p>
-          <a:p xmlns:a="http://schemas.openxmlformats.org/drawingml/2006/main">
-            <a:r>
-              <a:t>    "早期已作废段落"</a:t>
-            </a:r>
-          </a:p>
-          <a:p xmlns:a="http://schemas.openxmlformats.org/drawingml/2006/main">
-            <a:r>
-              <a:t>  ],</a:t>
-            </a:r>
-          </a:p>
-          <a:p xmlns:a="http://schemas.openxmlformats.org/drawingml/2006/main">
-            <a:r>
-              <a:t>  "no_total_score": true,</a:t>
-            </a:r>
-          </a:p>
-          <a:p xmlns:a="http://schemas.openxmlformats.org/drawingml/2006/main">
-            <a:r>
-              <a:t>  "comparisons": {</a:t>
-            </a:r>
-          </a:p>
-          <a:p xmlns:a="http://schemas.openxmlformats.org/drawingml/2006/main">
-            <a:r>
-              <a:t>    "shanghai": {</a:t>
-            </a:r>
-          </a:p>
-          <a:p xmlns:a="http://schemas.openxmlformats.org/drawingml/2006/main">
-            <a:r>
-              <a:t>      "area_km2": 6340.5,</a:t>
-            </a:r>
-          </a:p>
-          <a:p xmlns:a="http://schemas.openxmlformats.org/drawingml/2006/main">
-            <a:r>
-              <a:t>      "population": 24854100,</a:t>
-            </a:r>
-          </a:p>
-          <a:p xmlns:a="http://schemas.openxmlformats.org/drawingml/2006/main">
-            <a:r>
-              <a:t>      "population_year": 2025,</a:t>
-            </a:r>
-          </a:p>
-          <a:p xmlns:a="http://schemas.openxmlformats.org/drawingml/2006/main">
-            <a:r>
-              <a:t>      "scope": "上海全市",</a:t>
-            </a:r>
-          </a:p>
-          <a:p xmlns:a="http://schemas.openxmlformats.org/drawingml/2006/main">
-            <a:r>
-              <a:t>      "source": "https://tjj.sh.gov.cn/tjgb/20260330/e0772941e8e041eaaad2df850b44ef98.html"</a:t>
-            </a:r>
-          </a:p>
-          <a:p xmlns:a="http://schemas.openxmlformats.org/drawingml/2006/main">
-            <a:r>
-              <a:t>    },</a:t>
-            </a:r>
-          </a:p>
-          <a:p xmlns:a="http://schemas.openxmlformats.org/drawingml/2006/main">
-            <a:r>
-              <a:t>    "newyork": {</a:t>
-            </a:r>
-          </a:p>
-          <a:p xmlns:a="http://schemas.openxmlformats.org/drawingml/2006/main">
-            <a:r>
-              <a:t>      "area_km2": 778.2,</a:t>
-            </a:r>
-          </a:p>
-          <a:p xmlns:a="http://schemas.openxmlformats.org/drawingml/2006/main">
-            <a:r>
-              <a:t>      "population": 8584629,</a:t>
-            </a:r>
-          </a:p>
-          <a:p xmlns:a="http://schemas.openxmlformats.org/drawingml/2006/main">
-            <a:r>
-              <a:t>      "population_date": "2025-07-01",</a:t>
-            </a:r>
-          </a:p>
-          <a:p xmlns:a="http://schemas.openxmlformats.org/drawingml/2006/main">
-            <a:r>
-              <a:t>      "scope": "纽约市五区",</a:t>
-            </a:r>
-          </a:p>
-          <a:p xmlns:a="http://schemas.openxmlformats.org/drawingml/2006/main">
-            <a:r>
-              <a:t>      "sources": [</a:t>
-            </a:r>
-          </a:p>
-          <a:p xmlns:a="http://schemas.openxmlformats.org/drawingml/2006/main">
-            <a:r>
-              <a:t>        "https://www.health.ny.gov/statistics/vital_statistics/2022/table02.htm",</a:t>
-            </a:r>
-          </a:p>
-          <a:p xmlns:a="http://schemas.openxmlformats.org/drawingml/2006/main">
-            <a:r>
-              <a:t>        "https://www.nyc.gov/content/planning/pages/planning/population"</a:t>
-            </a:r>
-          </a:p>
-          <a:p xmlns:a="http://schemas.openxmlformats.org/drawingml/2006/main">
-            <a:r>
-              <a:t>      ]</a:t>
-            </a:r>
-          </a:p>
-          <a:p xmlns:a="http://schemas.openxmlformats.org/drawingml/2006/main">
-            <a:r>
-              <a:t>    },</a:t>
-            </a:r>
-          </a:p>
-          <a:p xmlns:a="http://schemas.openxmlformats.org/drawingml/2006/main">
-            <a:r>
-              <a:t>    "fx": {</a:t>
-            </a:r>
-          </a:p>
-          <a:p xmlns:a="http://schemas.openxmlformats.org/drawingml/2006/main">
-            <a:r>
-              <a:t>      "usd_cny": 6.733,</a:t>
-            </a:r>
-          </a:p>
-          <a:p xmlns:a="http://schemas.openxmlformats.org/drawingml/2006/main">
-            <a:r>
-              <a:t>      "date": "2026-10-09",</a:t>
-            </a:r>
-          </a:p>
-          <a:p xmlns:a="http://schemas.openxmlformats.org/drawingml/2006/main">
-            <a:r>
-              <a:t>      "source_quality": "香港电台转述中国外汇交易中心公告，表中未提供精确URL，只核对检索摘要"</a:t>
-            </a:r>
-          </a:p>
-          <a:p xmlns:a="http://schemas.openxmlformats.org/drawingml/2006/main">
-            <a:r>
-              <a:t>    },</a:t>
-            </a:r>
-          </a:p>
-          <a:p xmlns:a="http://schemas.openxmlformats.org/drawingml/2006/main">
-            <a:r>
-              <a:t>    "income": {</a:t>
-            </a:r>
-          </a:p>
-          <a:p xmlns:a="http://schemas.openxmlformats.org/drawingml/2006/main">
-            <a:r>
-              <a:t>      "nyc_household_median_usd": 81228,</a:t>
-            </a:r>
-          </a:p>
-          <a:p xmlns:a="http://schemas.openxmlformats.org/drawingml/2006/main">
-            <a:r>
-              <a:t>      "nyc_year": 2024,</a:t>
-            </a:r>
-          </a:p>
-          <a:p xmlns:a="http://schemas.openxmlformats.org/drawingml/2006/main">
-            <a:r>
-              <a:t>      "nyc_source": "https://rentguidelinesboard.cityofnewyork.us/wp-content/uploads/2026/04/2026-IA.pdf",</a:t>
-            </a:r>
-          </a:p>
-          <a:p xmlns:a="http://schemas.openxmlformats.org/drawingml/2006/main">
-            <a:r>
-              <a:t>      "shanghai_percapita_disposable_cny": 91987,</a:t>
-            </a:r>
-          </a:p>
-          <a:p xmlns:a="http://schemas.openxmlformats.org/drawingml/2006/main">
-            <a:r>
-              <a:t>      "shanghai_year": 2025,</a:t>
-            </a:r>
-          </a:p>
-          <a:p xmlns:a="http://schemas.openxmlformats.org/drawingml/2006/main">
-            <a:r>
-              <a:t>      "household_size": 2.24,</a:t>
-            </a:r>
-          </a:p>
-          <a:p xmlns:a="http://schemas.openxmlformats.org/drawingml/2006/main">
-            <a:r>
-              <a:t>      "shanghai_derived_household_cny": 206050.88,</a:t>
-            </a:r>
-          </a:p>
-          <a:p xmlns:a="http://schemas.openxmlformats.org/drawingml/2006/main">
-            <a:r>
-              <a:t>      "approx_ratio": 2.65,</a:t>
-            </a:r>
-          </a:p>
-          <a:p xmlns:a="http://schemas.openxmlformats.org/drawingml/2006/main">
-            <a:r>
-              <a:t>      "onslide": "家庭收入差约2.65倍（纽约约55万元，上海约20.6万元）",</a:t>
-            </a:r>
-          </a:p>
-          <a:p xmlns:a="http://schemas.openxmlformats.org/drawingml/2006/main">
-            <a:r>
-              <a:t>      "footnote": "纽约为税前户收入中位数；上海由人均可支配收入均值×家庭户规模估算。",</a:t>
-            </a:r>
-          </a:p>
-          <a:p xmlns:a="http://schemas.openxmlformats.org/drawingml/2006/main">
-            <a:r>
-              <a:t>      "shanghai_sources": [</a:t>
-            </a:r>
-          </a:p>
-          <a:p xmlns:a="http://schemas.openxmlformats.org/drawingml/2006/main">
-            <a:r>
-              <a:t>        "https://tjj.sh.gov.cn/ydsj71/20260120/39ae4cd58421478d897b739d83f39c10.html",</a:t>
-            </a:r>
-          </a:p>
-          <a:p xmlns:a="http://schemas.openxmlformats.org/drawingml/2006/main">
-            <a:r>
-              <a:t>        "https://tjj.sh.gov.cn/tjgb/20260630/b74619258aee4912a55a1da928b5be30.html"</a:t>
-            </a:r>
-          </a:p>
-          <a:p xmlns:a="http://schemas.openxmlformats.org/drawingml/2006/main">
-            <a:r>
-              <a:t>      ]</a:t>
-            </a:r>
-          </a:p>
-          <a:p xmlns:a="http://schemas.openxmlformats.org/drawingml/2006/main">
-            <a:r>
-              <a:t>    }</a:t>
-            </a:r>
-          </a:p>
-          <a:p xmlns:a="http://schemas.openxmlformats.org/drawingml/2006/main">
-            <a:r>
-              <a:t>  },</a:t>
-            </a:r>
-          </a:p>
-          <a:p xmlns:a="http://schemas.openxmlformats.org/drawingml/2006/main">
-            <a:r>
-              <a:t>  "opening_toilets": {</a:t>
-            </a:r>
-          </a:p>
-          <a:p xmlns:a="http://schemas.openxmlformats.org/drawingml/2006/main">
-            <a:r>
-              <a:t>    "count_shanghai_records": 8325,</a:t>
-            </a:r>
-          </a:p>
-          <a:p xmlns:a="http://schemas.openxmlformats.org/drawingml/2006/main">
-            <a:r>
-              <a:t>    "records_scope": "开放平台“城市设施-公共厕所”接口元数据；2020–2025时间范围，2026-09-21更新；有条件开放",</a:t>
-            </a:r>
-          </a:p>
-          <a:p xmlns:a="http://schemas.openxmlformats.org/drawingml/2006/main">
-            <a:r>
-              <a:t>    "shanghai_density_persons_per_record": 2985,</a:t>
-            </a:r>
-          </a:p>
-          <a:p xmlns:a="http://schemas.openxmlformats.org/drawingml/2006/main">
-            <a:r>
-              <a:t>    "nyc_total": 1064,</a:t>
-            </a:r>
-          </a:p>
-          <a:p xmlns:a="http://schemas.openxmlformats.org/drawingml/2006/main">
-            <a:r>
-              <a:t>    "nyc_operational": 973,</a:t>
-            </a:r>
-          </a:p>
-          <a:p xmlns:a="http://schemas.openxmlformats.org/drawingml/2006/main">
-            <a:r>
-              <a:t>    "nyc_operational_date": "2025-11",</a:t>
-            </a:r>
-          </a:p>
-          <a:p xmlns:a="http://schemas.openxmlformats.org/drawingml/2006/main">
-            <a:r>
-              <a:t>    "nyc_density_persons_per_operational": 8823,</a:t>
-            </a:r>
-          </a:p>
-          <a:p xmlns:a="http://schemas.openxmlformats.org/drawingml/2006/main">
-            <a:r>
-              <a:t>    "nyc_open_24h": 8,</a:t>
-            </a:r>
-          </a:p>
-          <a:p xmlns:a="http://schemas.openxmlformats.org/drawingml/2006/main">
-            <a:r>
-              <a:t>    "ratio_approx": 3,</a:t>
-            </a:r>
-          </a:p>
-          <a:p xmlns:a="http://schemas.openxmlformats.org/drawingml/2006/main">
-            <a:r>
-              <a:t>    "renovated_shanghai": 2631,</a:t>
-            </a:r>
-          </a:p>
-          <a:p xmlns:a="http://schemas.openxmlformats.org/drawingml/2006/main">
-            <a:r>
-              <a:t>    "third_toilets": "1200+",</a:t>
-            </a:r>
-          </a:p>
-          <a:p xmlns:a="http://schemas.openxmlformats.org/drawingml/2006/main">
-            <a:r>
-              <a:t>    "paper": "2600+",</a:t>
-            </a:r>
-          </a:p>
-          <a:p xmlns:a="http://schemas.openxmlformats.org/drawingml/2006/main">
-            <a:r>
-              <a:t>    "warm_water": "2000+",</a:t>
-            </a:r>
-          </a:p>
-          <a:p xmlns:a="http://schemas.openxmlformats.org/drawingml/2006/main">
-            <a:r>
-              <a:t>    "footnote": "上海为开放平台记录，纽约为市政运营公厕；只比较量级。",</a:t>
-            </a:r>
-          </a:p>
-          <a:p xmlns:a="http://schemas.openxmlformats.org/drawingml/2006/main">
-            <a:r>
-              <a:t>    "sources": [</a:t>
-            </a:r>
-          </a:p>
-          <a:p xmlns:a="http://schemas.openxmlformats.org/drawingml/2006/main">
-            <a:r>
-              <a:t>      "https://data.sh.gov.cn/",</a:t>
-            </a:r>
-          </a:p>
-          <a:p xmlns:a="http://schemas.openxmlformats.org/drawingml/2006/main">
-            <a:r>
-              <a:t>      "https://lhsr.sh.gov.cn/ywdt/20260401/00d7c161-8280-490c-a0da-d6c995e85058.html",</a:t>
-            </a:r>
-          </a:p>
-          <a:p xmlns:a="http://schemas.openxmlformats.org/drawingml/2006/main">
-            <a:r>
-              <a:t>      "https://lhsr.sh.gov.cn/ywdt/20251204/b016509f-60a6-46cd-83fa-fdab372175c7.html",</a:t>
-            </a:r>
-          </a:p>
-          <a:p xmlns:a="http://schemas.openxmlformats.org/drawingml/2006/main">
-            <a:r>
-              <a:t>      "https://council.nyc.gov/data/public-restroom-analysis/"</a:t>
-            </a:r>
-          </a:p>
-          <a:p xmlns:a="http://schemas.openxmlformats.org/drawingml/2006/main">
-            <a:r>
-              <a:t>    ],</a:t>
-            </a:r>
-          </a:p>
-          <a:p xmlns:a="http://schemas.openxmlformats.org/drawingml/2006/main">
-            <a:r>
-              <a:t>    "source_asset": "screenshots/sh31（平台数据集精确深链接原表未提供）",</a:t>
-            </a:r>
-          </a:p>
-          <a:p xmlns:a="http://schemas.openxmlformats.org/drawingml/2006/main">
-            <a:r>
-              <a:t>    "verdict": "不计分"</a:t>
-            </a:r>
-          </a:p>
-          <a:p xmlns:a="http://schemas.openxmlformats.org/drawingml/2006/main">
-            <a:r>
-              <a:t>  },</a:t>
-            </a:r>
-          </a:p>
-          <a:p xmlns:a="http://schemas.openxmlformats.org/drawingml/2006/main">
-            <a:r>
-              <a:t>  "score_items": [</a:t>
-            </a:r>
-          </a:p>
-          <a:p xmlns:a="http://schemas.openxmlformats.org/drawingml/2006/main">
-            <a:r>
-              <a:t>    {</a:t>
-            </a:r>
-          </a:p>
-          <a:p xmlns:a="http://schemas.openxmlformats.org/drawingml/2006/main">
-            <a:r>
-              <a:t>      "item": "住",</a:t>
-            </a:r>
-          </a:p>
-          <a:p xmlns:a="http://schemas.openxmlformats.org/drawingml/2006/main">
-            <a:r>
-              <a:t>      "winner": "上海",</a:t>
-            </a:r>
-          </a:p>
-          <a:p xmlns:a="http://schemas.openxmlformats.org/drawingml/2006/main">
-            <a:r>
-              <a:t>      "degree": "明显",</a:t>
-            </a:r>
-          </a:p>
-          <a:p xmlns:a="http://schemas.openxmlformats.org/drawingml/2006/main">
-            <a:r>
-              <a:t>      "shanghai": 59,</a:t>
-            </a:r>
-          </a:p>
-          <a:p xmlns:a="http://schemas.openxmlformats.org/drawingml/2006/main">
-            <a:r>
-              <a:t>      "newyork": 32.3,</a:t>
-            </a:r>
-          </a:p>
-          <a:p xmlns:a="http://schemas.openxmlformats.org/drawingml/2006/main">
-            <a:r>
-              <a:t>      "unit": "自有住房率%",</a:t>
-            </a:r>
-          </a:p>
-          <a:p xmlns:a="http://schemas.openxmlformats.org/drawingml/2006/main">
-            <a:r>
-              <a:t>      "years": "上海2020；纽约2023",</a:t>
-            </a:r>
-          </a:p>
-          <a:p xmlns:a="http://schemas.openxmlformats.org/drawingml/2006/main">
-            <a:r>
-              <a:t>      "footnote": "上海为七普长表家庭户，纽约为HVS已入住住房；分母与年份不同。",</a:t>
-            </a:r>
-          </a:p>
-          <a:p xmlns:a="http://schemas.openxmlformats.org/drawingml/2006/main">
-            <a:r>
-              <a:t>      "practice": "2025年筹措保租房7.4万套（间）、建设者之家床位3.2万张；加装电梯3295台。",</a:t>
-            </a:r>
-          </a:p>
-          <a:p xmlns:a="http://schemas.openxmlformats.org/drawingml/2006/main">
-            <a:r>
-              <a:t>      "sources": [</a:t>
-            </a:r>
-          </a:p>
-          <a:p xmlns:a="http://schemas.openxmlformats.org/drawingml/2006/main">
-            <a:r>
-              <a:t>        "https://tjj.sh.gov.cn/tjnj/2020rktjnj/BNJc-9-4.jpg",</a:t>
-            </a:r>
-          </a:p>
-          <a:p xmlns:a="http://schemas.openxmlformats.org/drawingml/2006/main">
-            <a:r>
-              <a:t>        "https://www.nyc.gov/assets/hpd/downloads/pdfs/about/2023%20NYCHVS%20Selected%20Initial%20Findings.pdf",</a:t>
-            </a:r>
-          </a:p>
-          <a:p xmlns:a="http://schemas.openxmlformats.org/drawingml/2006/main">
-            <a:r>
-              <a:t>        "https://tjj.sh.gov.cn/tjgb/20260330/e0772941e8e041eaaad2df850b44ef98.html"</a:t>
-            </a:r>
-          </a:p>
-          <a:p xmlns:a="http://schemas.openxmlformats.org/drawingml/2006/main">
-            <a:r>
-              <a:t>      ]</a:t>
-            </a:r>
-          </a:p>
-          <a:p xmlns:a="http://schemas.openxmlformats.org/drawingml/2006/main">
-            <a:r>
-              <a:t>    },</a:t>
-            </a:r>
-          </a:p>
-          <a:p xmlns:a="http://schemas.openxmlformats.org/drawingml/2006/main">
-            <a:r>
-              <a:t>    {</a:t>
-            </a:r>
-          </a:p>
-          <a:p xmlns:a="http://schemas.openxmlformats.org/drawingml/2006/main">
-            <a:r>
-              <a:t>      "item": "吃",</a:t>
-            </a:r>
-          </a:p>
-          <a:p xmlns:a="http://schemas.openxmlformats.org/drawingml/2006/main">
-            <a:r>
-              <a:t>      "winner": "纽约",</a:t>
-            </a:r>
-          </a:p>
-          <a:p xmlns:a="http://schemas.openxmlformats.org/drawingml/2006/main">
-            <a:r>
-              <a:t>      "degree": "稍胜",</a:t>
-            </a:r>
-          </a:p>
-          <a:p xmlns:a="http://schemas.openxmlformats.org/drawingml/2006/main">
-            <a:r>
-              <a:t>      "shanghai": 13550,</a:t>
-            </a:r>
-          </a:p>
-          <a:p xmlns:a="http://schemas.openxmlformats.org/drawingml/2006/main">
-            <a:r>
-              <a:t>      "newyork_state_usd": 9394,</a:t>
-            </a:r>
-          </a:p>
-          <a:p xmlns:a="http://schemas.openxmlformats.org/drawingml/2006/main">
-            <a:r>
-              <a:t>      "newyork_cny": 63249.802,</a:t>
-            </a:r>
-          </a:p>
-          <a:p xmlns:a="http://schemas.openxmlformats.org/drawingml/2006/main">
-            <a:r>
-              <a:t>      "ratio": 4.7,</a:t>
-            </a:r>
-          </a:p>
-          <a:p xmlns:a="http://schemas.openxmlformats.org/drawingml/2006/main">
-            <a:r>
-              <a:t>      "years": "纽约州2025；上海2024",</a:t>
-            </a:r>
-          </a:p>
-          <a:p xmlns:a="http://schemas.openxmlformats.org/drawingml/2006/main">
-            <a:r>
-              <a:t>      "footnote": "纽约州在家食品饮料＋餐饮住宿，上海食品烟酒；价格与分类差异使实际差距小于账面。",</a:t>
-            </a:r>
-          </a:p>
-          <a:p xmlns:a="http://schemas.openxmlformats.org/drawingml/2006/main">
-            <a:r>
-              <a:t>      "ny_components_usd": {</a:t>
-            </a:r>
-          </a:p>
-          <a:p xmlns:a="http://schemas.openxmlformats.org/drawingml/2006/main">
-            <a:r>
-              <a:t>        "at_home": 4389,</a:t>
-            </a:r>
-          </a:p>
-          <a:p xmlns:a="http://schemas.openxmlformats.org/drawingml/2006/main">
-            <a:r>
-              <a:t>        "dining_lodging": 5005</a:t>
-            </a:r>
-          </a:p>
-          <a:p xmlns:a="http://schemas.openxmlformats.org/drawingml/2006/main">
-            <a:r>
-              <a:t>      },</a:t>
-            </a:r>
-          </a:p>
-          <a:p xmlns:a="http://schemas.openxmlformats.org/drawingml/2006/main">
-            <a:r>
-              <a:t>      "sources": [</a:t>
-            </a:r>
-          </a:p>
-          <a:p xmlns:a="http://schemas.openxmlformats.org/drawingml/2006/main">
-            <a:r>
-              <a:t>        "https://apps.bea.gov/regional/zip/SAPCE.zip",</a:t>
-            </a:r>
-          </a:p>
-          <a:p xmlns:a="http://schemas.openxmlformats.org/drawingml/2006/main">
-            <a:r>
-              <a:t>        "https://tjj.sh.gov.cn/tjnj/2025tjnj/C0905.htm"</a:t>
-            </a:r>
-          </a:p>
-          <a:p xmlns:a="http://schemas.openxmlformats.org/drawingml/2006/main">
-            <a:r>
-              <a:t>      ]</a:t>
-            </a:r>
-          </a:p>
-          <a:p xmlns:a="http://schemas.openxmlformats.org/drawingml/2006/main">
-            <a:r>
-              <a:t>    },</a:t>
-            </a:r>
-          </a:p>
-          <a:p xmlns:a="http://schemas.openxmlformats.org/drawingml/2006/main">
-            <a:r>
-              <a:t>    {</a:t>
-            </a:r>
-          </a:p>
-          <a:p xmlns:a="http://schemas.openxmlformats.org/drawingml/2006/main">
-            <a:r>
-              <a:t>      "item": "穿",</a:t>
-            </a:r>
-          </a:p>
-          <a:p xmlns:a="http://schemas.openxmlformats.org/drawingml/2006/main">
-            <a:r>
-              <a:t>      "winner": "纽约",</a:t>
-            </a:r>
-          </a:p>
-          <a:p xmlns:a="http://schemas.openxmlformats.org/drawingml/2006/main">
-            <a:r>
-              <a:t>      "degree": "压倒性",</a:t>
-            </a:r>
-          </a:p>
-          <a:p xmlns:a="http://schemas.openxmlformats.org/drawingml/2006/main">
-            <a:r>
-              <a:t>      "shanghai_cny": 1936,</a:t>
-            </a:r>
-          </a:p>
-          <a:p xmlns:a="http://schemas.openxmlformats.org/drawingml/2006/main">
-            <a:r>
-              <a:t>      "newyork_state_usd": 1947,</a:t>
-            </a:r>
-          </a:p>
-          <a:p xmlns:a="http://schemas.openxmlformats.org/drawingml/2006/main">
-            <a:r>
-              <a:t>      "newyork_cny": 13109.151,</a:t>
-            </a:r>
-          </a:p>
-          <a:p xmlns:a="http://schemas.openxmlformats.org/drawingml/2006/main">
-            <a:r>
-              <a:t>      "ratio": 6.8,</a:t>
-            </a:r>
-          </a:p>
-          <a:p xmlns:a="http://schemas.openxmlformats.org/drawingml/2006/main">
-            <a:r>
-              <a:t>      "years": "纽约州2025；上海2024",</a:t>
-            </a:r>
-          </a:p>
-          <a:p xmlns:a="http://schemas.openxmlformats.org/drawingml/2006/main">
-            <a:r>
-              <a:t>      "footnote": "纽约使用州级数据；按2026-10-09汇率换算。",</a:t>
-            </a:r>
-          </a:p>
-          <a:p xmlns:a="http://schemas.openxmlformats.org/drawingml/2006/main">
-            <a:r>
-              <a:t>      "sources": [</a:t>
-            </a:r>
-          </a:p>
-          <a:p xmlns:a="http://schemas.openxmlformats.org/drawingml/2006/main">
-            <a:r>
-              <a:t>        "https://apps.bea.gov/regional/zip/SAPCE.zip",</a:t>
-            </a:r>
-          </a:p>
-          <a:p xmlns:a="http://schemas.openxmlformats.org/drawingml/2006/main">
-            <a:r>
-              <a:t>        "https://tjj.sh.gov.cn/tjnj/2025tjnj/C0905.htm"</a:t>
-            </a:r>
-          </a:p>
-          <a:p xmlns:a="http://schemas.openxmlformats.org/drawingml/2006/main">
-            <a:r>
-              <a:t>      ]</a:t>
-            </a:r>
-          </a:p>
-          <a:p xmlns:a="http://schemas.openxmlformats.org/drawingml/2006/main">
-            <a:r>
-              <a:t>    },</a:t>
-            </a:r>
-          </a:p>
-          <a:p xmlns:a="http://schemas.openxmlformats.org/drawingml/2006/main">
-            <a:r>
-              <a:t>    {</a:t>
-            </a:r>
-          </a:p>
-          <a:p xmlns:a="http://schemas.openxmlformats.org/drawingml/2006/main">
-            <a:r>
-              <a:t>      "item": "行",</a:t>
-            </a:r>
-          </a:p>
-          <a:p xmlns:a="http://schemas.openxmlformats.org/drawingml/2006/main">
-            <a:r>
-              <a:t>      "winner": "上海",</a:t>
-            </a:r>
-          </a:p>
-          <a:p xmlns:a="http://schemas.openxmlformats.org/drawingml/2006/main">
-            <a:r>
-              <a:t>      "degree": "压倒性",</a:t>
-            </a:r>
-          </a:p>
-          <a:p xmlns:a="http://schemas.openxmlformats.org/drawingml/2006/main">
-            <a:r>
-              <a:t>      "single_fare": {</a:t>
-            </a:r>
-          </a:p>
-          <a:p xmlns:a="http://schemas.openxmlformats.org/drawingml/2006/main">
-            <a:r>
-              <a:t>        "shanghai_cny": "3–4",</a:t>
-            </a:r>
-          </a:p>
-          <a:p xmlns:a="http://schemas.openxmlformats.org/drawingml/2006/main">
-            <a:r>
-              <a:t>        "nyc_usd": 3,</a:t>
-            </a:r>
-          </a:p>
-          <a:p xmlns:a="http://schemas.openxmlformats.org/drawingml/2006/main">
-            <a:r>
-              <a:t>        "nyc_income_adjusted_cny": 7.6</a:t>
-            </a:r>
-          </a:p>
-          <a:p xmlns:a="http://schemas.openxmlformats.org/drawingml/2006/main">
-            <a:r>
-              <a:t>      },</a:t>
-            </a:r>
-          </a:p>
-          <a:p xmlns:a="http://schemas.openxmlformats.org/drawingml/2006/main">
-            <a:r>
-              <a:t>      "week_commute": {</a:t>
-            </a:r>
-          </a:p>
-          <a:p xmlns:a="http://schemas.openxmlformats.org/drawingml/2006/main">
-            <a:r>
-              <a:t>        "shanghai_cny": 40,</a:t>
-            </a:r>
-          </a:p>
-          <a:p xmlns:a="http://schemas.openxmlformats.org/drawingml/2006/main">
-            <a:r>
-              <a:t>        "nyc_income_adjusted_cny": 89</a:t>
-            </a:r>
-          </a:p>
-          <a:p xmlns:a="http://schemas.openxmlformats.org/drawingml/2006/main">
-            <a:r>
-              <a:t>      },</a:t>
-            </a:r>
-          </a:p>
-          <a:p xmlns:a="http://schemas.openxmlformats.org/drawingml/2006/main">
-            <a:r>
-              <a:t>      "day_pass_cny": 18,</a:t>
-            </a:r>
-          </a:p>
-          <a:p xmlns:a="http://schemas.openxmlformats.org/drawingml/2006/main">
-            <a:r>
-              <a:t>      "three_day_pass_cny": 45,</a:t>
-            </a:r>
-          </a:p>
-          <a:p xmlns:a="http://schemas.openxmlformats.org/drawingml/2006/main">
-            <a:r>
-              <a:t>      "spending_share": {</a:t>
-            </a:r>
-          </a:p>
-          <a:p xmlns:a="http://schemas.openxmlformats.org/drawingml/2006/main">
-            <a:r>
-              <a:t>        "shanghai_transport_and_communication": 10.6,</a:t>
-            </a:r>
-          </a:p>
-          <a:p xmlns:a="http://schemas.openxmlformats.org/drawingml/2006/main">
-            <a:r>
-              <a:t>        "nyc_msa_transport": 14</a:t>
-            </a:r>
-          </a:p>
-          <a:p xmlns:a="http://schemas.openxmlformats.org/drawingml/2006/main">
-            <a:r>
-              <a:t>      },</a:t>
-            </a:r>
-          </a:p>
-          <a:p xmlns:a="http://schemas.openxmlformats.org/drawingml/2006/main">
-            <a:r>
-              <a:t>      "rides_percapita_annual": {</a:t>
-            </a:r>
-          </a:p>
-          <a:p xmlns:a="http://schemas.openxmlformats.org/drawingml/2006/main">
-            <a:r>
-              <a:t>        "shanghai": 150,</a:t>
-            </a:r>
-          </a:p>
-          <a:p xmlns:a="http://schemas.openxmlformats.org/drawingml/2006/main">
-            <a:r>
-              <a:t>        "newyork": 151</a:t>
-            </a:r>
-          </a:p>
-          <a:p xmlns:a="http://schemas.openxmlformats.org/drawingml/2006/main">
-            <a:r>
-              <a:t>      },</a:t>
-            </a:r>
-          </a:p>
-          <a:p xmlns:a="http://schemas.openxmlformats.org/drawingml/2006/main">
-            <a:r>
-              <a:t>      "practice": "22条、962km；120分钟公交轨交换乘优惠1元。",</a:t>
-            </a:r>
-          </a:p>
-          <a:p xmlns:a="http://schemas.openxmlformats.org/drawingml/2006/main">
-            <a:r>
-              <a:t>      "footnote": "票价按户收入差2.65倍折算；支出占比为纽约都会区交通（2022–23）对上海交通通信（2024）。",</a:t>
-            </a:r>
-          </a:p>
-          <a:p xmlns:a="http://schemas.openxmlformats.org/drawingml/2006/main">
-            <a:r>
-              <a:t>      "sources": [</a:t>
-            </a:r>
-          </a:p>
-          <a:p xmlns:a="http://schemas.openxmlformats.org/drawingml/2006/main">
-            <a:r>
-              <a:t>        "https://portal.311.nyc.gov/article/?kanumber=KA-01014",</a:t>
-            </a:r>
-          </a:p>
-          <a:p xmlns:a="http://schemas.openxmlformats.org/drawingml/2006/main">
-            <a:r>
-              <a:t>        "https://www.nyc.gov/site/opa/commuters/commuters.page",</a:t>
-            </a:r>
-          </a:p>
-          <a:p xmlns:a="http://schemas.openxmlformats.org/drawingml/2006/main">
-            <a:r>
-              <a:t>        "https://service.shmetro.com/cpxz/3983.htm",</a:t>
-            </a:r>
-          </a:p>
-          <a:p xmlns:a="http://schemas.openxmlformats.org/drawingml/2006/main">
-            <a:r>
-              <a:t>        "https://service.shmetro.com/pwyh/index.htm",</a:t>
-            </a:r>
-          </a:p>
-          <a:p xmlns:a="http://schemas.openxmlformats.org/drawingml/2006/main">
-            <a:r>
-              <a:t>        "https://service.shmetro.com/cpxz/index.htm",</a:t>
-            </a:r>
-          </a:p>
-          <a:p xmlns:a="http://schemas.openxmlformats.org/drawingml/2006/main">
-            <a:r>
-              <a:t>        "https://tjj.sh.gov.cn/tjnj/2025tjnj/C0913.htm",</a:t>
-            </a:r>
-          </a:p>
-          <a:p xmlns:a="http://schemas.openxmlformats.org/drawingml/2006/main">
-            <a:r>
-              <a:t>        "https://www.bls.gov/regions/northeast/news-release/consumerexpenditures_newyork.htm"</a:t>
-            </a:r>
-          </a:p>
-          <a:p xmlns:a="http://schemas.openxmlformats.org/drawingml/2006/main">
-            <a:r>
-              <a:t>      ],</a:t>
-            </a:r>
-          </a:p>
-          <a:p xmlns:a="http://schemas.openxmlformats.org/drawingml/2006/main">
-            <a:r>
-              <a:t>      "provenance_notes": "18/45价格由Johnny确认、官方文字页仅列使用规则；纽约14%原表取自州审计长2024-10报告摘要/转述，没有精确报告URL。最低工资折算方案已弃用。"</a:t>
-            </a:r>
-          </a:p>
-          <a:p xmlns:a="http://schemas.openxmlformats.org/drawingml/2006/main">
-            <a:r>
-              <a:t>    },</a:t>
-            </a:r>
-          </a:p>
-          <a:p xmlns:a="http://schemas.openxmlformats.org/drawingml/2006/main">
-            <a:r>
-              <a:t>    {</a:t>
-            </a:r>
-          </a:p>
-          <a:p xmlns:a="http://schemas.openxmlformats.org/drawingml/2006/main">
-            <a:r>
-              <a:t>      "item": "医疗",</a:t>
-            </a:r>
-          </a:p>
-          <a:p xmlns:a="http://schemas.openxmlformats.org/drawingml/2006/main">
-            <a:r>
-              <a:t>      "winner": "上海",</a:t>
-            </a:r>
-          </a:p>
-          <a:p xmlns:a="http://schemas.openxmlformats.org/drawingml/2006/main">
-            <a:r>
-              <a:t>      "degree": "明显",</a:t>
-            </a:r>
-          </a:p>
-          <a:p xmlns:a="http://schemas.openxmlformats.org/drawingml/2006/main">
-            <a:r>
-              <a:t>      "infant_mortality_per1000": {</a:t>
-            </a:r>
-          </a:p>
-          <a:p xmlns:a="http://schemas.openxmlformats.org/drawingml/2006/main">
-            <a:r>
-              <a:t>        "shanghai_2025": 2.34,</a:t>
-            </a:r>
-          </a:p>
-          <a:p xmlns:a="http://schemas.openxmlformats.org/drawingml/2006/main">
-            <a:r>
-              <a:t>        "newyork_2023": 4.2</a:t>
-            </a:r>
-          </a:p>
-          <a:p xmlns:a="http://schemas.openxmlformats.org/drawingml/2006/main">
-            <a:r>
-              <a:t>      },</a:t>
-            </a:r>
-          </a:p>
-          <a:p xmlns:a="http://schemas.openxmlformats.org/drawingml/2006/main">
-            <a:r>
-              <a:t>      "maternal_mortality_per100000": {</a:t>
-            </a:r>
-          </a:p>
-          <a:p xmlns:a="http://schemas.openxmlformats.org/drawingml/2006/main">
-            <a:r>
-              <a:t>        "shanghai_2025": 1.85,</a:t>
-            </a:r>
-          </a:p>
-          <a:p xmlns:a="http://schemas.openxmlformats.org/drawingml/2006/main">
-            <a:r>
-              <a:t>        "newyork_2022_42day_estimate": 21</a:t>
-            </a:r>
-          </a:p>
-          <a:p xmlns:a="http://schemas.openxmlformats.org/drawingml/2006/main">
-            <a:r>
-              <a:t>      },</a:t>
-            </a:r>
-          </a:p>
-          <a:p xmlns:a="http://schemas.openxmlformats.org/drawingml/2006/main">
-            <a:r>
-              <a:t>      "life_expectancy": {</a:t>
-            </a:r>
-          </a:p>
-          <a:p xmlns:a="http://schemas.openxmlformats.org/drawingml/2006/main">
-            <a:r>
-              <a:t>        "shanghai_2022_registered": 83.18,</a:t>
-            </a:r>
-          </a:p>
-          <a:p xmlns:a="http://schemas.openxmlformats.org/drawingml/2006/main">
-            <a:r>
-              <a:t>        "newyork_2024_provisional": 83.2</a:t>
-            </a:r>
-          </a:p>
-          <a:p xmlns:a="http://schemas.openxmlformats.org/drawingml/2006/main">
-            <a:r>
-              <a:t>      },</a:t>
-            </a:r>
-          </a:p>
-          <a:p xmlns:a="http://schemas.openxmlformats.org/drawingml/2006/main">
-            <a:r>
-              <a:t>      "practice": "2024年卫生健康支出732.22亿元；2025年医保参保2042.45万人。",</a:t>
-            </a:r>
-          </a:p>
-          <a:p xmlns:a="http://schemas.openxmlformats.org/drawingml/2006/main">
-            <a:r>
-              <a:t>      "footnote": "纽约孕产妇死亡约21/10万由报告按产后42天折算；两项医疗结局统计年份不同。",</a:t>
-            </a:r>
-          </a:p>
-          <a:p xmlns:a="http://schemas.openxmlformats.org/drawingml/2006/main">
-            <a:r>
-              <a:t>      "sources": [</a:t>
-            </a:r>
-          </a:p>
-          <a:p xmlns:a="http://schemas.openxmlformats.org/drawingml/2006/main">
-            <a:r>
-              <a:t>        "https://tjj.sh.gov.cn/tjgb/20260330/e0772941e8e041eaaad2df850b44ef98.html",</a:t>
-            </a:r>
-          </a:p>
-          <a:p xmlns:a="http://schemas.openxmlformats.org/drawingml/2006/main">
-            <a:r>
-              <a:t>        "https://wsjkw.sh.gov.cn/tjsj2/20260730/7154e5b1603642a8a3c7c0b2b8b3b149.html",</a:t>
-            </a:r>
-          </a:p>
-          <a:p xmlns:a="http://schemas.openxmlformats.org/drawingml/2006/main">
-            <a:r>
-              <a:t>        "https://www.nyc.gov/assets/doh/downloads/pdf/vs/2023sum.pdf",</a:t>
-            </a:r>
-          </a:p>
-          <a:p xmlns:a="http://schemas.openxmlformats.org/drawingml/2006/main">
-            <a:r>
-              <a:t>        "https://www.nyc.gov/assets/doh/downloads/pdf/data/maternal-mortality-annual-report-2025.pdf"</a:t>
-            </a:r>
-          </a:p>
-          <a:p xmlns:a="http://schemas.openxmlformats.org/drawingml/2006/main">
-            <a:r>
-              <a:t>      ]</a:t>
-            </a:r>
-          </a:p>
-          <a:p xmlns:a="http://schemas.openxmlformats.org/drawingml/2006/main">
-            <a:r>
-              <a:t>    },</a:t>
-            </a:r>
-          </a:p>
-          <a:p xmlns:a="http://schemas.openxmlformats.org/drawingml/2006/main">
-            <a:r>
-              <a:t>    {</a:t>
-            </a:r>
-          </a:p>
-          <a:p xmlns:a="http://schemas.openxmlformats.org/drawingml/2006/main">
-            <a:r>
-              <a:t>      "item": "治安",</a:t>
-            </a:r>
-          </a:p>
-          <a:p xmlns:a="http://schemas.openxmlformats.org/drawingml/2006/main">
-            <a:r>
-              <a:t>      "winner": "上海",</a:t>
-            </a:r>
-          </a:p>
-          <a:p xmlns:a="http://schemas.openxmlformats.org/drawingml/2006/main">
-            <a:r>
-              <a:t>      "degree": "压倒性",</a:t>
-            </a:r>
-          </a:p>
-          <a:p xmlns:a="http://schemas.openxmlformats.org/drawingml/2006/main">
-            <a:r>
-              <a:t>      "shanghai_2024_count": 46,</a:t>
-            </a:r>
-          </a:p>
-          <a:p xmlns:a="http://schemas.openxmlformats.org/drawingml/2006/main">
-            <a:r>
-              <a:t>      "newyork_2025_count": 305,</a:t>
-            </a:r>
-          </a:p>
-          <a:p xmlns:a="http://schemas.openxmlformats.org/drawingml/2006/main">
-            <a:r>
-              <a:t>      "per100000": {</a:t>
-            </a:r>
-          </a:p>
-          <a:p xmlns:a="http://schemas.openxmlformats.org/drawingml/2006/main">
-            <a:r>
-              <a:t>        "shanghai": 0.19,</a:t>
-            </a:r>
-          </a:p>
-          <a:p xmlns:a="http://schemas.openxmlformats.org/drawingml/2006/main">
-            <a:r>
-              <a:t>        "newyork": 3.6</a:t>
-            </a:r>
-          </a:p>
-          <a:p xmlns:a="http://schemas.openxmlformats.org/drawingml/2006/main">
-            <a:r>
-              <a:t>      },</a:t>
-            </a:r>
-          </a:p>
-          <a:p xmlns:a="http://schemas.openxmlformats.org/drawingml/2006/main">
-            <a:r>
-              <a:t>      "ratio": 19,</a:t>
-            </a:r>
-          </a:p>
-          <a:p xmlns:a="http://schemas.openxmlformats.org/drawingml/2006/main">
-            <a:r>
-              <a:t>      "footnote": "上海为杀人案立案，纽约为谋杀案；年份不同，比率由案件与人口计算。",</a:t>
-            </a:r>
-          </a:p>
-          <a:p xmlns:a="http://schemas.openxmlformats.org/drawingml/2006/main">
-            <a:r>
-              <a:t>      "sources": [</a:t>
-            </a:r>
-          </a:p>
-          <a:p xmlns:a="http://schemas.openxmlformats.org/drawingml/2006/main">
-            <a:r>
-              <a:t>        "https://tjj.sh.gov.cn/tjnj/2025tjnj/C2303.htm",</a:t>
-            </a:r>
-          </a:p>
-          <a:p xmlns:a="http://schemas.openxmlformats.org/drawingml/2006/main">
-            <a:r>
-              <a:t>        "https://www.nyc.gov/site/nypd/news/PR001/nypd-safest-year-ever-gun-violence-fewest-shooting-incidents-shooting"</a:t>
-            </a:r>
-          </a:p>
-          <a:p xmlns:a="http://schemas.openxmlformats.org/drawingml/2006/main">
-            <a:r>
-              <a:t>      ]</a:t>
-            </a:r>
-          </a:p>
-          <a:p xmlns:a="http://schemas.openxmlformats.org/drawingml/2006/main">
-            <a:r>
-              <a:t>    },</a:t>
-            </a:r>
-          </a:p>
-          <a:p xmlns:a="http://schemas.openxmlformats.org/drawingml/2006/main">
-            <a:r>
-              <a:t>    {</a:t>
-            </a:r>
-          </a:p>
-          <a:p xmlns:a="http://schemas.openxmlformats.org/drawingml/2006/main">
-            <a:r>
-              <a:t>      "item": "教育",</a:t>
-            </a:r>
-          </a:p>
-          <a:p xmlns:a="http://schemas.openxmlformats.org/drawingml/2006/main">
-            <a:r>
-              <a:t>      "winner": "打平",</a:t>
-            </a:r>
-          </a:p>
-          <a:p xmlns:a="http://schemas.openxmlformats.org/drawingml/2006/main">
-            <a:r>
-              <a:t>      "degree": "—",</a:t>
-            </a:r>
-          </a:p>
-          <a:p xmlns:a="http://schemas.openxmlformats.org/drawingml/2006/main">
-            <a:r>
-              <a:t>      "student_teacher": {</a:t>
-            </a:r>
-          </a:p>
-          <a:p xmlns:a="http://schemas.openxmlformats.org/drawingml/2006/main">
-            <a:r>
-              <a:t>        "shanghai_2024": 12.5,</a:t>
-            </a:r>
-          </a:p>
-          <a:p xmlns:a="http://schemas.openxmlformats.org/drawingml/2006/main">
-            <a:r>
-              <a:t>        "newyork_2024_25": 13.2</a:t>
-            </a:r>
-          </a:p>
-          <a:p xmlns:a="http://schemas.openxmlformats.org/drawingml/2006/main">
-            <a:r>
-              <a:t>      },</a:t>
-            </a:r>
-          </a:p>
-          <a:p xmlns:a="http://schemas.openxmlformats.org/drawingml/2006/main">
-            <a:r>
-              <a:t>      "shanghai_primary_district_range": "9.0–15.1",</a:t>
-            </a:r>
-          </a:p>
-          <a:p xmlns:a="http://schemas.openxmlformats.org/drawingml/2006/main">
-            <a:r>
-              <a:t>      "nyc_district_range": "8.7–13.9",</a:t>
-            </a:r>
-          </a:p>
-          <a:p xmlns:a="http://schemas.openxmlformats.org/drawingml/2006/main">
-            <a:r>
-              <a:t>      "shanghai_net_enrolment_primary_junior": 99.9,</a:t>
-            </a:r>
-          </a:p>
-          <a:p xmlns:a="http://schemas.openxmlformats.org/drawingml/2006/main">
-            <a:r>
-              <a:t>      "footnote": "生师比由官方学生与教师数计算；上海中小学含高中，纽约为K–12。",</a:t>
-            </a:r>
-          </a:p>
-          <a:p xmlns:a="http://schemas.openxmlformats.org/drawingml/2006/main">
-            <a:r>
-              <a:t>      "sources": [</a:t>
-            </a:r>
-          </a:p>
-          <a:p xmlns:a="http://schemas.openxmlformats.org/drawingml/2006/main">
-            <a:r>
-              <a:t>        "https://tjj.sh.gov.cn/tjnj/2025tjnj/C2015.htm",</a:t>
-            </a:r>
-          </a:p>
-          <a:p xmlns:a="http://schemas.openxmlformats.org/drawingml/2006/main">
-            <a:r>
-              <a:t>        "https://tjj.sh.gov.cn/tjnj/2025tjnj/C2013.htm",</a:t>
-            </a:r>
-          </a:p>
-          <a:p xmlns:a="http://schemas.openxmlformats.org/drawingml/2006/main">
-            <a:r>
-              <a:t>        "https://tjj.sh.gov.cn/tjnj/2025tjnj/C2004.htm",</a:t>
-            </a:r>
-          </a:p>
-          <a:p xmlns:a="http://schemas.openxmlformats.org/drawingml/2006/main">
-            <a:r>
-              <a:t>        "https://data.nysed.gov/studenteducator.php?year=2025&amp;instid=7889678368"</a:t>
-            </a:r>
-          </a:p>
-          <a:p xmlns:a="http://schemas.openxmlformats.org/drawingml/2006/main">
-            <a:r>
-              <a:t>      ]</a:t>
-            </a:r>
-          </a:p>
-          <a:p xmlns:a="http://schemas.openxmlformats.org/drawingml/2006/main">
-            <a:r>
-              <a:t>    },</a:t>
-            </a:r>
-          </a:p>
-          <a:p xmlns:a="http://schemas.openxmlformats.org/drawingml/2006/main">
-            <a:r>
-              <a:t>    {</a:t>
-            </a:r>
-          </a:p>
-          <a:p xmlns:a="http://schemas.openxmlformats.org/drawingml/2006/main">
-            <a:r>
-              <a:t>      "item": "文化",</a:t>
-            </a:r>
-          </a:p>
-          <a:p xmlns:a="http://schemas.openxmlformats.org/drawingml/2006/main">
-            <a:r>
-              <a:t>      "winner": "纽约",</a:t>
-            </a:r>
-          </a:p>
-          <a:p xmlns:a="http://schemas.openxmlformats.org/drawingml/2006/main">
-            <a:r>
-              <a:t>      "degree": "明显",</a:t>
-            </a:r>
-          </a:p>
-          <a:p xmlns:a="http://schemas.openxmlformats.org/drawingml/2006/main">
-            <a:r>
-              <a:t>      "nyc_library_branches": "200余",</a:t>
-            </a:r>
-          </a:p>
-          <a:p xmlns:a="http://schemas.openxmlformats.org/drawingml/2006/main">
-            <a:r>
-              <a:t>      "cdf_orgs_fy2026": 1171,</a:t>
-            </a:r>
-          </a:p>
-          <a:p xmlns:a="http://schemas.openxmlformats.org/drawingml/2006/main">
-            <a:r>
-              <a:t>      "cdf_free_or_subsidised_pct": 96,</a:t>
-            </a:r>
-          </a:p>
-          <a:p xmlns:a="http://schemas.openxmlformats.org/drawingml/2006/main">
-            <a:r>
-              <a:t>      "cdf_amount_usd": 74300000,</a:t>
-            </a:r>
-          </a:p>
-          <a:p xmlns:a="http://schemas.openxmlformats.org/drawingml/2006/main">
-            <a:r>
-              <a:t>      "practice": "上海2025年营业性演出6.14万场，博物馆174个，公园1100座；生活圈1600基本单元。",</a:t>
-            </a:r>
-          </a:p>
-          <a:p xmlns:a="http://schemas.openxmlformats.org/drawingml/2006/main">
-            <a:r>
-              <a:t>      "footnote": "按公共图书馆网络与文化资助作判断；上海市区馆20个不用于与纽约全部网点硬比。",</a:t>
-            </a:r>
-          </a:p>
-          <a:p xmlns:a="http://schemas.openxmlformats.org/drawingml/2006/main">
-            <a:r>
-              <a:t>      "sources": [</a:t>
-            </a:r>
-          </a:p>
-          <a:p xmlns:a="http://schemas.openxmlformats.org/drawingml/2006/main">
-            <a:r>
-              <a:t>        "https://www.nypl.org/about/locations",</a:t>
-            </a:r>
-          </a:p>
-          <a:p xmlns:a="http://schemas.openxmlformats.org/drawingml/2006/main">
-            <a:r>
-              <a:t>        "https://www.bklynlibrary.org/browse-the-branches/about",</a:t>
-            </a:r>
-          </a:p>
-          <a:p xmlns:a="http://schemas.openxmlformats.org/drawingml/2006/main">
-            <a:r>
-              <a:t>        "http://gis.nyc.gov/site/dcla/about/pressrelease/PR-2026-2-26-NYC-Department-of-Cultural-Affairs-Announces-74.3-Million-in-Grants-for-1171-Cultural-Organizations-Across-the-City.page",</a:t>
-            </a:r>
-          </a:p>
-          <a:p xmlns:a="http://schemas.openxmlformats.org/drawingml/2006/main">
-            <a:r>
-              <a:t>        "https://tjj.sh.gov.cn/tjgb/20260330/e0772941e8e041eaaad2df850b44ef98.html",</a:t>
-            </a:r>
-          </a:p>
-          <a:p xmlns:a="http://schemas.openxmlformats.org/drawingml/2006/main">
-            <a:r>
-              <a:t>        "https://english.shanghai.gov.cn/en-Latest-WhatsNew/20260212/af11d8de7fd24819bff50c940e428855.html"</a:t>
-            </a:r>
-          </a:p>
-          <a:p xmlns:a="http://schemas.openxmlformats.org/drawingml/2006/main">
-            <a:r>
-              <a:t>      ]</a:t>
-            </a:r>
-          </a:p>
-          <a:p xmlns:a="http://schemas.openxmlformats.org/drawingml/2006/main">
-            <a:r>
-              <a:t>    },</a:t>
-            </a:r>
-          </a:p>
-          <a:p xmlns:a="http://schemas.openxmlformats.org/drawingml/2006/main">
-            <a:r>
-              <a:t>    {</a:t>
-            </a:r>
-          </a:p>
-          <a:p xmlns:a="http://schemas.openxmlformats.org/drawingml/2006/main">
-            <a:r>
-              <a:t>      "item": "对待底层",</a:t>
-            </a:r>
-          </a:p>
-          <a:p xmlns:a="http://schemas.openxmlformats.org/drawingml/2006/main">
-            <a:r>
-              <a:t>      "winner": "上海",</a:t>
-            </a:r>
-          </a:p>
-          <a:p xmlns:a="http://schemas.openxmlformats.org/drawingml/2006/main">
-            <a:r>
-              <a:t>      "degree": "压倒性",</a:t>
-            </a:r>
-          </a:p>
-          <a:p xmlns:a="http://schemas.openxmlformats.org/drawingml/2006/main">
-            <a:r>
-              <a:t>      "nyc_homeless_jan2025": 125683,</a:t>
-            </a:r>
-          </a:p>
-          <a:p xmlns:a="http://schemas.openxmlformats.org/drawingml/2006/main">
-            <a:r>
-              <a:t>      "nyc_unsheltered_jan2025": 4673,</a:t>
-            </a:r>
-          </a:p>
-          <a:p xmlns:a="http://schemas.openxmlformats.org/drawingml/2006/main">
-            <a:r>
-              <a:t>      "nyc_poverty_2024_pct": 18,</a:t>
-            </a:r>
-          </a:p>
-          <a:p xmlns:a="http://schemas.openxmlformats.org/drawingml/2006/main">
-            <a:r>
-              <a:t>      "bronx_poverty_2024_pct": 28.8,</a:t>
-            </a:r>
-          </a:p>
-          <a:p xmlns:a="http://schemas.openxmlformats.org/drawingml/2006/main">
-            <a:r>
-              <a:t>      "nyc_dhs_daily_average_mar2026": 84908,</a:t>
-            </a:r>
-          </a:p>
-          <a:p xmlns:a="http://schemas.openxmlformats.org/drawingml/2006/main">
-            <a:r>
-              <a:t>      "shanghai_minimum_living_standard_cny_month": 1690,</a:t>
-            </a:r>
-          </a:p>
-          <a:p xmlns:a="http://schemas.openxmlformats.org/drawingml/2006/main">
-            <a:r>
-              <a:t>      "effective_date": "2026-07-01",</a:t>
-            </a:r>
-          </a:p>
-          <a:p xmlns:a="http://schemas.openxmlformats.org/drawingml/2006/main">
-            <a:r>
-              <a:t>      "shanghai_2025_elderly_centres": 557,</a:t>
-            </a:r>
-          </a:p>
-          <a:p xmlns:a="http://schemas.openxmlformats.org/drawingml/2006/main">
-            <a:r>
-              <a:t>      "shanghai_2025_meal_sites": 2498,</a:t>
-            </a:r>
-          </a:p>
-          <a:p xmlns:a="http://schemas.openxmlformats.org/drawingml/2006/main">
-            <a:r>
-              <a:t>      "shanghai_2025_employment_sites": 506,</a:t>
-            </a:r>
-          </a:p>
-          <a:p xmlns:a="http://schemas.openxmlformats.org/drawingml/2006/main">
-            <a:r>
-              <a:t>      "footnote": "纽约为HUD一夜点数；上海露宿人数未公开，判断结合托底制度与纽约结果。",</a:t>
-            </a:r>
-          </a:p>
-          <a:p xmlns:a="http://schemas.openxmlformats.org/drawingml/2006/main">
-            <a:r>
-              <a:t>      "sources": [</a:t>
-            </a:r>
-          </a:p>
-          <a:p xmlns:a="http://schemas.openxmlformats.org/drawingml/2006/main">
-            <a:r>
-              <a:t>        "https://files.hudexchange.info/reports/published/CoC_PopSub_CoC_NY-600-2025_NY_2025.pdf",</a:t>
-            </a:r>
-          </a:p>
-          <a:p xmlns:a="http://schemas.openxmlformats.org/drawingml/2006/main">
-            <a:r>
-              <a:t>        "https://rentguidelinesboard.cityofnewyork.us/wp-content/uploads/2026/04/2026-IA.pdf",</a:t>
-            </a:r>
-          </a:p>
-          <a:p xmlns:a="http://schemas.openxmlformats.org/drawingml/2006/main">
-            <a:r>
-              <a:t>        "https://www.nyc.gov/assets/dhs/downloads/pdf/dashboard/tables/FY26-DHS-Data-Dashboard-Data.pdf",</a:t>
-            </a:r>
-          </a:p>
-          <a:p xmlns:a="http://schemas.openxmlformats.org/drawingml/2006/main">
-            <a:r>
-              <a:t>        "https://mzj.sh.gov.cn/MZ_zhuzhan277_0-2-8-15-55-229/20260702/d95374094d6041a19b2591fd241126cb.html",</a:t>
-            </a:r>
-          </a:p>
-          <a:p xmlns:a="http://schemas.openxmlformats.org/drawingml/2006/main">
-            <a:r>
-              <a:t>        "https://tjj.sh.gov.cn/tjgb/20260330/e0772941e8e041eaaad2df850b44ef98.html"</a:t>
-            </a:r>
-          </a:p>
-          <a:p xmlns:a="http://schemas.openxmlformats.org/drawingml/2006/main">
-            <a:r>
-              <a:t>      ]</a:t>
-            </a:r>
-          </a:p>
-          <a:p xmlns:a="http://schemas.openxmlformats.org/drawingml/2006/main">
-            <a:r>
-              <a:t>    }</a:t>
-            </a:r>
-          </a:p>
-          <a:p xmlns:a="http://schemas.openxmlformats.org/drawingml/2006/main">
-            <a:r>
-              <a:t>  ],</a:t>
-            </a:r>
-          </a:p>
-          <a:p xmlns:a="http://schemas.openxmlformats.org/drawingml/2006/main">
-            <a:r>
-              <a:t>  "transparency": {</a:t>
-            </a:r>
-          </a:p>
-          <a:p xmlns:a="http://schemas.openxmlformats.org/drawingml/2006/main">
-            <a:r>
-              <a:t>    "one_net_services": 3827,</a:t>
-            </a:r>
-          </a:p>
-          <a:p xmlns:a="http://schemas.openxmlformats.org/drawingml/2006/main">
-            <a:r>
-              <a:t>    "actual_online_pct": 89.53,</a:t>
-            </a:r>
-          </a:p>
-          <a:p xmlns:a="http://schemas.openxmlformats.org/drawingml/2006/main">
-            <a:r>
-              <a:t>    "satisfaction_pct": 99.94,</a:t>
-            </a:r>
-          </a:p>
-          <a:p xmlns:a="http://schemas.openxmlformats.org/drawingml/2006/main">
-            <a:r>
-              <a:t>    "datasets": 11248,</a:t>
-            </a:r>
-          </a:p>
-          <a:p xmlns:a="http://schemas.openxmlformats.org/drawingml/2006/main">
-            <a:r>
-              <a:t>    "departments": 56,</a:t>
-            </a:r>
-          </a:p>
-          <a:p xmlns:a="http://schemas.openxmlformats.org/drawingml/2006/main">
-            <a:r>
-              <a:t>    "four_gaps": [</a:t>
-            </a:r>
-          </a:p>
-          <a:p xmlns:a="http://schemas.openxmlformats.org/drawingml/2006/main">
-            <a:r>
-              <a:t>      "公厕数据集明细需申请",</a:t>
-            </a:r>
-          </a:p>
-          <a:p xmlns:a="http://schemas.openxmlformats.org/drawingml/2006/main">
-            <a:r>
-              <a:t>      "没有市场租金统计",</a:t>
-            </a:r>
-          </a:p>
-          <a:p xmlns:a="http://schemas.openxmlformats.org/drawingml/2006/main">
-            <a:r>
-              <a:t>      "没有露宿人数",</a:t>
-            </a:r>
-          </a:p>
-          <a:p xmlns:a="http://schemas.openxmlformats.org/drawingml/2006/main">
-            <a:r>
-              <a:t>      "户籍人口期望寿命2022年后未再公布"</a:t>
-            </a:r>
-          </a:p>
-          <a:p xmlns:a="http://schemas.openxmlformats.org/drawingml/2006/main">
-            <a:r>
-              <a:t>    ],</a:t>
-            </a:r>
-          </a:p>
-          <a:p xmlns:a="http://schemas.openxmlformats.org/drawingml/2006/main">
-            <a:r>
-              <a:t>    "nyc_rule": "2012年Local Law 11，政府公共数据默认免费开放；DHS每天更新。",</a:t>
-            </a:r>
-          </a:p>
-          <a:p xmlns:a="http://schemas.openxmlformats.org/drawingml/2006/main">
-            <a:r>
-              <a:t>    "sources": [</a:t>
-            </a:r>
-          </a:p>
-          <a:p xmlns:a="http://schemas.openxmlformats.org/drawingml/2006/main">
-            <a:r>
-              <a:t>      "https://data.sh.gov.cn/",</a:t>
-            </a:r>
-          </a:p>
-          <a:p xmlns:a="http://schemas.openxmlformats.org/drawingml/2006/main">
-            <a:r>
-              <a:t>      "https://tjj.sh.gov.cn/tjgb/20260330/e0772941e8e041eaaad2df850b44ef98.html",</a:t>
-            </a:r>
-          </a:p>
-          <a:p xmlns:a="http://schemas.openxmlformats.org/drawingml/2006/main">
-            <a:r>
-              <a:t>      "https://wsjkw.sh.gov.cn/2022wsjkzkbg/index.html",</a:t>
-            </a:r>
-          </a:p>
-          <a:p xmlns:a="http://schemas.openxmlformats.org/drawingml/2006/main">
-            <a:r>
-              <a:t>      "https://wsjkw.sh.gov.cn/2023wsjkzkbg/index.html",</a:t>
-            </a:r>
-          </a:p>
-          <a:p xmlns:a="http://schemas.openxmlformats.org/drawingml/2006/main">
-            <a:r>
-              <a:t>      "https://wsjkw.sh.gov.cn/2024wsjkzkbg/index.html",</a:t>
-            </a:r>
-          </a:p>
-          <a:p xmlns:a="http://schemas.openxmlformats.org/drawingml/2006/main">
-            <a:r>
-              <a:t>      "https://opendata.cityofnewyork.us/open-data-law/",</a:t>
-            </a:r>
-          </a:p>
-          <a:p xmlns:a="http://schemas.openxmlformats.org/drawingml/2006/main">
-            <a:r>
-              <a:t>      "https://data.cityofnewyork.us/Social-Services/DHS-Daily-Report/k46n-sa2m"</a:t>
-            </a:r>
-          </a:p>
-          <a:p xmlns:a="http://schemas.openxmlformats.org/drawingml/2006/main">
-            <a:r>
-              <a:t>    ]</a:t>
-            </a:r>
-          </a:p>
-          <a:p xmlns:a="http://schemas.openxmlformats.org/drawingml/2006/main">
-            <a:r>
-              <a:t>  },</a:t>
-            </a:r>
-          </a:p>
-          <a:p xmlns:a="http://schemas.openxmlformats.org/drawingml/2006/main">
-            <a:r>
-              <a:t>  "approved_supplement": {</a:t>
-            </a:r>
-          </a:p>
-          <a:p xmlns:a="http://schemas.openxmlformats.org/drawingml/2006/main">
-            <a:r>
-              <a:t>    "residents_participation": "泰山人民坊：12场专项座谈、3826份问卷；5轮专题论证；3场事后评议。",</a:t>
-            </a:r>
-          </a:p>
-          <a:p xmlns:a="http://schemas.openxmlformats.org/drawingml/2006/main">
-            <a:r>
-              <a:t>    "source": "https://ghzyj.sh.gov.cn/gzdt/20251224/f5b8e34f5c834200910639b27717dfdf.html"</a:t>
-            </a:r>
-          </a:p>
-          <a:p xmlns:a="http://schemas.openxmlformats.org/drawingml/2006/main">
-            <a:r>
-              <a:t>  },</a:t>
-            </a:r>
-          </a:p>
-          <a:p xmlns:a="http://schemas.openxmlformats.org/drawingml/2006/main">
-            <a:r>
-              <a:t>  "conflicts_and_nonblocking_gaps": [</a:t>
-            </a:r>
-          </a:p>
-          <a:p xmlns:a="http://schemas.openxmlformats.org/drawingml/2006/main">
-            <a:r>
-              <a:t>    "本地script/讲稿.md第11节和script/口径表.md仍含总比分；用户已明确作废，应删总比分，仅留九题胜负/程度。",</a:t>
-            </a:r>
-          </a:p>
-          <a:p xmlns:a="http://schemas.openxmlformats.org/drawingml/2006/main">
-            <a:r>
-              <a:t>    "本地script/讲稿.md第12节尚未出现用户最新结论；以用户本条补充作准：纽约有部分答案（吃穿、文化、数据公开），底层未答好，尚非合格答卷；上海更完整，数据公开仍需补。",</a:t>
-            </a:r>
-          </a:p>
-          <a:p xmlns:a="http://schemas.openxmlformats.org/drawingml/2006/main">
-            <a:r>
-              <a:t>    "口径表禁止“压倒性”，但本次用户明确要求程度且讲稿第11节使用该词；以本次用户要求为准。",</a:t>
-            </a:r>
-          </a:p>
-          <a:p xmlns:a="http://schemas.openxmlformats.org/drawingml/2006/main">
-            <a:r>
-              <a:t>    "data-table第4节及3.7节后面残留旧医疗打平/租金判住房胜负段落，已被后续修订覆盖，不要采用。",</a:t>
-            </a:r>
-          </a:p>
-          <a:p xmlns:a="http://schemas.openxmlformats.org/drawingml/2006/main">
-            <a:r>
-              <a:t>    "纽约交通14%原始精确报告URL缺失；上海18/45票价原表标记由Johnny确认；可以按用户锁定数使用，备注据实记录，勿虚构URL。",</a:t>
-            </a:r>
-          </a:p>
-          <a:p xmlns:a="http://schemas.openxmlformats.org/drawingml/2006/main">
-            <a:r>
-              <a:t>    "食物纽约州的5005美元实际分类含住宿，勿标成纯餐饮；一行口径说明即可。",</a:t>
-            </a:r>
-          </a:p>
-          <a:p xmlns:a="http://schemas.openxmlformats.org/drawingml/2006/main">
-            <a:r>
-              <a:t>    "没有真正阻碍制作的数字歧义；仅讲稿文件未合并最新补充，影响“备注原文”的逐字一致性。"</a:t>
-            </a:r>
-          </a:p>
-          <a:p xmlns:a="http://schemas.openxmlformats.org/drawingml/2006/main">
-            <a:r>
-              <a:t>  ]</a:t>
-            </a:r>
-          </a:p>
-          <a:p xmlns:a="http://schemas.openxmlformats.org/drawingml/2006/main">
-            <a:r>
-              <a:t>}</a:t>
+          <a:p xmlns:a="http://schemas.openxmlformats.org/drawingml/2006/main"/>
+          <a:p xmlns:a="http://schemas.openxmlformats.org/drawingml/2006/main">
+            <a:r>
+              <a:t>口径：</a:t>
+            </a:r>
+          </a:p>
+          <a:p xmlns:a="http://schemas.openxmlformats.org/drawingml/2006/main">
+            <a:r>
+              <a:t>纽约为税前户收入中位数；上海由人均可支配收入均值×家庭户规模估算。</a:t>
+            </a:r>
+          </a:p>
+          <a:p xmlns:a="http://schemas.openxmlformats.org/drawingml/2006/main">
+            <a:r>
+              <a:t>上海为开放平台记录，纽约为市政运营公厕；只比较量级。</a:t>
+            </a:r>
+          </a:p>
+          <a:p xmlns:a="http://schemas.openxmlformats.org/drawingml/2006/main">
+            <a:r>
+              <a:t>上海为七普长表家庭户，纽约为HVS已入住住房；分母与年份不同。</a:t>
+            </a:r>
+          </a:p>
+          <a:p xmlns:a="http://schemas.openxmlformats.org/drawingml/2006/main">
+            <a:r>
+              <a:t>纽约州在家食品饮料＋餐饮住宿，上海食品烟酒；价格与分类差异使实际差距小于账面。</a:t>
+            </a:r>
+          </a:p>
+          <a:p xmlns:a="http://schemas.openxmlformats.org/drawingml/2006/main">
+            <a:r>
+              <a:t>纽约使用州级数据；按2026-10-09汇率换算。</a:t>
+            </a:r>
+          </a:p>
+          <a:p xmlns:a="http://schemas.openxmlformats.org/drawingml/2006/main">
+            <a:r>
+              <a:t>票价按户收入差2.65倍折算；支出占比为纽约都会区交通（2022–23）对上海交通通信（2024）。</a:t>
+            </a:r>
+          </a:p>
+          <a:p xmlns:a="http://schemas.openxmlformats.org/drawingml/2006/main">
+            <a:r>
+              <a:t>纽约孕产妇死亡约21/10万由报告按产后42天折算；两项医疗结局统计年份不同。</a:t>
+            </a:r>
+          </a:p>
+          <a:p xmlns:a="http://schemas.openxmlformats.org/drawingml/2006/main">
+            <a:r>
+              <a:t>上海为杀人案立案，纽约为谋杀案；年份不同，比率由案件与人口计算。</a:t>
+            </a:r>
+          </a:p>
+          <a:p xmlns:a="http://schemas.openxmlformats.org/drawingml/2006/main">
+            <a:r>
+              <a:t>生师比由官方学生与教师数计算；上海中小学含高中，纽约为K–12。</a:t>
+            </a:r>
+          </a:p>
+          <a:p xmlns:a="http://schemas.openxmlformats.org/drawingml/2006/main">
+            <a:r>
+              <a:t>按公共图书馆网络与文化资助作判断；上海市区馆20个不用于与纽约全部网点硬比。</a:t>
+            </a:r>
+          </a:p>
+          <a:p xmlns:a="http://schemas.openxmlformats.org/drawingml/2006/main">
+            <a:r>
+              <a:t>纽约为HUD一夜点数；上海露宿人数未公开，判断结合托底制度与纽约结果。</a:t>
+            </a:r>
+          </a:p>
+          <a:p xmlns:a="http://schemas.openxmlformats.org/drawingml/2006/main">
+            <a:r>
+              <a:t>来源：</a:t>
+            </a:r>
+          </a:p>
+          <a:p xmlns:a="http://schemas.openxmlformats.org/drawingml/2006/main">
+            <a:r>
+              <a:t>https://tjj.sh.gov.cn/tjgb/20260330/e0772941e8e041eaaad2df850b44ef98.html</a:t>
+            </a:r>
+          </a:p>
+          <a:p xmlns:a="http://schemas.openxmlformats.org/drawingml/2006/main">
+            <a:r>
+              <a:t>https://www.health.ny.gov/statistics/vital_statistics/2022/table02.htm</a:t>
+            </a:r>
+          </a:p>
+          <a:p xmlns:a="http://schemas.openxmlformats.org/drawingml/2006/main">
+            <a:r>
+              <a:t>https://www.nyc.gov/content/planning/pages/planning/population</a:t>
+            </a:r>
+          </a:p>
+          <a:p xmlns:a="http://schemas.openxmlformats.org/drawingml/2006/main">
+            <a:r>
+              <a:t>https://rentguidelinesboard.cityofnewyork.us/wp-content/uploads/2026/04/2026-IA.pdf</a:t>
+            </a:r>
+          </a:p>
+          <a:p xmlns:a="http://schemas.openxmlformats.org/drawingml/2006/main">
+            <a:r>
+              <a:t>https://tjj.sh.gov.cn/ydsj71/20260120/39ae4cd58421478d897b739d83f39c10.html</a:t>
+            </a:r>
+          </a:p>
+          <a:p xmlns:a="http://schemas.openxmlformats.org/drawingml/2006/main">
+            <a:r>
+              <a:t>https://tjj.sh.gov.cn/tjgb/20260630/b74619258aee4912a55a1da928b5be30.html</a:t>
+            </a:r>
+          </a:p>
+          <a:p xmlns:a="http://schemas.openxmlformats.org/drawingml/2006/main">
+            <a:r>
+              <a:t>https://data.sh.gov.cn/</a:t>
+            </a:r>
+          </a:p>
+          <a:p xmlns:a="http://schemas.openxmlformats.org/drawingml/2006/main">
+            <a:r>
+              <a:t>https://lhsr.sh.gov.cn/ywdt/20260401/00d7c161-8280-490c-a0da-d6c995e85058.html</a:t>
+            </a:r>
+          </a:p>
+          <a:p xmlns:a="http://schemas.openxmlformats.org/drawingml/2006/main">
+            <a:r>
+              <a:t>https://lhsr.sh.gov.cn/ywdt/20251204/b016509f-60a6-46cd-83fa-fdab372175c7.html</a:t>
+            </a:r>
+          </a:p>
+          <a:p xmlns:a="http://schemas.openxmlformats.org/drawingml/2006/main">
+            <a:r>
+              <a:t>https://council.nyc.gov/data/public-restroom-analysis/</a:t>
+            </a:r>
+          </a:p>
+          <a:p xmlns:a="http://schemas.openxmlformats.org/drawingml/2006/main">
+            <a:r>
+              <a:t>https://tjj.sh.gov.cn/tjnj/2020rktjnj/BNJc-9-4.jpg</a:t>
+            </a:r>
+          </a:p>
+          <a:p xmlns:a="http://schemas.openxmlformats.org/drawingml/2006/main">
+            <a:r>
+              <a:t>https://www.nyc.gov/assets/hpd/downloads/pdfs/about/2023%20NYCHVS%20Selected%20Initial%20Findings.pdf</a:t>
+            </a:r>
+          </a:p>
+          <a:p xmlns:a="http://schemas.openxmlformats.org/drawingml/2006/main">
+            <a:r>
+              <a:t>https://apps.bea.gov/regional/zip/SAPCE.zip</a:t>
+            </a:r>
+          </a:p>
+          <a:p xmlns:a="http://schemas.openxmlformats.org/drawingml/2006/main">
+            <a:r>
+              <a:t>https://tjj.sh.gov.cn/tjnj/2025tjnj/C0905.htm</a:t>
+            </a:r>
+          </a:p>
+          <a:p xmlns:a="http://schemas.openxmlformats.org/drawingml/2006/main">
+            <a:r>
+              <a:t>https://portal.311.nyc.gov/article/?kanumber=KA-01014</a:t>
+            </a:r>
+          </a:p>
+          <a:p xmlns:a="http://schemas.openxmlformats.org/drawingml/2006/main">
+            <a:r>
+              <a:t>https://www.nyc.gov/site/opa/commuters/commuters.page</a:t>
+            </a:r>
+          </a:p>
+          <a:p xmlns:a="http://schemas.openxmlformats.org/drawingml/2006/main">
+            <a:r>
+              <a:t>https://service.shmetro.com/cpxz/3983.htm</a:t>
+            </a:r>
+          </a:p>
+          <a:p xmlns:a="http://schemas.openxmlformats.org/drawingml/2006/main">
+            <a:r>
+              <a:t>https://service.shmetro.com/pwyh/index.htm</a:t>
+            </a:r>
+          </a:p>
+          <a:p xmlns:a="http://schemas.openxmlformats.org/drawingml/2006/main">
+            <a:r>
+              <a:t>https://service.shmetro.com/cpxz/index.htm</a:t>
+            </a:r>
+          </a:p>
+          <a:p xmlns:a="http://schemas.openxmlformats.org/drawingml/2006/main">
+            <a:r>
+              <a:t>https://tjj.sh.gov.cn/tjnj/2025tjnj/C0913.htm</a:t>
+            </a:r>
+          </a:p>
+          <a:p xmlns:a="http://schemas.openxmlformats.org/drawingml/2006/main">
+            <a:r>
+              <a:t>https://www.bls.gov/regions/northeast/news-release/consumerexpenditures_newyork.htm</a:t>
+            </a:r>
+          </a:p>
+          <a:p xmlns:a="http://schemas.openxmlformats.org/drawingml/2006/main">
+            <a:r>
+              <a:t>https://wsjkw.sh.gov.cn/tjsj2/20260730/7154e5b1603642a8a3c7c0b2b8b3b149.html</a:t>
+            </a:r>
+          </a:p>
+          <a:p xmlns:a="http://schemas.openxmlformats.org/drawingml/2006/main">
+            <a:r>
+              <a:t>https://www.nyc.gov/assets/doh/downloads/pdf/vs/2023sum.pdf</a:t>
+            </a:r>
+          </a:p>
+          <a:p xmlns:a="http://schemas.openxmlformats.org/drawingml/2006/main">
+            <a:r>
+              <a:t>https://www.nyc.gov/assets/doh/downloads/pdf/data/maternal-mortality-annual-report-2025.pdf</a:t>
+            </a:r>
+          </a:p>
+          <a:p xmlns:a="http://schemas.openxmlformats.org/drawingml/2006/main">
+            <a:r>
+              <a:t>https://tjj.sh.gov.cn/tjnj/2025tjnj/C2303.htm</a:t>
+            </a:r>
+          </a:p>
+          <a:p xmlns:a="http://schemas.openxmlformats.org/drawingml/2006/main">
+            <a:r>
+              <a:t>https://www.nyc.gov/site/nypd/news/PR001/nypd-safest-year-ever-gun-violence-fewest-shooting-incidents-shooting</a:t>
+            </a:r>
+          </a:p>
+          <a:p xmlns:a="http://schemas.openxmlformats.org/drawingml/2006/main">
+            <a:r>
+              <a:t>https://tjj.sh.gov.cn/tjnj/2025tjnj/C2015.htm</a:t>
+            </a:r>
+          </a:p>
+          <a:p xmlns:a="http://schemas.openxmlformats.org/drawingml/2006/main">
+            <a:r>
+              <a:t>https://tjj.sh.gov.cn/tjnj/2025tjnj/C2013.htm</a:t>
+            </a:r>
+          </a:p>
+          <a:p xmlns:a="http://schemas.openxmlformats.org/drawingml/2006/main">
+            <a:r>
+              <a:t>https://tjj.sh.gov.cn/tjnj/2025tjnj/C2004.htm</a:t>
+            </a:r>
+          </a:p>
+          <a:p xmlns:a="http://schemas.openxmlformats.org/drawingml/2006/main">
+            <a:r>
+              <a:t>https://data.nysed.gov/studenteducator.php?year=2025&amp;instid=7889678368</a:t>
+            </a:r>
+          </a:p>
+          <a:p xmlns:a="http://schemas.openxmlformats.org/drawingml/2006/main">
+            <a:r>
+              <a:t>https://www.nypl.org/about/locations</a:t>
+            </a:r>
+          </a:p>
+          <a:p xmlns:a="http://schemas.openxmlformats.org/drawingml/2006/main">
+            <a:r>
+              <a:t>https://www.bklynlibrary.org/browse-the-branches/about</a:t>
+            </a:r>
+          </a:p>
+          <a:p xmlns:a="http://schemas.openxmlformats.org/drawingml/2006/main">
+            <a:r>
+              <a:t>http://gis.nyc.gov/site/dcla/about/pressrelease/PR-2026-2-26-NYC-Department-of-Cultural-Affairs-Announces-74.3-Million-in-Grants-for-1171-Cultural-Organizations-Across-the-City.page</a:t>
+            </a:r>
+          </a:p>
+          <a:p xmlns:a="http://schemas.openxmlformats.org/drawingml/2006/main">
+            <a:r>
+              <a:t>https://english.shanghai.gov.cn/en-Latest-WhatsNew/20260212/af11d8de7fd24819bff50c940e428855.html</a:t>
+            </a:r>
+          </a:p>
+          <a:p xmlns:a="http://schemas.openxmlformats.org/drawingml/2006/main">
+            <a:r>
+              <a:t>https://files.hudexchange.info/reports/published/CoC_PopSub_CoC_NY-600-2025_NY_2025.pdf</a:t>
+            </a:r>
+          </a:p>
+          <a:p xmlns:a="http://schemas.openxmlformats.org/drawingml/2006/main">
+            <a:r>
+              <a:t>https://www.nyc.gov/assets/dhs/downloads/pdf/dashboard/tables/FY26-DHS-Data-Dashboard-Data.pdf</a:t>
+            </a:r>
+          </a:p>
+          <a:p xmlns:a="http://schemas.openxmlformats.org/drawingml/2006/main">
+            <a:r>
+              <a:t>https://mzj.sh.gov.cn/MZ_zhuzhan277_0-2-8-15-55-229/20260702/d95374094d6041a19b2591fd241126cb.html</a:t>
+            </a:r>
+          </a:p>
+          <a:p xmlns:a="http://schemas.openxmlformats.org/drawingml/2006/main">
+            <a:r>
+              <a:t>https://wsjkw.sh.gov.cn/2022wsjkzkbg/index.html</a:t>
+            </a:r>
+          </a:p>
+          <a:p xmlns:a="http://schemas.openxmlformats.org/drawingml/2006/main">
+            <a:r>
+              <a:t>https://wsjkw.sh.gov.cn/2023wsjkzkbg/index.html</a:t>
+            </a:r>
+          </a:p>
+          <a:p xmlns:a="http://schemas.openxmlformats.org/drawingml/2006/main">
+            <a:r>
+              <a:t>https://wsjkw.sh.gov.cn/2024wsjkzkbg/index.html</a:t>
+            </a:r>
+          </a:p>
+          <a:p xmlns:a="http://schemas.openxmlformats.org/drawingml/2006/main">
+            <a:r>
+              <a:t>https://opendata.cityofnewyork.us/open-data-law/</a:t>
+            </a:r>
+          </a:p>
+          <a:p xmlns:a="http://schemas.openxmlformats.org/drawingml/2006/main">
+            <a:r>
+              <a:t>https://data.cityofnewyork.us/Social-Services/DHS-Daily-Report/k46n-sa2m</a:t>
+            </a:r>
+          </a:p>
+          <a:p xmlns:a="http://schemas.openxmlformats.org/drawingml/2006/main">
+            <a:r>
+              <a:t>https://ghzyj.sh.gov.cn/gzdt/20251224/f5b8e34f5c834200910639b27717dfdf.html</a:t>
             </a:r>
           </a:p>
         </p:txBody>
@@ -5878,11 +2912,7 @@
               <a:t>15分钟讲述取舍：压缩 GDP、HDI、PPP 方法论铺垫；重点说政府管辖范围和收入量级。</a:t>
             </a:r>
           </a:p>
-          <a:p xmlns:a="http://schemas.openxmlformats.org/drawingml/2006/main">
-            <a:r>
-              <a:t/>
-            </a:r>
-          </a:p>
+          <a:p xmlns:a="http://schemas.openxmlformats.org/drawingml/2006/main"/>
           <a:p xmlns:a="http://schemas.openxmlformats.org/drawingml/2006/main">
             <a:r>
               <a:t>讲稿原文</a:t>
@@ -5893,61 +2923,37 @@
               <a:t>今天的题目是：纽约能不能叫人民城市？</a:t>
             </a:r>
           </a:p>
-          <a:p xmlns:a="http://schemas.openxmlformats.org/drawingml/2006/main">
-            <a:r>
-              <a:t/>
-            </a:r>
-          </a:p>
+          <a:p xmlns:a="http://schemas.openxmlformats.org/drawingml/2006/main"/>
           <a:p xmlns:a="http://schemas.openxmlformats.org/drawingml/2006/main">
             <a:r>
               <a:t>要回答它，不能看一座城市怎么称呼自己，得放到具体的生活里去比。</a:t>
             </a:r>
           </a:p>
-          <a:p xmlns:a="http://schemas.openxmlformats.org/drawingml/2006/main">
-            <a:r>
-              <a:t/>
-            </a:r>
-          </a:p>
+          <a:p xmlns:a="http://schemas.openxmlformats.org/drawingml/2006/main"/>
           <a:p xmlns:a="http://schemas.openxmlformats.org/drawingml/2006/main">
             <a:r>
               <a:t>怎么比？最常用的尺子是 GDP 和人均收入，但它们有个毛病：房租、看病、上学、理发这些服务，价格都是本地定的，没法拿现金直接换算。联合国的人类发展指数把寿命、教育、收入放在一起算，还是太粗；购买力平价算了几十年，到现在也没有一个公认的版本。所以我们只能把日常生活拆开，一项一项地比，用普通人看得懂的指标。</a:t>
             </a:r>
           </a:p>
-          <a:p xmlns:a="http://schemas.openxmlformats.org/drawingml/2006/main">
-            <a:r>
-              <a:t/>
-            </a:r>
-          </a:p>
+          <a:p xmlns:a="http://schemas.openxmlformats.org/drawingml/2006/main"/>
           <a:p xmlns:a="http://schemas.openxmlformats.org/drawingml/2006/main">
             <a:r>
               <a:t>比之前，先得说清楚比的是哪个纽约。纽约市有五个区，780 平方公里，850 多万人，面积只有上海的八分之一。上海全市 6,300 多平方公里，2,480 多万人，其中将近 1,000 万是外地来沪的常住人口。纽约都会区两千万人，规模更接近上海，但它跨了三个州，没有一个统一的政府。我们要看的是一座城市的政府怎么对待自己的市民，所以拿纽约市政府管的五个区，对比上海市政府管的全市，比较合适。面积差了八倍，比总量没有意义，所以下面凡是能算人均的，我们都算人均。</a:t>
             </a:r>
           </a:p>
-          <a:p xmlns:a="http://schemas.openxmlformats.org/drawingml/2006/main">
-            <a:r>
-              <a:t/>
-            </a:r>
-          </a:p>
+          <a:p xmlns:a="http://schemas.openxmlformats.org/drawingml/2006/main"/>
           <a:p xmlns:a="http://schemas.openxmlformats.org/drawingml/2006/main">
             <a:r>
               <a:t>再看收入。2024 年，纽约一户人家的收入中位数是 8.1 万美元，折合人民币约 55 万元。上海 2025 年人均可支配收入 9.2 万元，一户平均 2.24 人，一户约 20.6 万元。纽约是上海的两倍半以上。纽约这个数是税前的，扣完税要缩水；上海这个数是平均数，普通家庭够不着平均数，也要缩水。两边都挤掉水分，还是两倍半上下。从手里的现金看，纽约比上海宽裕得多。</a:t>
             </a:r>
           </a:p>
-          <a:p xmlns:a="http://schemas.openxmlformats.org/drawingml/2006/main">
-            <a:r>
-              <a:t/>
-            </a:r>
-          </a:p>
+          <a:p xmlns:a="http://schemas.openxmlformats.org/drawingml/2006/main"/>
           <a:p xmlns:a="http://schemas.openxmlformats.org/drawingml/2006/main">
             <a:r>
               <a:t>但收入差两倍半，不等于日子差两倍半。所以我们先比住、吃、穿、行四个基本项，再比医疗、治安、教育、文化四个加分项，最后单独看一题：怎么对待最穷的人。能找到上海具体做法的题，我们先讲上海做了什么，再看结果。</a:t>
             </a:r>
           </a:p>
-          <a:p xmlns:a="http://schemas.openxmlformats.org/drawingml/2006/main">
-            <a:r>
-              <a:t/>
-            </a:r>
-          </a:p>
+          <a:p xmlns:a="http://schemas.openxmlformats.org/drawingml/2006/main"/>
           <a:p xmlns:a="http://schemas.openxmlformats.org/drawingml/2006/main">
             <a:r>
               <a:t>数据来源与完整口径</a:t>
@@ -5958,254 +2964,45 @@
               <a:t>https://tjj.sh.gov.cn/ydsj71/20260120/39ae4cd58421478d897b739d83f39c10.html</a:t>
             </a:r>
           </a:p>
-          <a:p xmlns:a="http://schemas.openxmlformats.org/drawingml/2006/main">
-            <a:r>
-              <a:t/>
-            </a:r>
-          </a:p>
+          <a:p xmlns:a="http://schemas.openxmlformats.org/drawingml/2006/main"/>
           <a:p xmlns:a="http://schemas.openxmlformats.org/drawingml/2006/main">
             <a:r>
               <a:t>https://tjj.sh.gov.cn/tjgb/20260630/b74619258aee4912a55a1da928b5be30.html</a:t>
             </a:r>
           </a:p>
-          <a:p xmlns:a="http://schemas.openxmlformats.org/drawingml/2006/main">
-            <a:r>
-              <a:t/>
-            </a:r>
-          </a:p>
+          <a:p xmlns:a="http://schemas.openxmlformats.org/drawingml/2006/main"/>
           <a:p xmlns:a="http://schemas.openxmlformats.org/drawingml/2006/main">
             <a:r>
               <a:t>https://rentguidelinesboard.cityofnewyork.us/wp-content/uploads/2026/04/2026-IA.pdf</a:t>
             </a:r>
           </a:p>
-          <a:p xmlns:a="http://schemas.openxmlformats.org/drawingml/2006/main">
-            <a:r>
-              <a:t/>
-            </a:r>
-          </a:p>
+          <a:p xmlns:a="http://schemas.openxmlformats.org/drawingml/2006/main"/>
           <a:p xmlns:a="http://schemas.openxmlformats.org/drawingml/2006/main">
             <a:r>
               <a:t>https://tjj.sh.gov.cn/tjgb/20260330/e0772941e8e041eaaad2df850b44ef98.html</a:t>
             </a:r>
           </a:p>
-          <a:p xmlns:a="http://schemas.openxmlformats.org/drawingml/2006/main">
-            <a:r>
-              <a:t/>
-            </a:r>
-          </a:p>
+          <a:p xmlns:a="http://schemas.openxmlformats.org/drawingml/2006/main"/>
           <a:p xmlns:a="http://schemas.openxmlformats.org/drawingml/2006/main">
             <a:r>
               <a:t>https://www.health.ny.gov/statistics/vital_statistics/2022/table02.htm</a:t>
             </a:r>
           </a:p>
-          <a:p xmlns:a="http://schemas.openxmlformats.org/drawingml/2006/main">
-            <a:r>
-              <a:t/>
-            </a:r>
-          </a:p>
+          <a:p xmlns:a="http://schemas.openxmlformats.org/drawingml/2006/main"/>
           <a:p xmlns:a="http://schemas.openxmlformats.org/drawingml/2006/main">
             <a:r>
               <a:t>https://www.nyc.gov/content/planning/pages/planning/population</a:t>
             </a:r>
           </a:p>
-          <a:p xmlns:a="http://schemas.openxmlformats.org/drawingml/2006/main">
-            <a:r>
-              <a:t>{</a:t>
-            </a:r>
-          </a:p>
-          <a:p xmlns:a="http://schemas.openxmlformats.org/drawingml/2006/main">
-            <a:r>
-              <a:t>  "shanghai": {</a:t>
-            </a:r>
-          </a:p>
-          <a:p xmlns:a="http://schemas.openxmlformats.org/drawingml/2006/main">
-            <a:r>
-              <a:t>    "area_km2": 6340.5,</a:t>
-            </a:r>
-          </a:p>
-          <a:p xmlns:a="http://schemas.openxmlformats.org/drawingml/2006/main">
-            <a:r>
-              <a:t>    "population": 24854100,</a:t>
-            </a:r>
-          </a:p>
-          <a:p xmlns:a="http://schemas.openxmlformats.org/drawingml/2006/main">
-            <a:r>
-              <a:t>    "population_year": 2025,</a:t>
-            </a:r>
-          </a:p>
-          <a:p xmlns:a="http://schemas.openxmlformats.org/drawingml/2006/main">
-            <a:r>
-              <a:t>    "scope": "上海全市",</a:t>
-            </a:r>
-          </a:p>
-          <a:p xmlns:a="http://schemas.openxmlformats.org/drawingml/2006/main">
-            <a:r>
-              <a:t>    "source": "https://tjj.sh.gov.cn/tjgb/20260330/e0772941e8e041eaaad2df850b44ef98.html"</a:t>
-            </a:r>
-          </a:p>
-          <a:p xmlns:a="http://schemas.openxmlformats.org/drawingml/2006/main">
-            <a:r>
-              <a:t>  },</a:t>
-            </a:r>
-          </a:p>
-          <a:p xmlns:a="http://schemas.openxmlformats.org/drawingml/2006/main">
-            <a:r>
-              <a:t>  "newyork": {</a:t>
-            </a:r>
-          </a:p>
-          <a:p xmlns:a="http://schemas.openxmlformats.org/drawingml/2006/main">
-            <a:r>
-              <a:t>    "area_km2": 778.2,</a:t>
-            </a:r>
-          </a:p>
-          <a:p xmlns:a="http://schemas.openxmlformats.org/drawingml/2006/main">
-            <a:r>
-              <a:t>    "population": 8584629,</a:t>
-            </a:r>
-          </a:p>
-          <a:p xmlns:a="http://schemas.openxmlformats.org/drawingml/2006/main">
-            <a:r>
-              <a:t>    "population_date": "2025-07-01",</a:t>
-            </a:r>
-          </a:p>
-          <a:p xmlns:a="http://schemas.openxmlformats.org/drawingml/2006/main">
-            <a:r>
-              <a:t>    "scope": "纽约市五区",</a:t>
-            </a:r>
-          </a:p>
-          <a:p xmlns:a="http://schemas.openxmlformats.org/drawingml/2006/main">
-            <a:r>
-              <a:t>    "sources": [</a:t>
-            </a:r>
-          </a:p>
-          <a:p xmlns:a="http://schemas.openxmlformats.org/drawingml/2006/main">
-            <a:r>
-              <a:t>      "https://www.health.ny.gov/statistics/vital_statistics/2022/table02.htm",</a:t>
-            </a:r>
-          </a:p>
-          <a:p xmlns:a="http://schemas.openxmlformats.org/drawingml/2006/main">
-            <a:r>
-              <a:t>      "https://www.nyc.gov/content/planning/pages/planning/population"</a:t>
-            </a:r>
-          </a:p>
-          <a:p xmlns:a="http://schemas.openxmlformats.org/drawingml/2006/main">
-            <a:r>
-              <a:t>    ]</a:t>
-            </a:r>
-          </a:p>
-          <a:p xmlns:a="http://schemas.openxmlformats.org/drawingml/2006/main">
-            <a:r>
-              <a:t>  },</a:t>
-            </a:r>
-          </a:p>
-          <a:p xmlns:a="http://schemas.openxmlformats.org/drawingml/2006/main">
-            <a:r>
-              <a:t>  "fx": {</a:t>
-            </a:r>
-          </a:p>
-          <a:p xmlns:a="http://schemas.openxmlformats.org/drawingml/2006/main">
-            <a:r>
-              <a:t>    "usd_cny": 6.733,</a:t>
-            </a:r>
-          </a:p>
-          <a:p xmlns:a="http://schemas.openxmlformats.org/drawingml/2006/main">
-            <a:r>
-              <a:t>    "date": "2026-10-09",</a:t>
-            </a:r>
-          </a:p>
-          <a:p xmlns:a="http://schemas.openxmlformats.org/drawingml/2006/main">
-            <a:r>
-              <a:t>    "source_quality": "香港电台转述中国外汇交易中心公告，表中未提供精确URL，只核对检索摘要"</a:t>
-            </a:r>
-          </a:p>
-          <a:p xmlns:a="http://schemas.openxmlformats.org/drawingml/2006/main">
-            <a:r>
-              <a:t>  },</a:t>
-            </a:r>
-          </a:p>
-          <a:p xmlns:a="http://schemas.openxmlformats.org/drawingml/2006/main">
-            <a:r>
-              <a:t>  "income": {</a:t>
-            </a:r>
-          </a:p>
-          <a:p xmlns:a="http://schemas.openxmlformats.org/drawingml/2006/main">
-            <a:r>
-              <a:t>    "nyc_household_median_usd": 81228,</a:t>
-            </a:r>
-          </a:p>
-          <a:p xmlns:a="http://schemas.openxmlformats.org/drawingml/2006/main">
-            <a:r>
-              <a:t>    "nyc_year": 2024,</a:t>
-            </a:r>
-          </a:p>
-          <a:p xmlns:a="http://schemas.openxmlformats.org/drawingml/2006/main">
-            <a:r>
-              <a:t>    "nyc_source": "https://rentguidelinesboard.cityofnewyork.us/wp-content/uploads/2026/04/2026-IA.pdf",</a:t>
-            </a:r>
-          </a:p>
-          <a:p xmlns:a="http://schemas.openxmlformats.org/drawingml/2006/main">
-            <a:r>
-              <a:t>    "shanghai_percapita_disposable_cny": 91987,</a:t>
-            </a:r>
-          </a:p>
-          <a:p xmlns:a="http://schemas.openxmlformats.org/drawingml/2006/main">
-            <a:r>
-              <a:t>    "shanghai_year": 2025,</a:t>
-            </a:r>
-          </a:p>
-          <a:p xmlns:a="http://schemas.openxmlformats.org/drawingml/2006/main">
-            <a:r>
-              <a:t>    "household_size": 2.24,</a:t>
-            </a:r>
-          </a:p>
-          <a:p xmlns:a="http://schemas.openxmlformats.org/drawingml/2006/main">
-            <a:r>
-              <a:t>    "shanghai_derived_household_cny": 206050.88,</a:t>
-            </a:r>
-          </a:p>
-          <a:p xmlns:a="http://schemas.openxmlformats.org/drawingml/2006/main">
-            <a:r>
-              <a:t>    "approx_ratio": 2.65,</a:t>
-            </a:r>
-          </a:p>
-          <a:p xmlns:a="http://schemas.openxmlformats.org/drawingml/2006/main">
-            <a:r>
-              <a:t>    "onslide": "家庭收入差约2.65倍（纽约约55万元，上海约20.6万元）",</a:t>
-            </a:r>
-          </a:p>
-          <a:p xmlns:a="http://schemas.openxmlformats.org/drawingml/2006/main">
-            <a:r>
-              <a:t>    "footnote": "纽约为税前户收入中位数；上海由人均可支配收入均值×家庭户规模估算。",</a:t>
-            </a:r>
-          </a:p>
-          <a:p xmlns:a="http://schemas.openxmlformats.org/drawingml/2006/main">
-            <a:r>
-              <a:t>    "shanghai_sources": [</a:t>
-            </a:r>
-          </a:p>
-          <a:p xmlns:a="http://schemas.openxmlformats.org/drawingml/2006/main">
-            <a:r>
-              <a:t>      "https://tjj.sh.gov.cn/ydsj71/20260120/39ae4cd58421478d897b739d83f39c10.html",</a:t>
-            </a:r>
-          </a:p>
-          <a:p xmlns:a="http://schemas.openxmlformats.org/drawingml/2006/main">
-            <a:r>
-              <a:t>      "https://tjj.sh.gov.cn/tjgb/20260630/b74619258aee4912a55a1da928b5be30.html"</a:t>
-            </a:r>
-          </a:p>
-          <a:p xmlns:a="http://schemas.openxmlformats.org/drawingml/2006/main">
-            <a:r>
-              <a:t>    ]</a:t>
-            </a:r>
-          </a:p>
-          <a:p xmlns:a="http://schemas.openxmlformats.org/drawingml/2006/main">
-            <a:r>
-              <a:t>  }</a:t>
-            </a:r>
-          </a:p>
-          <a:p xmlns:a="http://schemas.openxmlformats.org/drawingml/2006/main">
-            <a:r>
-              <a:t>}</a:t>
+          <a:p xmlns:a="http://schemas.openxmlformats.org/drawingml/2006/main"/>
+          <a:p xmlns:a="http://schemas.openxmlformats.org/drawingml/2006/main">
+            <a:r>
+              <a:t>口径：</a:t>
+            </a:r>
+          </a:p>
+          <a:p xmlns:a="http://schemas.openxmlformats.org/drawingml/2006/main">
+            <a:r>
+              <a:t>纽约为税前户收入中位数；上海由人均可支配收入均值×家庭户规模估算。</a:t>
             </a:r>
           </a:p>
         </p:txBody>
@@ -6608,11 +3405,7 @@
               <a:t>15分钟讲述取舍：只保留一个票价折算例子；正文不报衣食住行“二比二”。备注仍完整保留新版第 5 节原文。</a:t>
             </a:r>
           </a:p>
-          <a:p xmlns:a="http://schemas.openxmlformats.org/drawingml/2006/main">
-            <a:r>
-              <a:t/>
-            </a:r>
-          </a:p>
+          <a:p xmlns:a="http://schemas.openxmlformats.org/drawingml/2006/main"/>
           <a:p xmlns:a="http://schemas.openxmlformats.org/drawingml/2006/main">
             <a:r>
               <a:t>讲稿原文</a:t>
@@ -6623,51 +3416,31 @@
               <a:t>纽约是美国公共交通最好的城市。将近一半的纽约家庭靠公共交通出行，全美只有 4%。所以纽约都会区的家庭，花在交通上的钱只占消费的 14%，全美平均是 17%。</a:t>
             </a:r>
           </a:p>
-          <a:p xmlns:a="http://schemas.openxmlformats.org/drawingml/2006/main">
-            <a:r>
-              <a:t/>
-            </a:r>
-          </a:p>
+          <a:p xmlns:a="http://schemas.openxmlformats.org/drawingml/2006/main"/>
           <a:p xmlns:a="http://schemas.openxmlformats.org/drawingml/2006/main">
             <a:r>
               <a:t>但放到上海面前，纽约这点优势就不够看了。上海第一条地铁 1993 年才开通，三十多年修了 22 条线、960 多公里，是纽约的两倍多；地铁和公交两小时内换乘，还能优惠 1 块钱。2025 年，上海地铁运了 37 亿人次，纽约将近 13 亿人次，按人头算，两边每人每年都坐 150 次左右，用得一样多。</a:t>
             </a:r>
           </a:p>
-          <a:p xmlns:a="http://schemas.openxmlformats.org/drawingml/2006/main">
-            <a:r>
-              <a:t/>
-            </a:r>
-          </a:p>
+          <a:p xmlns:a="http://schemas.openxmlformats.org/drawingml/2006/main"/>
           <a:p xmlns:a="http://schemas.openxmlformats.org/drawingml/2006/main">
             <a:r>
               <a:t>差别在用不用得起。纽约坐一趟地铁 3 美元，合人民币 20 块钱；就算按两城两倍半的收入差距打个折，也相当于上海人花 7 块多钱坐一趟，上海只要 3 到 4 块。纽约一周通勤最多收 35 美元，打完折也要 90 块左右，上海按一周 10 趟、每趟 4 块算，是 40 块。上海还有 18 块钱的一日票、45 块钱的三日票，72 小时随便坐。上海交通加通信两项合计，只占消费的 10.6%，纽约光交通一项就是 14%。</a:t>
             </a:r>
           </a:p>
-          <a:p xmlns:a="http://schemas.openxmlformats.org/drawingml/2006/main">
-            <a:r>
-              <a:t/>
-            </a:r>
-          </a:p>
+          <a:p xmlns:a="http://schemas.openxmlformats.org/drawingml/2006/main"/>
           <a:p xmlns:a="http://schemas.openxmlformats.org/drawingml/2006/main">
             <a:r>
               <a:t>对比下来，显然是上海的性价比更高。日常出行，上海是压倒性优势。</a:t>
             </a:r>
           </a:p>
-          <a:p xmlns:a="http://schemas.openxmlformats.org/drawingml/2006/main">
-            <a:r>
-              <a:t/>
-            </a:r>
-          </a:p>
+          <a:p xmlns:a="http://schemas.openxmlformats.org/drawingml/2006/main"/>
           <a:p xmlns:a="http://schemas.openxmlformats.org/drawingml/2006/main">
             <a:r>
               <a:t>衣食住行四项比下来：上海出行领先得最多，住房明显占优；纽约穿衣差距最大，吃饭稍微胜出。双方各有一个压倒性优势，这四项算二比二打平。这只是给基本项收个尾，整张卷子我们不算总分，原因到计分表再说。</a:t>
             </a:r>
           </a:p>
-          <a:p xmlns:a="http://schemas.openxmlformats.org/drawingml/2006/main">
-            <a:r>
-              <a:t/>
-            </a:r>
-          </a:p>
+          <a:p xmlns:a="http://schemas.openxmlformats.org/drawingml/2006/main"/>
           <a:p xmlns:a="http://schemas.openxmlformats.org/drawingml/2006/main">
             <a:r>
               <a:t>数据来源与完整口径</a:t>
@@ -6708,214 +3481,33 @@
               <a:t>https://www.bls.gov/regions/northeast/news-release/consumerexpenditures_newyork.htm</a:t>
             </a:r>
           </a:p>
-          <a:p xmlns:a="http://schemas.openxmlformats.org/drawingml/2006/main">
-            <a:r>
-              <a:t/>
-            </a:r>
-          </a:p>
+          <a:p xmlns:a="http://schemas.openxmlformats.org/drawingml/2006/main"/>
           <a:p xmlns:a="http://schemas.openxmlformats.org/drawingml/2006/main">
             <a:r>
               <a:t>https://tjj.sh.gov.cn/ydsj71/20260120/39ae4cd58421478d897b739d83f39c10.html</a:t>
             </a:r>
           </a:p>
-          <a:p xmlns:a="http://schemas.openxmlformats.org/drawingml/2006/main">
-            <a:r>
-              <a:t/>
-            </a:r>
-          </a:p>
+          <a:p xmlns:a="http://schemas.openxmlformats.org/drawingml/2006/main"/>
           <a:p xmlns:a="http://schemas.openxmlformats.org/drawingml/2006/main">
             <a:r>
               <a:t>https://tjj.sh.gov.cn/tjgb/20260630/b74619258aee4912a55a1da928b5be30.html</a:t>
             </a:r>
           </a:p>
-          <a:p xmlns:a="http://schemas.openxmlformats.org/drawingml/2006/main">
-            <a:r>
-              <a:t/>
-            </a:r>
-          </a:p>
+          <a:p xmlns:a="http://schemas.openxmlformats.org/drawingml/2006/main"/>
           <a:p xmlns:a="http://schemas.openxmlformats.org/drawingml/2006/main">
             <a:r>
               <a:t>https://rentguidelinesboard.cityofnewyork.us/wp-content/uploads/2026/04/2026-IA.pdf</a:t>
             </a:r>
           </a:p>
-          <a:p xmlns:a="http://schemas.openxmlformats.org/drawingml/2006/main">
-            <a:r>
-              <a:t>{</a:t>
-            </a:r>
-          </a:p>
-          <a:p xmlns:a="http://schemas.openxmlformats.org/drawingml/2006/main">
-            <a:r>
-              <a:t>  "item": "行",</a:t>
-            </a:r>
-          </a:p>
-          <a:p xmlns:a="http://schemas.openxmlformats.org/drawingml/2006/main">
-            <a:r>
-              <a:t>  "winner": "上海",</a:t>
-            </a:r>
-          </a:p>
-          <a:p xmlns:a="http://schemas.openxmlformats.org/drawingml/2006/main">
-            <a:r>
-              <a:t>  "degree": "压倒性",</a:t>
-            </a:r>
-          </a:p>
-          <a:p xmlns:a="http://schemas.openxmlformats.org/drawingml/2006/main">
-            <a:r>
-              <a:t>  "single_fare": {</a:t>
-            </a:r>
-          </a:p>
-          <a:p xmlns:a="http://schemas.openxmlformats.org/drawingml/2006/main">
-            <a:r>
-              <a:t>    "shanghai_cny": "3–4",</a:t>
-            </a:r>
-          </a:p>
-          <a:p xmlns:a="http://schemas.openxmlformats.org/drawingml/2006/main">
-            <a:r>
-              <a:t>    "nyc_usd": 3,</a:t>
-            </a:r>
-          </a:p>
-          <a:p xmlns:a="http://schemas.openxmlformats.org/drawingml/2006/main">
-            <a:r>
-              <a:t>    "nyc_income_adjusted_cny": 7.6</a:t>
-            </a:r>
-          </a:p>
-          <a:p xmlns:a="http://schemas.openxmlformats.org/drawingml/2006/main">
-            <a:r>
-              <a:t>  },</a:t>
-            </a:r>
-          </a:p>
-          <a:p xmlns:a="http://schemas.openxmlformats.org/drawingml/2006/main">
-            <a:r>
-              <a:t>  "week_commute": {</a:t>
-            </a:r>
-          </a:p>
-          <a:p xmlns:a="http://schemas.openxmlformats.org/drawingml/2006/main">
-            <a:r>
-              <a:t>    "shanghai_cny": 40,</a:t>
-            </a:r>
-          </a:p>
-          <a:p xmlns:a="http://schemas.openxmlformats.org/drawingml/2006/main">
-            <a:r>
-              <a:t>    "nyc_income_adjusted_cny": 89</a:t>
-            </a:r>
-          </a:p>
-          <a:p xmlns:a="http://schemas.openxmlformats.org/drawingml/2006/main">
-            <a:r>
-              <a:t>  },</a:t>
-            </a:r>
-          </a:p>
-          <a:p xmlns:a="http://schemas.openxmlformats.org/drawingml/2006/main">
-            <a:r>
-              <a:t>  "day_pass_cny": 18,</a:t>
-            </a:r>
-          </a:p>
-          <a:p xmlns:a="http://schemas.openxmlformats.org/drawingml/2006/main">
-            <a:r>
-              <a:t>  "three_day_pass_cny": 45,</a:t>
-            </a:r>
-          </a:p>
-          <a:p xmlns:a="http://schemas.openxmlformats.org/drawingml/2006/main">
-            <a:r>
-              <a:t>  "spending_share": {</a:t>
-            </a:r>
-          </a:p>
-          <a:p xmlns:a="http://schemas.openxmlformats.org/drawingml/2006/main">
-            <a:r>
-              <a:t>    "shanghai_transport_and_communication": 10.6,</a:t>
-            </a:r>
-          </a:p>
-          <a:p xmlns:a="http://schemas.openxmlformats.org/drawingml/2006/main">
-            <a:r>
-              <a:t>    "nyc_msa_transport": 14</a:t>
-            </a:r>
-          </a:p>
-          <a:p xmlns:a="http://schemas.openxmlformats.org/drawingml/2006/main">
-            <a:r>
-              <a:t>  },</a:t>
-            </a:r>
-          </a:p>
-          <a:p xmlns:a="http://schemas.openxmlformats.org/drawingml/2006/main">
-            <a:r>
-              <a:t>  "rides_percapita_annual": {</a:t>
-            </a:r>
-          </a:p>
-          <a:p xmlns:a="http://schemas.openxmlformats.org/drawingml/2006/main">
-            <a:r>
-              <a:t>    "shanghai": 150,</a:t>
-            </a:r>
-          </a:p>
-          <a:p xmlns:a="http://schemas.openxmlformats.org/drawingml/2006/main">
-            <a:r>
-              <a:t>    "newyork": 151</a:t>
-            </a:r>
-          </a:p>
-          <a:p xmlns:a="http://schemas.openxmlformats.org/drawingml/2006/main">
-            <a:r>
-              <a:t>  },</a:t>
-            </a:r>
-          </a:p>
-          <a:p xmlns:a="http://schemas.openxmlformats.org/drawingml/2006/main">
-            <a:r>
-              <a:t>  "practice": "22条、962km；120分钟公交轨交换乘优惠1元。",</a:t>
-            </a:r>
-          </a:p>
-          <a:p xmlns:a="http://schemas.openxmlformats.org/drawingml/2006/main">
-            <a:r>
-              <a:t>  "footnote": "票价按户收入差2.65倍折算；支出占比为纽约都会区交通（2022–23）对上海交通通信（2024）。",</a:t>
-            </a:r>
-          </a:p>
-          <a:p xmlns:a="http://schemas.openxmlformats.org/drawingml/2006/main">
-            <a:r>
-              <a:t>  "sources": [</a:t>
-            </a:r>
-          </a:p>
-          <a:p xmlns:a="http://schemas.openxmlformats.org/drawingml/2006/main">
-            <a:r>
-              <a:t>    "https://portal.311.nyc.gov/article/?kanumber=KA-01014",</a:t>
-            </a:r>
-          </a:p>
-          <a:p xmlns:a="http://schemas.openxmlformats.org/drawingml/2006/main">
-            <a:r>
-              <a:t>    "https://www.nyc.gov/site/opa/commuters/commuters.page",</a:t>
-            </a:r>
-          </a:p>
-          <a:p xmlns:a="http://schemas.openxmlformats.org/drawingml/2006/main">
-            <a:r>
-              <a:t>    "https://service.shmetro.com/cpxz/3983.htm",</a:t>
-            </a:r>
-          </a:p>
-          <a:p xmlns:a="http://schemas.openxmlformats.org/drawingml/2006/main">
-            <a:r>
-              <a:t>    "https://service.shmetro.com/pwyh/index.htm",</a:t>
-            </a:r>
-          </a:p>
-          <a:p xmlns:a="http://schemas.openxmlformats.org/drawingml/2006/main">
-            <a:r>
-              <a:t>    "https://service.shmetro.com/cpxz/index.htm",</a:t>
-            </a:r>
-          </a:p>
-          <a:p xmlns:a="http://schemas.openxmlformats.org/drawingml/2006/main">
-            <a:r>
-              <a:t>    "https://tjj.sh.gov.cn/tjnj/2025tjnj/C0913.htm",</a:t>
-            </a:r>
-          </a:p>
-          <a:p xmlns:a="http://schemas.openxmlformats.org/drawingml/2006/main">
-            <a:r>
-              <a:t>    "https://www.bls.gov/regions/northeast/news-release/consumerexpenditures_newyork.htm"</a:t>
-            </a:r>
-          </a:p>
-          <a:p xmlns:a="http://schemas.openxmlformats.org/drawingml/2006/main">
-            <a:r>
-              <a:t>  ],</a:t>
-            </a:r>
-          </a:p>
-          <a:p xmlns:a="http://schemas.openxmlformats.org/drawingml/2006/main">
-            <a:r>
-              <a:t>  "provenance_notes": "18/45价格由Johnny确认、官方文字页仅列使用规则；纽约14%原表取自州审计长2024-10报告摘要/转述，没有精确报告URL。最低工资折算方案已弃用。"</a:t>
-            </a:r>
-          </a:p>
-          <a:p xmlns:a="http://schemas.openxmlformats.org/drawingml/2006/main">
-            <a:r>
-              <a:t>}</a:t>
+          <a:p xmlns:a="http://schemas.openxmlformats.org/drawingml/2006/main"/>
+          <a:p xmlns:a="http://schemas.openxmlformats.org/drawingml/2006/main">
+            <a:r>
+              <a:t>口径：</a:t>
+            </a:r>
+          </a:p>
+          <a:p xmlns:a="http://schemas.openxmlformats.org/drawingml/2006/main">
+            <a:r>
+              <a:t>票价按户收入差2.65倍折算；支出占比为纽约都会区交通（2022–23）对上海交通通信（2024）。</a:t>
             </a:r>
           </a:p>
         </p:txBody>
@@ -6993,11 +3585,7 @@
               <a:t>15分钟讲述取舍：四行各约 25 秒：结果指标、判分和一句解释；原文投入、寿命、PISA、百老汇作备注参考，不逐字朗读。</a:t>
             </a:r>
           </a:p>
-          <a:p xmlns:a="http://schemas.openxmlformats.org/drawingml/2006/main">
-            <a:r>
-              <a:t/>
-            </a:r>
-          </a:p>
+          <a:p xmlns:a="http://schemas.openxmlformats.org/drawingml/2006/main"/>
           <a:p xmlns:a="http://schemas.openxmlformats.org/drawingml/2006/main">
             <a:r>
               <a:t>讲稿原文</a:t>
@@ -7008,141 +3596,85 @@
               <a:t>上海在医疗上肯花钱：2024 年财政花在卫生健康上的是 732 亿元，参加医保的超过 2,000 万人。但钱花得值不值，不看投入，要看结果。</a:t>
             </a:r>
           </a:p>
-          <a:p xmlns:a="http://schemas.openxmlformats.org/drawingml/2006/main">
-            <a:r>
-              <a:t/>
-            </a:r>
-          </a:p>
+          <a:p xmlns:a="http://schemas.openxmlformats.org/drawingml/2006/main"/>
           <a:p xmlns:a="http://schemas.openxmlformats.org/drawingml/2006/main">
             <a:r>
               <a:t>先看人均期望寿命：上海 83.18 岁，纽约 83.2 岁，几乎一样，分不出高下。上海这个数还停在 2022 年，这一点最后再说。</a:t>
             </a:r>
           </a:p>
-          <a:p xmlns:a="http://schemas.openxmlformats.org/drawingml/2006/main">
-            <a:r>
-              <a:t/>
-            </a:r>
-          </a:p>
+          <a:p xmlns:a="http://schemas.openxmlformats.org/drawingml/2006/main"/>
           <a:p xmlns:a="http://schemas.openxmlformats.org/drawingml/2006/main">
             <a:r>
               <a:t>寿命分不出来，就看两个国际上衡量医疗体系最常用的指标：婴儿死亡率和孕产妇死亡率。它们看的是普通家庭生孩子、养孩子的时候，医疗体系兜不兜得住。</a:t>
             </a:r>
           </a:p>
-          <a:p xmlns:a="http://schemas.openxmlformats.org/drawingml/2006/main">
-            <a:r>
-              <a:t/>
-            </a:r>
-          </a:p>
+          <a:p xmlns:a="http://schemas.openxmlformats.org/drawingml/2006/main"/>
           <a:p xmlns:a="http://schemas.openxmlformats.org/drawingml/2006/main">
             <a:r>
               <a:t>婴儿死亡率，上海 2025 年是千分之 2.34，纽约 2023 年是千分之 4.2，高出八成。孕产妇死亡率差得更远：上海 2025 年每 10 万名活产婴儿对应 1.85 例；纽约 2022 年同样算到产后 42 天，大约是 21 例，是上海的 10 倍以上。</a:t>
             </a:r>
           </a:p>
-          <a:p xmlns:a="http://schemas.openxmlformats.org/drawingml/2006/main">
-            <a:r>
-              <a:t/>
-            </a:r>
-          </a:p>
+          <a:p xmlns:a="http://schemas.openxmlformats.org/drawingml/2006/main"/>
           <a:p xmlns:a="http://schemas.openxmlformats.org/drawingml/2006/main">
             <a:r>
               <a:t>婴儿差八成，产妇差十倍。寿命已经拉不开，这两项拉开了，所以医疗方面，上海优势明显。</a:t>
             </a:r>
           </a:p>
-          <a:p xmlns:a="http://schemas.openxmlformats.org/drawingml/2006/main">
-            <a:r>
-              <a:t/>
-            </a:r>
-          </a:p>
+          <a:p xmlns:a="http://schemas.openxmlformats.org/drawingml/2006/main"/>
           <a:p xmlns:a="http://schemas.openxmlformats.org/drawingml/2006/main">
             <a:r>
               <a:t>治安更不用多说。2024 年，上海杀人案立案 46 起，平均八天一起，每 10 万人约 0.19 起。2025 年，纽约谋杀案 305 起，差不多每天一起，每 10 万人约 3.6 起，是上海的 19 倍。两边统计口径略有不同，但差了一个数量级，纽约在安全方面和上海没有可比性。</a:t>
             </a:r>
           </a:p>
-          <a:p xmlns:a="http://schemas.openxmlformats.org/drawingml/2006/main">
-            <a:r>
-              <a:t/>
-            </a:r>
-          </a:p>
+          <a:p xmlns:a="http://schemas.openxmlformats.org/drawingml/2006/main"/>
           <a:p xmlns:a="http://schemas.openxmlformats.org/drawingml/2006/main">
             <a:r>
               <a:t>教育只比义务教育，也就是每个孩子都要上的那部分。</a:t>
             </a:r>
           </a:p>
-          <a:p xmlns:a="http://schemas.openxmlformats.org/drawingml/2006/main">
-            <a:r>
-              <a:t/>
-            </a:r>
-          </a:p>
+          <a:p xmlns:a="http://schemas.openxmlformats.org/drawingml/2006/main"/>
           <a:p xmlns:a="http://schemas.openxmlformats.org/drawingml/2006/main">
             <a:r>
               <a:t>上海的小学和初中，净入学率都是 99.9%。上海学生在国际学生测评 PISA 里拿过两次第一：2009 年阅读 556 分，2012 年数学 613 分，同一年美国学生的数学是 481 分。不过这是十多年前的成绩，之后上海不再单独参加，只能当背景。</a:t>
             </a:r>
           </a:p>
-          <a:p xmlns:a="http://schemas.openxmlformats.org/drawingml/2006/main">
-            <a:r>
-              <a:t/>
-            </a:r>
-          </a:p>
+          <a:p xmlns:a="http://schemas.openxmlformats.org/drawingml/2006/main"/>
           <a:p xmlns:a="http://schemas.openxmlformats.org/drawingml/2006/main">
             <a:r>
               <a:t>现在能比的是生师比，也就是一位老师平均带几个学生。上海中小学是 12.5 个，纽约公立学校是 13.2 个，差不多。</a:t>
             </a:r>
           </a:p>
-          <a:p xmlns:a="http://schemas.openxmlformats.org/drawingml/2006/main">
-            <a:r>
-              <a:t/>
-            </a:r>
-          </a:p>
+          <a:p xmlns:a="http://schemas.openxmlformats.org/drawingml/2006/main"/>
           <a:p xmlns:a="http://schemas.openxmlformats.org/drawingml/2006/main">
             <a:r>
               <a:t>差别在区与区之间。纽约 32 个学区，最宽松的一位老师带 8.7 个学生，最紧的带 13.9 个。上海各区的小学也差得不小：人口还在往里涌的嘉定、松江、闵行，一位小学老师要带 15 个学生；黄浦、长宁这些老城区，只带 11 个左右。学生往哪里去，老师没有完全跟上。</a:t>
             </a:r>
           </a:p>
-          <a:p xmlns:a="http://schemas.openxmlformats.org/drawingml/2006/main">
-            <a:r>
-              <a:t/>
-            </a:r>
-          </a:p>
+          <a:p xmlns:a="http://schemas.openxmlformats.org/drawingml/2006/main"/>
           <a:p xmlns:a="http://schemas.openxmlformats.org/drawingml/2006/main">
             <a:r>
               <a:t>教育方面，两城整体差不多，算打平。但上海最紧的区，一位老师带 15 个学生，比纽约最紧的学区还紧，区与区之间的均衡是上海要补的。</a:t>
             </a:r>
           </a:p>
-          <a:p xmlns:a="http://schemas.openxmlformats.org/drawingml/2006/main">
-            <a:r>
-              <a:t/>
-            </a:r>
-          </a:p>
+          <a:p xmlns:a="http://schemas.openxmlformats.org/drawingml/2006/main"/>
           <a:p xmlns:a="http://schemas.openxmlformats.org/drawingml/2006/main">
             <a:r>
               <a:t>上海这几年在把文化往家门口搬。全市划出 1,600 个"15 分钟社区生活圈"，走十几分钟就能到文化、体育、养老设施；公园一年新开 127 座，2025 年全市营业性演出 6 万多场。</a:t>
             </a:r>
           </a:p>
-          <a:p xmlns:a="http://schemas.openxmlformats.org/drawingml/2006/main">
-            <a:r>
-              <a:t/>
-            </a:r>
-          </a:p>
+          <a:p xmlns:a="http://schemas.openxmlformats.org/drawingml/2006/main"/>
           <a:p xmlns:a="http://schemas.openxmlformats.org/drawingml/2006/main">
             <a:r>
               <a:t>但文化是纽约的传统强项。百老汇一个演出季将近 1,460 万人次观众，不过那是生意，更值得比的是不赚钱的那部分：纽约三大公共图书馆系统有 200 多个网点，大约四万人就有一个；市政府今年资助了 1,171 家文化机构，其中 96% 提供免费或者有补贴的项目。</a:t>
             </a:r>
           </a:p>
-          <a:p xmlns:a="http://schemas.openxmlformats.org/drawingml/2006/main">
-            <a:r>
-              <a:t/>
-            </a:r>
-          </a:p>
+          <a:p xmlns:a="http://schemas.openxmlformats.org/drawingml/2006/main"/>
           <a:p xmlns:a="http://schemas.openxmlformats.org/drawingml/2006/main">
             <a:r>
               <a:t>上海街道、乡镇图书馆分馆的全市数字，我们没找到；但光看由财政托底、向所有市民免费开放的文化项目，纽约做到了上千家机构的规模。文化方面，纽约领先。</a:t>
             </a:r>
           </a:p>
-          <a:p xmlns:a="http://schemas.openxmlformats.org/drawingml/2006/main">
-            <a:r>
-              <a:t/>
-            </a:r>
-          </a:p>
+          <a:p xmlns:a="http://schemas.openxmlformats.org/drawingml/2006/main"/>
           <a:p xmlns:a="http://schemas.openxmlformats.org/drawingml/2006/main">
             <a:r>
               <a:t>数据来源与完整口径</a:t>
@@ -7173,11 +3705,7 @@
               <a:t>https://www.nyc.gov/assets/doh/downloads/pdf/data/maternal-mortality-annual-report-2025.pdf</a:t>
             </a:r>
           </a:p>
-          <a:p xmlns:a="http://schemas.openxmlformats.org/drawingml/2006/main">
-            <a:r>
-              <a:t/>
-            </a:r>
-          </a:p>
+          <a:p xmlns:a="http://schemas.openxmlformats.org/drawingml/2006/main"/>
           <a:p xmlns:a="http://schemas.openxmlformats.org/drawingml/2006/main">
             <a:r>
               <a:t>治安</a:t>
@@ -7193,11 +3721,7 @@
               <a:t>https://www.nyc.gov/site/nypd/news/PR001/nypd-safest-year-ever-gun-violence-fewest-shooting-incidents-shooting</a:t>
             </a:r>
           </a:p>
-          <a:p xmlns:a="http://schemas.openxmlformats.org/drawingml/2006/main">
-            <a:r>
-              <a:t/>
-            </a:r>
-          </a:p>
+          <a:p xmlns:a="http://schemas.openxmlformats.org/drawingml/2006/main"/>
           <a:p xmlns:a="http://schemas.openxmlformats.org/drawingml/2006/main">
             <a:r>
               <a:t>教育</a:t>
@@ -7223,11 +3747,7 @@
               <a:t>https://data.nysed.gov/studenteducator.php?year=2025&amp;instid=7889678368</a:t>
             </a:r>
           </a:p>
-          <a:p xmlns:a="http://schemas.openxmlformats.org/drawingml/2006/main">
-            <a:r>
-              <a:t/>
-            </a:r>
-          </a:p>
+          <a:p xmlns:a="http://schemas.openxmlformats.org/drawingml/2006/main"/>
           <a:p xmlns:a="http://schemas.openxmlformats.org/drawingml/2006/main">
             <a:r>
               <a:t>文化</a:t>
@@ -7258,414 +3778,30 @@
               <a:t>https://english.shanghai.gov.cn/en-Latest-WhatsNew/20260212/af11d8de7fd24819bff50c940e428855.html</a:t>
             </a:r>
           </a:p>
-          <a:p xmlns:a="http://schemas.openxmlformats.org/drawingml/2006/main">
-            <a:r>
-              <a:t>{</a:t>
-            </a:r>
-          </a:p>
-          <a:p xmlns:a="http://schemas.openxmlformats.org/drawingml/2006/main">
-            <a:r>
-              <a:t>  "item": "医疗",</a:t>
-            </a:r>
-          </a:p>
-          <a:p xmlns:a="http://schemas.openxmlformats.org/drawingml/2006/main">
-            <a:r>
-              <a:t>  "winner": "上海",</a:t>
-            </a:r>
-          </a:p>
-          <a:p xmlns:a="http://schemas.openxmlformats.org/drawingml/2006/main">
-            <a:r>
-              <a:t>  "degree": "明显",</a:t>
-            </a:r>
-          </a:p>
-          <a:p xmlns:a="http://schemas.openxmlformats.org/drawingml/2006/main">
-            <a:r>
-              <a:t>  "infant_mortality_per1000": {</a:t>
-            </a:r>
-          </a:p>
-          <a:p xmlns:a="http://schemas.openxmlformats.org/drawingml/2006/main">
-            <a:r>
-              <a:t>    "shanghai_2025": 2.34,</a:t>
-            </a:r>
-          </a:p>
-          <a:p xmlns:a="http://schemas.openxmlformats.org/drawingml/2006/main">
-            <a:r>
-              <a:t>    "newyork_2023": 4.2</a:t>
-            </a:r>
-          </a:p>
-          <a:p xmlns:a="http://schemas.openxmlformats.org/drawingml/2006/main">
-            <a:r>
-              <a:t>  },</a:t>
-            </a:r>
-          </a:p>
-          <a:p xmlns:a="http://schemas.openxmlformats.org/drawingml/2006/main">
-            <a:r>
-              <a:t>  "maternal_mortality_per100000": {</a:t>
-            </a:r>
-          </a:p>
-          <a:p xmlns:a="http://schemas.openxmlformats.org/drawingml/2006/main">
-            <a:r>
-              <a:t>    "shanghai_2025": 1.85,</a:t>
-            </a:r>
-          </a:p>
-          <a:p xmlns:a="http://schemas.openxmlformats.org/drawingml/2006/main">
-            <a:r>
-              <a:t>    "newyork_2022_42day_estimate": 21</a:t>
-            </a:r>
-          </a:p>
-          <a:p xmlns:a="http://schemas.openxmlformats.org/drawingml/2006/main">
-            <a:r>
-              <a:t>  },</a:t>
-            </a:r>
-          </a:p>
-          <a:p xmlns:a="http://schemas.openxmlformats.org/drawingml/2006/main">
-            <a:r>
-              <a:t>  "life_expectancy": {</a:t>
-            </a:r>
-          </a:p>
-          <a:p xmlns:a="http://schemas.openxmlformats.org/drawingml/2006/main">
-            <a:r>
-              <a:t>    "shanghai_2022_registered": 83.18,</a:t>
-            </a:r>
-          </a:p>
-          <a:p xmlns:a="http://schemas.openxmlformats.org/drawingml/2006/main">
-            <a:r>
-              <a:t>    "newyork_2024_provisional": 83.2</a:t>
-            </a:r>
-          </a:p>
-          <a:p xmlns:a="http://schemas.openxmlformats.org/drawingml/2006/main">
-            <a:r>
-              <a:t>  },</a:t>
-            </a:r>
-          </a:p>
-          <a:p xmlns:a="http://schemas.openxmlformats.org/drawingml/2006/main">
-            <a:r>
-              <a:t>  "practice": "2024年卫生健康支出732.22亿元；2025年医保参保2042.45万人。",</a:t>
-            </a:r>
-          </a:p>
-          <a:p xmlns:a="http://schemas.openxmlformats.org/drawingml/2006/main">
-            <a:r>
-              <a:t>  "footnote": "纽约孕产妇死亡约21/10万由报告按产后42天折算；两项医疗结局统计年份不同。",</a:t>
-            </a:r>
-          </a:p>
-          <a:p xmlns:a="http://schemas.openxmlformats.org/drawingml/2006/main">
-            <a:r>
-              <a:t>  "sources": [</a:t>
-            </a:r>
-          </a:p>
-          <a:p xmlns:a="http://schemas.openxmlformats.org/drawingml/2006/main">
-            <a:r>
-              <a:t>    "https://tjj.sh.gov.cn/tjgb/20260330/e0772941e8e041eaaad2df850b44ef98.html",</a:t>
-            </a:r>
-          </a:p>
-          <a:p xmlns:a="http://schemas.openxmlformats.org/drawingml/2006/main">
-            <a:r>
-              <a:t>    "https://wsjkw.sh.gov.cn/tjsj2/20260730/7154e5b1603642a8a3c7c0b2b8b3b149.html",</a:t>
-            </a:r>
-          </a:p>
-          <a:p xmlns:a="http://schemas.openxmlformats.org/drawingml/2006/main">
-            <a:r>
-              <a:t>    "https://www.nyc.gov/assets/doh/downloads/pdf/vs/2023sum.pdf",</a:t>
-            </a:r>
-          </a:p>
-          <a:p xmlns:a="http://schemas.openxmlformats.org/drawingml/2006/main">
-            <a:r>
-              <a:t>    "https://www.nyc.gov/assets/doh/downloads/pdf/data/maternal-mortality-annual-report-2025.pdf"</a:t>
-            </a:r>
-          </a:p>
-          <a:p xmlns:a="http://schemas.openxmlformats.org/drawingml/2006/main">
-            <a:r>
-              <a:t>  ]</a:t>
-            </a:r>
-          </a:p>
-          <a:p xmlns:a="http://schemas.openxmlformats.org/drawingml/2006/main">
-            <a:r>
-              <a:t>}</a:t>
-            </a:r>
-          </a:p>
-          <a:p xmlns:a="http://schemas.openxmlformats.org/drawingml/2006/main">
-            <a:r>
-              <a:t/>
-            </a:r>
-          </a:p>
-          <a:p xmlns:a="http://schemas.openxmlformats.org/drawingml/2006/main">
-            <a:r>
-              <a:t>{</a:t>
-            </a:r>
-          </a:p>
-          <a:p xmlns:a="http://schemas.openxmlformats.org/drawingml/2006/main">
-            <a:r>
-              <a:t>  "item": "治安",</a:t>
-            </a:r>
-          </a:p>
-          <a:p xmlns:a="http://schemas.openxmlformats.org/drawingml/2006/main">
-            <a:r>
-              <a:t>  "winner": "上海",</a:t>
-            </a:r>
-          </a:p>
-          <a:p xmlns:a="http://schemas.openxmlformats.org/drawingml/2006/main">
-            <a:r>
-              <a:t>  "degree": "压倒性",</a:t>
-            </a:r>
-          </a:p>
-          <a:p xmlns:a="http://schemas.openxmlformats.org/drawingml/2006/main">
-            <a:r>
-              <a:t>  "shanghai_2024_count": 46,</a:t>
-            </a:r>
-          </a:p>
-          <a:p xmlns:a="http://schemas.openxmlformats.org/drawingml/2006/main">
-            <a:r>
-              <a:t>  "newyork_2025_count": 305,</a:t>
-            </a:r>
-          </a:p>
-          <a:p xmlns:a="http://schemas.openxmlformats.org/drawingml/2006/main">
-            <a:r>
-              <a:t>  "per100000": {</a:t>
-            </a:r>
-          </a:p>
-          <a:p xmlns:a="http://schemas.openxmlformats.org/drawingml/2006/main">
-            <a:r>
-              <a:t>    "shanghai": 0.19,</a:t>
-            </a:r>
-          </a:p>
-          <a:p xmlns:a="http://schemas.openxmlformats.org/drawingml/2006/main">
-            <a:r>
-              <a:t>    "newyork": 3.6</a:t>
-            </a:r>
-          </a:p>
-          <a:p xmlns:a="http://schemas.openxmlformats.org/drawingml/2006/main">
-            <a:r>
-              <a:t>  },</a:t>
-            </a:r>
-          </a:p>
-          <a:p xmlns:a="http://schemas.openxmlformats.org/drawingml/2006/main">
-            <a:r>
-              <a:t>  "ratio": 19,</a:t>
-            </a:r>
-          </a:p>
-          <a:p xmlns:a="http://schemas.openxmlformats.org/drawingml/2006/main">
-            <a:r>
-              <a:t>  "footnote": "上海为杀人案立案，纽约为谋杀案；年份不同，比率由案件与人口计算。",</a:t>
-            </a:r>
-          </a:p>
-          <a:p xmlns:a="http://schemas.openxmlformats.org/drawingml/2006/main">
-            <a:r>
-              <a:t>  "sources": [</a:t>
-            </a:r>
-          </a:p>
-          <a:p xmlns:a="http://schemas.openxmlformats.org/drawingml/2006/main">
-            <a:r>
-              <a:t>    "https://tjj.sh.gov.cn/tjnj/2025tjnj/C2303.htm",</a:t>
-            </a:r>
-          </a:p>
-          <a:p xmlns:a="http://schemas.openxmlformats.org/drawingml/2006/main">
-            <a:r>
-              <a:t>    "https://www.nyc.gov/site/nypd/news/PR001/nypd-safest-year-ever-gun-violence-fewest-shooting-incidents-shooting"</a:t>
-            </a:r>
-          </a:p>
-          <a:p xmlns:a="http://schemas.openxmlformats.org/drawingml/2006/main">
-            <a:r>
-              <a:t>  ]</a:t>
-            </a:r>
-          </a:p>
-          <a:p xmlns:a="http://schemas.openxmlformats.org/drawingml/2006/main">
-            <a:r>
-              <a:t>}</a:t>
-            </a:r>
-          </a:p>
-          <a:p xmlns:a="http://schemas.openxmlformats.org/drawingml/2006/main">
-            <a:r>
-              <a:t/>
-            </a:r>
-          </a:p>
-          <a:p xmlns:a="http://schemas.openxmlformats.org/drawingml/2006/main">
-            <a:r>
-              <a:t>{</a:t>
-            </a:r>
-          </a:p>
-          <a:p xmlns:a="http://schemas.openxmlformats.org/drawingml/2006/main">
-            <a:r>
-              <a:t>  "item": "教育",</a:t>
-            </a:r>
-          </a:p>
-          <a:p xmlns:a="http://schemas.openxmlformats.org/drawingml/2006/main">
-            <a:r>
-              <a:t>  "winner": "打平",</a:t>
-            </a:r>
-          </a:p>
-          <a:p xmlns:a="http://schemas.openxmlformats.org/drawingml/2006/main">
-            <a:r>
-              <a:t>  "degree": "—",</a:t>
-            </a:r>
-          </a:p>
-          <a:p xmlns:a="http://schemas.openxmlformats.org/drawingml/2006/main">
-            <a:r>
-              <a:t>  "student_teacher": {</a:t>
-            </a:r>
-          </a:p>
-          <a:p xmlns:a="http://schemas.openxmlformats.org/drawingml/2006/main">
-            <a:r>
-              <a:t>    "shanghai_2024": 12.5,</a:t>
-            </a:r>
-          </a:p>
-          <a:p xmlns:a="http://schemas.openxmlformats.org/drawingml/2006/main">
-            <a:r>
-              <a:t>    "newyork_2024_25": 13.2</a:t>
-            </a:r>
-          </a:p>
-          <a:p xmlns:a="http://schemas.openxmlformats.org/drawingml/2006/main">
-            <a:r>
-              <a:t>  },</a:t>
-            </a:r>
-          </a:p>
-          <a:p xmlns:a="http://schemas.openxmlformats.org/drawingml/2006/main">
-            <a:r>
-              <a:t>  "shanghai_primary_district_range": "9.0–15.1",</a:t>
-            </a:r>
-          </a:p>
-          <a:p xmlns:a="http://schemas.openxmlformats.org/drawingml/2006/main">
-            <a:r>
-              <a:t>  "nyc_district_range": "8.7–13.9",</a:t>
-            </a:r>
-          </a:p>
-          <a:p xmlns:a="http://schemas.openxmlformats.org/drawingml/2006/main">
-            <a:r>
-              <a:t>  "shanghai_net_enrolment_primary_junior": 99.9,</a:t>
-            </a:r>
-          </a:p>
-          <a:p xmlns:a="http://schemas.openxmlformats.org/drawingml/2006/main">
-            <a:r>
-              <a:t>  "footnote": "生师比由官方学生与教师数计算；上海中小学含高中，纽约为K–12。",</a:t>
-            </a:r>
-          </a:p>
-          <a:p xmlns:a="http://schemas.openxmlformats.org/drawingml/2006/main">
-            <a:r>
-              <a:t>  "sources": [</a:t>
-            </a:r>
-          </a:p>
-          <a:p xmlns:a="http://schemas.openxmlformats.org/drawingml/2006/main">
-            <a:r>
-              <a:t>    "https://tjj.sh.gov.cn/tjnj/2025tjnj/C2015.htm",</a:t>
-            </a:r>
-          </a:p>
-          <a:p xmlns:a="http://schemas.openxmlformats.org/drawingml/2006/main">
-            <a:r>
-              <a:t>    "https://tjj.sh.gov.cn/tjnj/2025tjnj/C2013.htm",</a:t>
-            </a:r>
-          </a:p>
-          <a:p xmlns:a="http://schemas.openxmlformats.org/drawingml/2006/main">
-            <a:r>
-              <a:t>    "https://tjj.sh.gov.cn/tjnj/2025tjnj/C2004.htm",</a:t>
-            </a:r>
-          </a:p>
-          <a:p xmlns:a="http://schemas.openxmlformats.org/drawingml/2006/main">
-            <a:r>
-              <a:t>    "https://data.nysed.gov/studenteducator.php?year=2025&amp;instid=7889678368"</a:t>
-            </a:r>
-          </a:p>
-          <a:p xmlns:a="http://schemas.openxmlformats.org/drawingml/2006/main">
-            <a:r>
-              <a:t>  ]</a:t>
-            </a:r>
-          </a:p>
-          <a:p xmlns:a="http://schemas.openxmlformats.org/drawingml/2006/main">
-            <a:r>
-              <a:t>}</a:t>
-            </a:r>
-          </a:p>
-          <a:p xmlns:a="http://schemas.openxmlformats.org/drawingml/2006/main">
-            <a:r>
-              <a:t/>
-            </a:r>
-          </a:p>
-          <a:p xmlns:a="http://schemas.openxmlformats.org/drawingml/2006/main">
-            <a:r>
-              <a:t>{</a:t>
-            </a:r>
-          </a:p>
-          <a:p xmlns:a="http://schemas.openxmlformats.org/drawingml/2006/main">
-            <a:r>
-              <a:t>  "item": "文化",</a:t>
-            </a:r>
-          </a:p>
-          <a:p xmlns:a="http://schemas.openxmlformats.org/drawingml/2006/main">
-            <a:r>
-              <a:t>  "winner": "纽约",</a:t>
-            </a:r>
-          </a:p>
-          <a:p xmlns:a="http://schemas.openxmlformats.org/drawingml/2006/main">
-            <a:r>
-              <a:t>  "degree": "明显",</a:t>
-            </a:r>
-          </a:p>
-          <a:p xmlns:a="http://schemas.openxmlformats.org/drawingml/2006/main">
-            <a:r>
-              <a:t>  "nyc_library_branches": "200余",</a:t>
-            </a:r>
-          </a:p>
-          <a:p xmlns:a="http://schemas.openxmlformats.org/drawingml/2006/main">
-            <a:r>
-              <a:t>  "cdf_orgs_fy2026": 1171,</a:t>
-            </a:r>
-          </a:p>
-          <a:p xmlns:a="http://schemas.openxmlformats.org/drawingml/2006/main">
-            <a:r>
-              <a:t>  "cdf_free_or_subsidised_pct": 96,</a:t>
-            </a:r>
-          </a:p>
-          <a:p xmlns:a="http://schemas.openxmlformats.org/drawingml/2006/main">
-            <a:r>
-              <a:t>  "cdf_amount_usd": 74300000,</a:t>
-            </a:r>
-          </a:p>
-          <a:p xmlns:a="http://schemas.openxmlformats.org/drawingml/2006/main">
-            <a:r>
-              <a:t>  "practice": "上海2025年营业性演出6.14万场，博物馆174个，公园1100座；生活圈1600基本单元。",</a:t>
-            </a:r>
-          </a:p>
-          <a:p xmlns:a="http://schemas.openxmlformats.org/drawingml/2006/main">
-            <a:r>
-              <a:t>  "footnote": "按公共图书馆网络与文化资助作判断；上海市区馆20个不用于与纽约全部网点硬比。",</a:t>
-            </a:r>
-          </a:p>
-          <a:p xmlns:a="http://schemas.openxmlformats.org/drawingml/2006/main">
-            <a:r>
-              <a:t>  "sources": [</a:t>
-            </a:r>
-          </a:p>
-          <a:p xmlns:a="http://schemas.openxmlformats.org/drawingml/2006/main">
-            <a:r>
-              <a:t>    "https://www.nypl.org/about/locations",</a:t>
-            </a:r>
-          </a:p>
-          <a:p xmlns:a="http://schemas.openxmlformats.org/drawingml/2006/main">
-            <a:r>
-              <a:t>    "https://www.bklynlibrary.org/browse-the-branches/about",</a:t>
-            </a:r>
-          </a:p>
-          <a:p xmlns:a="http://schemas.openxmlformats.org/drawingml/2006/main">
-            <a:r>
-              <a:t>    "http://gis.nyc.gov/site/dcla/about/pressrelease/PR-2026-2-26-NYC-Department-of-Cultural-Affairs-Announces-74.3-Million-in-Grants-for-1171-Cultural-Organizations-Across-the-City.page",</a:t>
-            </a:r>
-          </a:p>
-          <a:p xmlns:a="http://schemas.openxmlformats.org/drawingml/2006/main">
-            <a:r>
-              <a:t>    "https://tjj.sh.gov.cn/tjgb/20260330/e0772941e8e041eaaad2df850b44ef98.html",</a:t>
-            </a:r>
-          </a:p>
-          <a:p xmlns:a="http://schemas.openxmlformats.org/drawingml/2006/main">
-            <a:r>
-              <a:t>    "https://english.shanghai.gov.cn/en-Latest-WhatsNew/20260212/af11d8de7fd24819bff50c940e428855.html"</a:t>
-            </a:r>
-          </a:p>
-          <a:p xmlns:a="http://schemas.openxmlformats.org/drawingml/2006/main">
-            <a:r>
-              <a:t>  ]</a:t>
-            </a:r>
-          </a:p>
-          <a:p xmlns:a="http://schemas.openxmlformats.org/drawingml/2006/main">
-            <a:r>
-              <a:t>}</a:t>
+          <a:p xmlns:a="http://schemas.openxmlformats.org/drawingml/2006/main"/>
+          <a:p xmlns:a="http://schemas.openxmlformats.org/drawingml/2006/main">
+            <a:r>
+              <a:t>口径：</a:t>
+            </a:r>
+          </a:p>
+          <a:p xmlns:a="http://schemas.openxmlformats.org/drawingml/2006/main">
+            <a:r>
+              <a:t>纽约孕产妇死亡约21/10万由报告按产后42天折算；两项医疗结局统计年份不同。</a:t>
+            </a:r>
+          </a:p>
+          <a:p xmlns:a="http://schemas.openxmlformats.org/drawingml/2006/main">
+            <a:r>
+              <a:t>上海为杀人案立案，纽约为谋杀案；年份不同，比率由案件与人口计算。</a:t>
+            </a:r>
+          </a:p>
+          <a:p xmlns:a="http://schemas.openxmlformats.org/drawingml/2006/main">
+            <a:r>
+              <a:t>生师比由官方学生与教师数计算；上海中小学含高中，纽约为K–12。</a:t>
+            </a:r>
+          </a:p>
+          <a:p xmlns:a="http://schemas.openxmlformats.org/drawingml/2006/main">
+            <a:r>
+              <a:t>按公共图书馆网络与文化资助作判断；上海市区馆20个不用于与纽约全部网点硬比。</a:t>
             </a:r>
           </a:p>
         </p:txBody>
@@ -7743,11 +3879,7 @@
               <a:t>15分钟讲述取舍：只报纽约总量与街头露宿人数，不再串报贫困率、收容所日均和庇护者人数。</a:t>
             </a:r>
           </a:p>
-          <a:p xmlns:a="http://schemas.openxmlformats.org/drawingml/2006/main">
-            <a:r>
-              <a:t/>
-            </a:r>
-          </a:p>
+          <a:p xmlns:a="http://schemas.openxmlformats.org/drawingml/2006/main"/>
           <a:p xmlns:a="http://schemas.openxmlformats.org/drawingml/2006/main">
             <a:r>
               <a:t>讲稿原文</a:t>
@@ -7758,51 +3890,31 @@
               <a:t>最后一项，是两座城市怎么对待最穷的人。</a:t>
             </a:r>
           </a:p>
-          <a:p xmlns:a="http://schemas.openxmlformats.org/drawingml/2006/main">
-            <a:r>
-              <a:t/>
-            </a:r>
-          </a:p>
+          <a:p xmlns:a="http://schemas.openxmlformats.org/drawingml/2006/main"/>
           <a:p xmlns:a="http://schemas.openxmlformats.org/drawingml/2006/main">
             <a:r>
               <a:t>上海的做法是先把网铺开，真穷到底了，有人接着。低保标准城乡统一，2026 年 7 月起是每人每月 1,690 元；吃饭有近 2,500 个老年助餐点，养老有社区为老服务中心，找工作有 500 多个家门口的就业服务站。</a:t>
             </a:r>
           </a:p>
-          <a:p xmlns:a="http://schemas.openxmlformats.org/drawingml/2006/main">
-            <a:r>
-              <a:t/>
-            </a:r>
-          </a:p>
+          <a:p xmlns:a="http://schemas.openxmlformats.org/drawingml/2006/main"/>
           <a:p xmlns:a="http://schemas.openxmlformats.org/drawingml/2006/main">
             <a:r>
               <a:t>纽约这边，官方贫困率 18%，布朗克斯区接近 29%。2025 年 1 月联邦政府做了一次一夜点数，纽约市无家可归的有 12.6 万人，其中 4,600 多人直接睡在街上。</a:t>
             </a:r>
           </a:p>
-          <a:p xmlns:a="http://schemas.openxmlformats.org/drawingml/2006/main">
-            <a:r>
-              <a:t/>
-            </a:r>
-          </a:p>
+          <a:p xmlns:a="http://schemas.openxmlformats.org/drawingml/2006/main"/>
           <a:p xmlns:a="http://schemas.openxmlformats.org/drawingml/2006/main">
             <a:r>
               <a:t>最让人想不通的是，纽约不是不知道这些人在哪里。收容所住了多少人，市政府每天公布，2026 年 3 月平均每天约八万五千人。问题出在出口上：全市租房空置率只有 1.4%，收容所里的人找不到房子可搬。人数数得清清楚楚，问题就是解决不了。</a:t>
             </a:r>
           </a:p>
-          <a:p xmlns:a="http://schemas.openxmlformats.org/drawingml/2006/main">
-            <a:r>
-              <a:t/>
-            </a:r>
-          </a:p>
+          <a:p xmlns:a="http://schemas.openxmlformats.org/drawingml/2006/main"/>
           <a:p xmlns:a="http://schemas.openxmlformats.org/drawingml/2006/main">
             <a:r>
               <a:t>上海有多少人露宿街头？官方没有公布，我们不估。能比的，是两边的做法和纽约公布的结果：上海的托底从低保铺到了吃饭、养老、找工作；纽约自己公布的数字里，有十二万多人没有住处。对待最穷的人，上海做得好得多，这也是纽约失分最重的一题。</a:t>
             </a:r>
           </a:p>
-          <a:p xmlns:a="http://schemas.openxmlformats.org/drawingml/2006/main">
-            <a:r>
-              <a:t/>
-            </a:r>
-          </a:p>
+          <a:p xmlns:a="http://schemas.openxmlformats.org/drawingml/2006/main"/>
           <a:p xmlns:a="http://schemas.openxmlformats.org/drawingml/2006/main">
             <a:r>
               <a:t>数据来源与完整口径</a:t>
@@ -7833,119 +3945,15 @@
               <a:t>https://tjj.sh.gov.cn/tjgb/20260330/e0772941e8e041eaaad2df850b44ef98.html</a:t>
             </a:r>
           </a:p>
-          <a:p xmlns:a="http://schemas.openxmlformats.org/drawingml/2006/main">
-            <a:r>
-              <a:t>{</a:t>
-            </a:r>
-          </a:p>
-          <a:p xmlns:a="http://schemas.openxmlformats.org/drawingml/2006/main">
-            <a:r>
-              <a:t>  "item": "对待底层",</a:t>
-            </a:r>
-          </a:p>
-          <a:p xmlns:a="http://schemas.openxmlformats.org/drawingml/2006/main">
-            <a:r>
-              <a:t>  "winner": "上海",</a:t>
-            </a:r>
-          </a:p>
-          <a:p xmlns:a="http://schemas.openxmlformats.org/drawingml/2006/main">
-            <a:r>
-              <a:t>  "degree": "压倒性",</a:t>
-            </a:r>
-          </a:p>
-          <a:p xmlns:a="http://schemas.openxmlformats.org/drawingml/2006/main">
-            <a:r>
-              <a:t>  "nyc_homeless_jan2025": 125683,</a:t>
-            </a:r>
-          </a:p>
-          <a:p xmlns:a="http://schemas.openxmlformats.org/drawingml/2006/main">
-            <a:r>
-              <a:t>  "nyc_unsheltered_jan2025": 4673,</a:t>
-            </a:r>
-          </a:p>
-          <a:p xmlns:a="http://schemas.openxmlformats.org/drawingml/2006/main">
-            <a:r>
-              <a:t>  "nyc_poverty_2024_pct": 18,</a:t>
-            </a:r>
-          </a:p>
-          <a:p xmlns:a="http://schemas.openxmlformats.org/drawingml/2006/main">
-            <a:r>
-              <a:t>  "bronx_poverty_2024_pct": 28.8,</a:t>
-            </a:r>
-          </a:p>
-          <a:p xmlns:a="http://schemas.openxmlformats.org/drawingml/2006/main">
-            <a:r>
-              <a:t>  "nyc_dhs_daily_average_mar2026": 84908,</a:t>
-            </a:r>
-          </a:p>
-          <a:p xmlns:a="http://schemas.openxmlformats.org/drawingml/2006/main">
-            <a:r>
-              <a:t>  "shanghai_minimum_living_standard_cny_month": 1690,</a:t>
-            </a:r>
-          </a:p>
-          <a:p xmlns:a="http://schemas.openxmlformats.org/drawingml/2006/main">
-            <a:r>
-              <a:t>  "effective_date": "2026-07-01",</a:t>
-            </a:r>
-          </a:p>
-          <a:p xmlns:a="http://schemas.openxmlformats.org/drawingml/2006/main">
-            <a:r>
-              <a:t>  "shanghai_2025_elderly_centres": 557,</a:t>
-            </a:r>
-          </a:p>
-          <a:p xmlns:a="http://schemas.openxmlformats.org/drawingml/2006/main">
-            <a:r>
-              <a:t>  "shanghai_2025_meal_sites": 2498,</a:t>
-            </a:r>
-          </a:p>
-          <a:p xmlns:a="http://schemas.openxmlformats.org/drawingml/2006/main">
-            <a:r>
-              <a:t>  "shanghai_2025_employment_sites": 506,</a:t>
-            </a:r>
-          </a:p>
-          <a:p xmlns:a="http://schemas.openxmlformats.org/drawingml/2006/main">
-            <a:r>
-              <a:t>  "footnote": "纽约为HUD一夜点数；上海露宿人数未公开，判断结合托底制度与纽约结果。",</a:t>
-            </a:r>
-          </a:p>
-          <a:p xmlns:a="http://schemas.openxmlformats.org/drawingml/2006/main">
-            <a:r>
-              <a:t>  "sources": [</a:t>
-            </a:r>
-          </a:p>
-          <a:p xmlns:a="http://schemas.openxmlformats.org/drawingml/2006/main">
-            <a:r>
-              <a:t>    "https://files.hudexchange.info/reports/published/CoC_PopSub_CoC_NY-600-2025_NY_2025.pdf",</a:t>
-            </a:r>
-          </a:p>
-          <a:p xmlns:a="http://schemas.openxmlformats.org/drawingml/2006/main">
-            <a:r>
-              <a:t>    "https://rentguidelinesboard.cityofnewyork.us/wp-content/uploads/2026/04/2026-IA.pdf",</a:t>
-            </a:r>
-          </a:p>
-          <a:p xmlns:a="http://schemas.openxmlformats.org/drawingml/2006/main">
-            <a:r>
-              <a:t>    "https://www.nyc.gov/assets/dhs/downloads/pdf/dashboard/tables/FY26-DHS-Data-Dashboard-Data.pdf",</a:t>
-            </a:r>
-          </a:p>
-          <a:p xmlns:a="http://schemas.openxmlformats.org/drawingml/2006/main">
-            <a:r>
-              <a:t>    "https://mzj.sh.gov.cn/MZ_zhuzhan277_0-2-8-15-55-229/20260702/d95374094d6041a19b2591fd241126cb.html",</a:t>
-            </a:r>
-          </a:p>
-          <a:p xmlns:a="http://schemas.openxmlformats.org/drawingml/2006/main">
-            <a:r>
-              <a:t>    "https://tjj.sh.gov.cn/tjgb/20260330/e0772941e8e041eaaad2df850b44ef98.html"</a:t>
-            </a:r>
-          </a:p>
-          <a:p xmlns:a="http://schemas.openxmlformats.org/drawingml/2006/main">
-            <a:r>
-              <a:t>  ]</a:t>
-            </a:r>
-          </a:p>
-          <a:p xmlns:a="http://schemas.openxmlformats.org/drawingml/2006/main">
-            <a:r>
-              <a:t>}</a:t>
+          <a:p xmlns:a="http://schemas.openxmlformats.org/drawingml/2006/main"/>
+          <a:p xmlns:a="http://schemas.openxmlformats.org/drawingml/2006/main">
+            <a:r>
+              <a:t>口径：</a:t>
+            </a:r>
+          </a:p>
+          <a:p xmlns:a="http://schemas.openxmlformats.org/drawingml/2006/main">
+            <a:r>
+              <a:t>纽约为HUD一夜点数；上海露宿人数未公开，判断结合托底制度与纽约结果。</a:t>
             </a:r>
           </a:p>
         </p:txBody>
@@ -8023,11 +4031,7 @@
               <a:t>15分钟讲述取舍：从文化与养老接到“上海做了什么”；只说空间分布，四个百分比不逐个念。</a:t>
             </a:r>
           </a:p>
-          <a:p xmlns:a="http://schemas.openxmlformats.org/drawingml/2006/main">
-            <a:r>
-              <a:t/>
-            </a:r>
-          </a:p>
+          <a:p xmlns:a="http://schemas.openxmlformats.org/drawingml/2006/main"/>
           <a:p xmlns:a="http://schemas.openxmlformats.org/drawingml/2006/main">
             <a:r>
               <a:t>讲稿原文</a:t>
@@ -8035,14 +4039,15 @@
           </a:p>
           <a:p xmlns:a="http://schemas.openxmlformats.org/drawingml/2006/main">
             <a:r>
-              <a:t/>
-            </a:r>
-          </a:p>
-          <a:p xmlns:a="http://schemas.openxmlformats.org/drawingml/2006/main">
-            <a:r>
-              <a:t/>
-            </a:r>
-          </a:p>
+              <a:t>九道题之外，再补两件上海做的事。先看托底的服务离居民有多近。我们拿开放地图的数据，在中心七区算了一笔账：住宅用地里，一公里内有社区长者食堂的占 87.5%，有图书馆服务点的占 77%，有市民健身中心的只占 64%。</a:t>
+            </a:r>
+          </a:p>
+          <a:p xmlns:a="http://schemas.openxmlformats.org/drawingml/2006/main">
+            <a:r>
+              <a:t>吃饭这件事，基本已经送到了家门口；健身设施还有三分之一多的住宅区够不着。这组数按直线距离算，看的是分布：哪里方便，哪里还要补，图上一目了然。</a:t>
+            </a:r>
+          </a:p>
+          <a:p xmlns:a="http://schemas.openxmlformats.org/drawingml/2006/main"/>
           <a:p xmlns:a="http://schemas.openxmlformats.org/drawingml/2006/main">
             <a:r>
               <a:t>数据来源与完整口径</a:t>

--- a/人民城市的上海实践.pptx
+++ b/人民城市的上海实践.pptx
@@ -19875,7 +19875,7 @@
       </p:sp>
       <p:pic>
         <p:nvPicPr>
-          <p:cNvPr id="9" name="">
+          <p:cNvPr id="9" name="" descr="2025年上海市统计公报官网完整句：全年完成零星旧改12万平方米，受益居民4354户。">
             <a:extLst xmlns:a="http://schemas.openxmlformats.org/drawingml/2006/main">
               <a:ext uri="{FF2B5EF4-FFF2-40B4-BE49-F238E27FC236}">
                 <a16:creationId xmlns:a16="http://schemas.microsoft.com/office/drawing/2014/main" id="{6B8709F6-A6A9-43EE-A56C-0C6BB339D9FD}"/>
@@ -19893,8 +19893,8 @@
         </p:blipFill>
         <p:spPr>
           <a:xfrm xmlns:a="http://schemas.openxmlformats.org/drawingml/2006/main">
-            <a:off x="6343650" y="2281238"/>
-            <a:ext cx="5276850" cy="628650"/>
+            <a:off x="6343650" y="2533650"/>
+            <a:ext cx="5276850" cy="327016"/>
           </a:xfrm>
           <a:prstGeom xmlns:a="http://schemas.openxmlformats.org/drawingml/2006/main" prst="rect">
             <a:avLst/>
@@ -20192,6 +20192,74 @@
                 <a:cs typeface="Microsoft YaHei"/>
               </a:rPr>
               <a:t>自有住房率：上海2020年七普长表家庭户；纽约2023年HVS已入住住房，年份与分母不同。</a:t>
+            </a:r>
+          </a:p>
+        </p:txBody>
+      </p:sp>
+      <p:sp>
+        <p:nvSpPr>
+          <p:cNvPr id="15" name="housing-bulletin-source-caption">
+            <a:extLst xmlns:a="http://schemas.openxmlformats.org/drawingml/2006/main">
+              <a:ext uri="{FF2B5EF4-FFF2-40B4-BE49-F238E27FC236}">
+                <a16:creationId xmlns:a16="http://schemas.microsoft.com/office/drawing/2014/main" id="{090D71AC-4136-4E91-9EA4-3AED9DB04703}"/>
+              </a:ext>
+            </a:extLst>
+          </p:cNvPr>
+          <p:cNvSpPr>
+            <a:spLocks xmlns:a="http://schemas.openxmlformats.org/drawingml/2006/main" noGrp="1"/>
+          </p:cNvSpPr>
+          <p:nvPr/>
+        </p:nvSpPr>
+        <p:spPr>
+          <a:xfrm xmlns:a="http://schemas.openxmlformats.org/drawingml/2006/main">
+            <a:off x="6343650" y="2076450"/>
+            <a:ext cx="5276850" cy="285750"/>
+          </a:xfrm>
+          <a:prstGeom xmlns:a="http://schemas.openxmlformats.org/drawingml/2006/main" prst="rect">
+            <a:avLst/>
+          </a:prstGeom>
+          <a:noFill xmlns:a="http://schemas.openxmlformats.org/drawingml/2006/main"/>
+          <a:ln xmlns:a="http://schemas.openxmlformats.org/drawingml/2006/main" w="0">
+            <a:noFill/>
+          </a:ln>
+        </p:spPr>
+        <p:txBody>
+          <a:bodyPr xmlns:a="http://schemas.openxmlformats.org/drawingml/2006/main" wrap="none" lIns="0" tIns="0" rIns="0" bIns="0" anchor="t">
+            <a:noAutofit/>
+          </a:bodyPr>
+          <a:lstStyle xmlns:a="http://schemas.openxmlformats.org/drawingml/2006/main">
+            <a:defPPr>
+              <a:defRPr sz="1500" b="0">
+                <a:solidFill>
+                  <a:srgbClr val="5E7375"/>
+                </a:solidFill>
+                <a:latin typeface="Microsoft YaHei"/>
+                <a:ea typeface="Microsoft YaHei"/>
+                <a:cs typeface="Microsoft YaHei"/>
+              </a:defRPr>
+            </a:defPPr>
+          </a:lstStyle>
+          <a:p xmlns:a="http://schemas.openxmlformats.org/drawingml/2006/main">
+            <a:pPr>
+              <a:defRPr sz="1500" b="0">
+                <a:solidFill>
+                  <a:srgbClr val="5E7375"/>
+                </a:solidFill>
+                <a:latin typeface="Microsoft YaHei"/>
+                <a:ea typeface="Microsoft YaHei"/>
+                <a:cs typeface="Microsoft YaHei"/>
+              </a:defRPr>
+            </a:pPr>
+            <a:r>
+              <a:rPr sz="1500" b="0">
+                <a:solidFill>
+                  <a:srgbClr val="5E7375"/>
+                </a:solidFill>
+                <a:latin typeface="Microsoft YaHei"/>
+                <a:ea typeface="Microsoft YaHei"/>
+                <a:cs typeface="Microsoft YaHei"/>
+              </a:rPr>
+              <a:t>2025 年统计公报</a:t>
             </a:r>
           </a:p>
         </p:txBody>
